--- a/inbox/Application Aware Networking/Book_03_FedAAN_Certificates_Tokens_Cryptographic_Identity.pptx
+++ b/inbox/Application Aware Networking/Book_03_FedAAN_Certificates_Tokens_Cryptographic_Identity.pptx
@@ -31,9 +31,10 @@
     <p:sldId id="279" r:id="rId25"/>
     <p:sldId id="280" r:id="rId26"/>
     <p:sldId id="281" r:id="rId27"/>
+    <p:sldId id="282" r:id="rId28"/>
   </p:sldIdLst>
   <p:notesMasterIdLst>
-    <p:notesMasterId r:id="rId28"/>
+    <p:notesMasterId r:id="rId29"/>
   </p:notesMasterIdLst>
   <p:sldSz cx="9144000" cy="5143500"/>
   <p:notesSz cx="5143500" cy="9144000"/>
@@ -1595,8 +1596,8 @@
           <a:p>
             <a:r>
               <a:rPr lang="en-US" dirty="0"/>
-              <a:t>Build 1 of 2 — from Book 03's Machine and Workload Identity section. Open with the scale point: in a modernized environment, human authentications are a rounding error — every application-to-database connection, every pipeline deployment, every API call, every scheduled job authenticates, and historically each did so with a service-account password stored in a connection string, rotated never, known to an unknowable set of people and scripts. Generations 1 and 2 on the slide: the service account (password in configuration — exists everywhere the configuration goes; pass-the-hash, credential sprawl, rotation outages) and the service principal (client secret or certificate in the application's custody — better, but leaked-secret-in-repo and expiry outages remain). Advance for where this goes.
-Vendor sources: https://spiffe.io/ | uiao repo: inbox/Application Aware Networking/Book_03_FedAAN_Certificates_Tokens_Cryptographic_Identity.qmd</a:t>
+              <a:t>The federal compliance clock — added in the 2026-07-07 timeline pass; the fully-sourced version with the elapsed baseline lives in the Federal AAN / ConMon Gap Roadmap, the series' single source of truth for dates. Walk the rows: August 3 and 31, 2026 — FedRAMP 20x submission windows open, Class A first, then Class B and C, which is the GCC Moderate window (marketplace listings opened July 6; FedRAMP Ready went legacy July 28; temporary Rev5 conversion paths opened August 10). August 7, 2026 — BOD 26-04 (issued June 10, 2026) requires agency vulnerability-management policies to support risk-based remediation under its four-variable model: exposure, KEV listing, exploit automatability, and technical impact, with timelines from 3 days to deferral. September 21, 2026 — every FIPS 140-2 certificate moves to NIST's Historical List, ending new procurement reliance on 140-2-only validated modules; verify cryptographic modules are FIPS 140-3 tracked. December 7, 2026 — BOD 26-04's remediation timelines take force AND FedRAMP's Vulnerability Detection and Response / Vulnerability Evaluation and Reporting rules become mandatory: SBOM plus vendor disclosure. January 1, 2027 — the Consolidated Rules become mandatory for all FedRAMP systems, and CNSA 2.0's acquisition gate opens for National Security Systems (ML-KEM-1024, ML-DSA-87 — NSS-scoped, with the civilian trajectory following via M-23-02). June 11, 2027 — no new Rev5 certifications. Around August 2027 — the next scheduled NIST 800-53 release on the two-year cadence; note Release 5.2.0 (August 27, 2025) already added SA-15(13), SA-24, and SI-2(7), which are not yet mapped in the series' Parts 11/15 closure tables — a tracked action item. 2030/2035 — quantum-vulnerable cryptography is deprecated then prohibited; M-23-02's annual crypto inventories run to that horizon. The bottom bar reminds the audience of the mandates already in force: M-21-31 logging tiers, M-21-07 IPv6 targets, M-22-09 Zero Trust goals (past due but still measured, continued by M-24-14 and M-25-04), and BOD 25-01 SCuBA policies.
+Vendor sources: https://www.fedramp.gov/20x/ | https://www.cisa.gov/news-events/directives/bod-26-04-prioritizing-security-updates-based-risk | https://csrc.nist.gov/News/2025/nist-releases-revision-to-sp-800-53-controls | uiao repo: inbox/Application Aware Networking/federal-aan-conmon-gap-roadmap.md</a:t>
             </a:r>
             <a:endParaRPr lang="en-US" dirty="0"/>
           </a:p>
@@ -1684,7 +1685,7 @@
           <a:p>
             <a:r>
               <a:rPr lang="en-US" dirty="0"/>
-              <a:t>Build 2 of 2 — generations 3 and 4. Managed identity: a platform-issued token with NO credential in application custody at all — the platform attests the workload at runtime, and compromise requires compromising the workload itself, which is the irreducible case. Workload identity federation: an external workload exchanges its own platform's OIDC token for access — no secret crosses the boundary in either direction; the residual risk is trust misconfiguration, governed as policy rather than as secret custody. The progress-bar mnemonic from the book's figure: secret everywhere, secret somewhere, secret nowhere, secret nowhere on either side. The SPIFFE model formalizes the same doctrine for platform-agnostic environments: short-lived, automatically issued, attested credentials bound to a workload's verified identity rather than a stored secret. The hinge to the application books: Books 07-08 execute this progression end-to-end against the SQL Server estate — domain credentials replaced by platform-attested identities, connection strings stripped of passwords, NTLM eliminated by removing Kerberos's reason to fall back rather than by blocking a port. Later parts repeat the move against privileged sessions (Book 10), data-plane access (Book 12), and detection surfaces (Book 13) — none introduces new identity doctrine, because after this part there is none left to introduce.
+              <a:t>Build 1 of 2 — from Book 03's Machine and Workload Identity section. Open with the scale point: in a modernized environment, human authentications are a rounding error — every application-to-database connection, every pipeline deployment, every API call, every scheduled job authenticates, and historically each did so with a service-account password stored in a connection string, rotated never, known to an unknowable set of people and scripts. Generations 1 and 2 on the slide: the service account (password in configuration — exists everywhere the configuration goes; pass-the-hash, credential sprawl, rotation outages) and the service principal (client secret or certificate in the application's custody — better, but leaked-secret-in-repo and expiry outages remain). Advance for where this goes.
 Vendor sources: https://spiffe.io/ | uiao repo: inbox/Application Aware Networking/Book_03_FedAAN_Certificates_Tokens_Cryptographic_Identity.qmd</a:t>
             </a:r>
             <a:endParaRPr lang="en-US" dirty="0"/>
@@ -1773,8 +1774,8 @@
           <a:p>
             <a:r>
               <a:rPr lang="en-US" dirty="0"/>
-              <a:t>From Book 03's Where Keys Live section. The workload progression works only if private keys are held somewhere theft-resistant, and the storage hierarchy is a policy decision made once and enforced by enrollment profiles. Walk the descent: trust anchors, issuing-CA keys, and token-signing keys live in FIPS 140-validated HSMs — hardware-enforced non-exportability, keys are used but never read. Device and user credentials live in TPMs, smart cards, and platform authenticators — hardware-enforced, with attestation available at enrollment. Workload transport and application keys live in platform key services and managed vaults — platform-enforced, every access an audited API call under its own policy. Ephemeral session and federation keys live in memory with minutes-scale lifetimes — the lifetime IS the control. The rule in one line, repeating the trust-hierarchy pattern: the longer a key lives and the more it signs, the deeper in hardware it sits. The blue panel is the enforcement mechanism: enrollment-time attestation — the platform proving the key was generated in hardware BEFORE the CA issues against it — turns the hierarchy from an aspiration into an issuance gate; certificate templates simply refuse to issue to software-held keys where hardware exists. That is IA-5(2)(a)(1) implemented as protocol rather than procedure, at the Moderate baseline.
-Vendor sources: https://csrc.nist.gov/pubs/sp/800/53/r5/upd1/final | uiao repo: inbox/Application Aware Networking/Book_03_FedAAN_Certificates_Tokens_Cryptographic_Identity.qmd</a:t>
+              <a:t>Build 2 of 2 — generations 3 and 4. Managed identity: a platform-issued token with NO credential in application custody at all — the platform attests the workload at runtime, and compromise requires compromising the workload itself, which is the irreducible case. Workload identity federation: an external workload exchanges its own platform's OIDC token for access — no secret crosses the boundary in either direction; the residual risk is trust misconfiguration, governed as policy rather than as secret custody. The progress-bar mnemonic from the book's figure: secret everywhere, secret somewhere, secret nowhere, secret nowhere on either side. The SPIFFE model formalizes the same doctrine for platform-agnostic environments: short-lived, automatically issued, attested credentials bound to a workload's verified identity rather than a stored secret. The hinge to the application books: Books 07-08 execute this progression end-to-end against the SQL Server estate — domain credentials replaced by platform-attested identities, connection strings stripped of passwords, NTLM eliminated by removing Kerberos's reason to fall back rather than by blocking a port. Later parts repeat the move against privileged sessions (Book 10), data-plane access (Book 12), and detection surfaces (Book 13) — none introduces new identity doctrine, because after this part there is none left to introduce.
+Vendor sources: https://spiffe.io/ | uiao repo: inbox/Application Aware Networking/Book_03_FedAAN_Certificates_Tokens_Cryptographic_Identity.qmd</a:t>
             </a:r>
             <a:endParaRPr lang="en-US" dirty="0"/>
           </a:p>
@@ -1862,8 +1863,8 @@
           <a:p>
             <a:r>
               <a:rPr lang="en-US" dirty="0"/>
-              <a:t>Build 1 of 2 — from Book 03's Phased Implementation. The sequencing principle, verbatim: establish truth before demanding it — each phase creates the inventory and telemetry that make the next phase's enforcement decisions safe, and the ordering is not optional because each phase's gate is the previous phase's output. Phase 1, certificate estate discovery (weeks 1-4): network-scan every listener; export every CA database including the departmental ones nobody admits to; audit trust stores on representative endpoint and server populations; correlate everything against the IPAM inventory. Outputs: a certificate inventory keyed to DDI records, an unknown-issuer list for investigation, and a trust-anchor census scoping the SC-17(b) cleanup. In parallel, enable authentication-protocol auditing — the Kerberos/NTLM fallback measurement Book 07 requires begins here. Gate: every production certificate has an owner, an issuer, and an IPAM binding — or an investigation ticket. Phase 2, issuance automation (weeks 5-12): offline root ceremony, purpose-scoped issuing CAs on HSMs, CAA records in every public zone, the ACME service wired to the DDI API for DNS-01, SCEP/EST confirmed against the Book 02 device pipeline. New issuance flows through automation from this phase forward; existing certificates migrate at their next renewal. Gate: zero manual issuance requests for covered classes in a 30-day window.
-Vendor sources: https://www.cisa.gov/news-events/directives/bod-25-01-implementing-secure-practices-cloud-services | uiao repo: inbox/Application Aware Networking/Book_03_FedAAN_Certificates_Tokens_Cryptographic_Identity.qmd</a:t>
+              <a:t>From Book 03's Where Keys Live section. The workload progression works only if private keys are held somewhere theft-resistant, and the storage hierarchy is a policy decision made once and enforced by enrollment profiles. Walk the descent: trust anchors, issuing-CA keys, and token-signing keys live in FIPS 140-validated HSMs — hardware-enforced non-exportability, keys are used but never read. Device and user credentials live in TPMs, smart cards, and platform authenticators — hardware-enforced, with attestation available at enrollment. Workload transport and application keys live in platform key services and managed vaults — platform-enforced, every access an audited API call under its own policy. Ephemeral session and federation keys live in memory with minutes-scale lifetimes — the lifetime IS the control. The rule in one line, repeating the trust-hierarchy pattern: the longer a key lives and the more it signs, the deeper in hardware it sits. The blue panel is the enforcement mechanism: enrollment-time attestation — the platform proving the key was generated in hardware BEFORE the CA issues against it — turns the hierarchy from an aspiration into an issuance gate; certificate templates simply refuse to issue to software-held keys where hardware exists. That is IA-5(2)(a)(1) implemented as protocol rather than procedure, at the Moderate baseline.
+Vendor sources: https://csrc.nist.gov/pubs/sp/800/53/r5/upd1/final | uiao repo: inbox/Application Aware Networking/Book_03_FedAAN_Certificates_Tokens_Cryptographic_Identity.qmd</a:t>
             </a:r>
             <a:endParaRPr lang="en-US" dirty="0"/>
           </a:p>
@@ -1951,7 +1952,7 @@
           <a:p>
             <a:r>
               <a:rPr lang="en-US" dirty="0"/>
-              <a:t>Build 2 of 2 — enforcement. Phase 3, token migration and phishing-resistant enforcement (weeks 13-24): register applications against the identity provider; enforce phishing-resistant authenticators for privileged accounts first (IA-2(1)), then the general population (IA-2(2)); disable legacy authentication tenant-wide per the BOD 25-01 baseline — the step that converts MFA from a setting into a fact, because a protocol that bypasses the policy gate is a bypass of every policy the gate enforces. Report-only conditional access precedes enforcement at each step, using token telemetry to find the applications that would break before they break. Gate: legacy auth blocked with measured zero business impact; privileged access impossible without a phishing-resistant assertion. Phase 4, workload identity conversion (weeks 25-40): inventory every stored secret — connection strings, pipeline variables, configuration files; convert platform-resident workloads to managed identities; establish federation for cross-platform workloads; and EXPIRE the vacated secrets rather than merely abandoning them. Book 08 is the worked example for the database estate. Gate: the secret inventory trends monotonically to zero, and every remaining entry has a named exception with an expiry date.
+              <a:t>Build 1 of 2 — from Book 03's Phased Implementation. The sequencing principle, verbatim: establish truth before demanding it — each phase creates the inventory and telemetry that make the next phase's enforcement decisions safe, and the ordering is not optional because each phase's gate is the previous phase's output. Phase 1, certificate estate discovery (weeks 1-4): network-scan every listener; export every CA database including the departmental ones nobody admits to; audit trust stores on representative endpoint and server populations; correlate everything against the IPAM inventory. Outputs: a certificate inventory keyed to DDI records, an unknown-issuer list for investigation, and a trust-anchor census scoping the SC-17(b) cleanup. In parallel, enable authentication-protocol auditing — the Kerberos/NTLM fallback measurement Book 07 requires begins here. Gate: every production certificate has an owner, an issuer, and an IPAM binding — or an investigation ticket. Phase 2, issuance automation (weeks 5-12): offline root ceremony, purpose-scoped issuing CAs on HSMs, CAA records in every public zone, the ACME service wired to the DDI API for DNS-01, SCEP/EST confirmed against the Book 02 device pipeline. New issuance flows through automation from this phase forward; existing certificates migrate at their next renewal. Gate: zero manual issuance requests for covered classes in a 30-day window.
 Vendor sources: https://www.cisa.gov/news-events/directives/bod-25-01-implementing-secure-practices-cloud-services | uiao repo: inbox/Application Aware Networking/Book_03_FedAAN_Certificates_Tokens_Cryptographic_Identity.qmd</a:t>
             </a:r>
             <a:endParaRPr lang="en-US" dirty="0"/>
@@ -2040,8 +2041,8 @@
           <a:p>
             <a:r>
               <a:rPr lang="en-US" dirty="0"/>
-              <a:t>From Book 03's control closure table — five controls at the FedRAMP Moderate baseline, each with the Closure Necessity argument. IA-5(2) public-key authentication: Rev 5 requires constructing and verifying a certification path INCLUDING STATUS INFORMATION at authentication time — a per-authentication protocol act no manual process or scanner can perform; and because CRL/OCSP endpoints resolve through DNS, the DNSSEC-protected naming plane of Book 01 is not adjacent to this control — it is inside it. SC-12 key management: the control's five verbs — generation, distribution, storage, access, destruction — are managed properties that at machine scale (thousands of keys cycling weekly) can only hold when the provisioning platform executes the lifecycle, with keys born in hardware and destroyed in the decommission transaction; the arithmetic, not the ambition, is the constraint. SC-17 PKI certificates: issuance under policy requires issuance-time gates — CAA checked by protocol at every public issuance, enrollment authentication at every internal one; a policy document cannot refuse an issuance after the fact, and trust-anchor governance requires an authoritative inventory to diff against. IA-2(1) and IA-2(2) MFA: the controls close only with verifier-impersonation-resistant authenticators — a protocol property of hardware-held, origin/channel-bound keys; and MFA enforcement is real only if unenforceable paths are closed, which is why the legacy-protocol shutdown is part of the control implementation, not an optional hardening step. FedRAMP 20x: this book's evidence binds to slot-01 (KSI-IAM) — enrollment/renewal logs from the CA pipeline, token issuance and conditional-access evaluation records, authenticator-strength posture. ScuBA rules attest that identity SETTINGS match baseline; this book authors the intended state those settings drift from.
-Vendor sources: https://csrc.nist.gov/pubs/sp/800/53/r5/upd1/final | uiao repo: inbox/Application Aware Networking/Book_03_FedAAN_Certificates_Tokens_Cryptographic_Identity.qmd</a:t>
+              <a:t>Build 2 of 2 — enforcement. Phase 3, token migration and phishing-resistant enforcement (weeks 13-24): register applications against the identity provider; enforce phishing-resistant authenticators for privileged accounts first (IA-2(1)), then the general population (IA-2(2)); disable legacy authentication tenant-wide per the BOD 25-01 baseline — the step that converts MFA from a setting into a fact, because a protocol that bypasses the policy gate is a bypass of every policy the gate enforces. Report-only conditional access precedes enforcement at each step, using token telemetry to find the applications that would break before they break. Gate: legacy auth blocked with measured zero business impact; privileged access impossible without a phishing-resistant assertion. Phase 4, workload identity conversion (weeks 25-40): inventory every stored secret — connection strings, pipeline variables, configuration files; convert platform-resident workloads to managed identities; establish federation for cross-platform workloads; and EXPIRE the vacated secrets rather than merely abandoning them. Book 08 is the worked example for the database estate. Gate: the secret inventory trends monotonically to zero, and every remaining entry has a named exception with an expiry date.
+Vendor sources: https://www.cisa.gov/news-events/directives/bod-25-01-implementing-secure-practices-cloud-services | uiao repo: inbox/Application Aware Networking/Book_03_FedAAN_Certificates_Tokens_Cryptographic_Identity.qmd</a:t>
             </a:r>
             <a:endParaRPr lang="en-US" dirty="0"/>
           </a:p>
@@ -2129,7 +2130,7 @@
           <a:p>
             <a:r>
               <a:rPr lang="en-US" dirty="0"/>
-              <a:t>Closing slide. The doctrine in one paragraph, verbatim from the book: names are authoritative (Book 01), devices prove themselves with keys bound to names (Book 02), and every identity — human, device, workload — is a cryptographic claim about a name, issued under policy the naming plane enforces, carried in a credential no network path can break (Book 03). The network stopped being a place; after this part, identity no longer cares. Everything after this point in the series is application and evidence: Books 05-06 modernize the transport that made this identity model mandatory; Books 07-08 execute the doctrine against the database estate — the first proof that session-bound authentication can be REMOVED, not merely deprecated; the privileged-access, detection, and continuity parts consume the token-level telemetry this architecture emits; Book 19 assembles it into the authorization package. The asks: OIS validation of the NAC endpoint name-address-key binding (the design gap flagged in both Book 02 and Book 03); approval of the internal CA hierarchy design and the offline-root ceremony plan; enforcement dates for phishing-resistant MFA (privileged first, then general population); and ownership of the workload-secret exception register with expiry dates. All scoped to FedRAMP Moderate. The Date Code identifies this version; newest code wins.
+              <a:t>From Book 03's control closure table — five controls at the FedRAMP Moderate baseline, each with the Closure Necessity argument. IA-5(2) public-key authentication: Rev 5 requires constructing and verifying a certification path INCLUDING STATUS INFORMATION at authentication time — a per-authentication protocol act no manual process or scanner can perform; and because CRL/OCSP endpoints resolve through DNS, the DNSSEC-protected naming plane of Book 01 is not adjacent to this control — it is inside it. SC-12 key management: the control's five verbs — generation, distribution, storage, access, destruction — are managed properties that at machine scale (thousands of keys cycling weekly) can only hold when the provisioning platform executes the lifecycle, with keys born in hardware and destroyed in the decommission transaction; the arithmetic, not the ambition, is the constraint. SC-17 PKI certificates: issuance under policy requires issuance-time gates — CAA checked by protocol at every public issuance, enrollment authentication at every internal one; a policy document cannot refuse an issuance after the fact, and trust-anchor governance requires an authoritative inventory to diff against. IA-2(1) and IA-2(2) MFA: the controls close only with verifier-impersonation-resistant authenticators — a protocol property of hardware-held, origin/channel-bound keys; and MFA enforcement is real only if unenforceable paths are closed, which is why the legacy-protocol shutdown is part of the control implementation, not an optional hardening step. FedRAMP 20x: this book's evidence binds to slot-01 (KSI-IAM) — enrollment/renewal logs from the CA pipeline, token issuance and conditional-access evaluation records, authenticator-strength posture. ScuBA rules attest that identity SETTINGS match baseline; this book authors the intended state those settings drift from.
 Vendor sources: https://csrc.nist.gov/pubs/sp/800/53/r5/upd1/final | uiao repo: inbox/Application Aware Networking/Book_03_FedAAN_Certificates_Tokens_Cryptographic_Identity.qmd</a:t>
             </a:r>
             <a:endParaRPr lang="en-US" dirty="0"/>
@@ -2154,6 +2155,95 @@
             <a:fld id="{F7021451-1387-4CA6-816F-3879F97B5CBC}" type="slidenum">
               <a:rPr lang="en-US"/>
               <a:t>26</a:t>
+            </a:fld>
+            <a:endParaRPr lang="en-US"/>
+          </a:p>
+        </p:txBody>
+      </p:sp>
+    </p:spTree>
+    <p:extLst>
+      <p:ext uri="{BB962C8B-B14F-4D97-AF65-F5344CB8AC3E}">
+        <p14:creationId xmlns:p14="http://schemas.microsoft.com/office/powerpoint/2010/main" val="1024086991"/>
+      </p:ext>
+    </p:extLst>
+  </p:cSld>
+  <p:clrMapOvr>
+    <a:masterClrMapping/>
+  </p:clrMapOvr>
+</p:notes>
+</file>
+
+<file path=ppt/notesSlides/notesSlide27.xml><?xml version="1.0" encoding="utf-8"?>
+<p:notes xmlns:a="http://schemas.openxmlformats.org/drawingml/2006/main" xmlns:r="http://schemas.openxmlformats.org/officeDocument/2006/relationships" xmlns:p="http://schemas.openxmlformats.org/presentationml/2006/main">
+  <p:cSld>
+    <p:spTree>
+      <p:nvGrpSpPr>
+        <p:cNvPr id="1" name=""/>
+        <p:cNvGrpSpPr/>
+        <p:nvPr/>
+      </p:nvGrpSpPr>
+      <p:grpSpPr>
+        <a:xfrm>
+          <a:off x="0" y="0"/>
+          <a:ext cx="0" cy="0"/>
+          <a:chOff x="0" y="0"/>
+          <a:chExt cx="0" cy="0"/>
+        </a:xfrm>
+      </p:grpSpPr>
+      <p:sp>
+        <p:nvSpPr>
+          <p:cNvPr id="2" name="Slide Image Placeholder 1"/>
+          <p:cNvSpPr>
+            <a:spLocks noGrp="1" noRot="1" noChangeAspect="1"/>
+          </p:cNvSpPr>
+          <p:nvPr>
+            <p:ph type="sldImg"/>
+          </p:nvPr>
+        </p:nvSpPr>
+        <p:spPr/>
+      </p:sp>
+      <p:sp>
+        <p:nvSpPr>
+          <p:cNvPr id="3" name="Notes Placeholder 2"/>
+          <p:cNvSpPr>
+            <a:spLocks noGrp="1"/>
+          </p:cNvSpPr>
+          <p:nvPr>
+            <p:ph type="body" idx="1"/>
+          </p:nvPr>
+        </p:nvSpPr>
+        <p:spPr/>
+        <p:txBody>
+          <a:bodyPr/>
+          <a:lstStyle/>
+          <a:p>
+            <a:r>
+              <a:rPr lang="en-US" dirty="0"/>
+              <a:t>Closing slide. The doctrine in one paragraph, verbatim from the book: names are authoritative (Book 01), devices prove themselves with keys bound to names (Book 02), and every identity — human, device, workload — is a cryptographic claim about a name, issued under policy the naming plane enforces, carried in a credential no network path can break (Book 03). The network stopped being a place; after this part, identity no longer cares. Everything after this point in the series is application and evidence: Books 05-06 modernize the transport that made this identity model mandatory; Books 07-08 execute the doctrine against the database estate — the first proof that session-bound authentication can be REMOVED, not merely deprecated; the privileged-access, detection, and continuity parts consume the token-level telemetry this architecture emits; Book 19 assembles it into the authorization package. The asks: OIS validation of the NAC endpoint name-address-key binding (the design gap flagged in both Book 02 and Book 03); approval of the internal CA hierarchy design and the offline-root ceremony plan; enforcement dates for phishing-resistant MFA (privileged first, then general population); and ownership of the workload-secret exception register with expiry dates. All scoped to FedRAMP Moderate. The Date Code identifies this version; newest code wins.
+Vendor sources: https://csrc.nist.gov/pubs/sp/800/53/r5/upd1/final | uiao repo: inbox/Application Aware Networking/Book_03_FedAAN_Certificates_Tokens_Cryptographic_Identity.qmd</a:t>
+            </a:r>
+            <a:endParaRPr lang="en-US" dirty="0"/>
+          </a:p>
+        </p:txBody>
+      </p:sp>
+      <p:sp>
+        <p:nvSpPr>
+          <p:cNvPr id="4" name="Slide Number Placeholder 3"/>
+          <p:cNvSpPr>
+            <a:spLocks noGrp="1"/>
+          </p:cNvSpPr>
+          <p:nvPr>
+            <p:ph type="sldNum" sz="quarter" idx="10"/>
+          </p:nvPr>
+        </p:nvSpPr>
+        <p:spPr/>
+        <p:txBody>
+          <a:bodyPr/>
+          <a:lstStyle/>
+          <a:p>
+            <a:fld id="{F7021451-1387-4CA6-816F-3879F97B5CBC}" type="slidenum">
+              <a:rPr lang="en-US"/>
+              <a:t>27</a:t>
             </a:fld>
             <a:endParaRPr lang="en-US"/>
           </a:p>
@@ -3674,7 +3764,7 @@
                 <a:ea typeface="Arial" pitchFamily="34" charset="-122"/>
                 <a:cs typeface="Arial" pitchFamily="34" charset="-120"/>
               </a:rPr>
-              <a:t>Date Code: 2026-07-07 10:32 ET</a:t>
+              <a:t>Date Code: 2026-07-07 11:57 ET</a:t>
             </a:r>
             <a:endParaRPr lang="en-US" sz="1000" dirty="0"/>
           </a:p>
@@ -3889,7 +3979,7 @@
                 <a:ea typeface="Arial" pitchFamily="34" charset="-122"/>
                 <a:cs typeface="Arial" pitchFamily="34" charset="-120"/>
               </a:rPr>
-              <a:t>Federal AAN — Book 03 Certificates &amp; Tokens · CSI Team Draft — Internal · FedRAMP Moderate · Date Code 2026-07-07 10:32 ET</a:t>
+              <a:t>Federal AAN — Book 03 Certificates &amp; Tokens · CSI Team Draft — Internal · FedRAMP Moderate · Date Code 2026-07-07 11:57 ET</a:t>
             </a:r>
             <a:endParaRPr lang="en-US" sz="800" dirty="0"/>
           </a:p>
@@ -4590,7 +4680,7 @@
                 <a:ea typeface="Arial" pitchFamily="34" charset="-122"/>
                 <a:cs typeface="Arial" pitchFamily="34" charset="-120"/>
               </a:rPr>
-              <a:t>Federal AAN — Book 03 Certificates &amp; Tokens · CSI Team Draft — Internal · FedRAMP Moderate · Date Code 2026-07-07 10:32 ET</a:t>
+              <a:t>Federal AAN — Book 03 Certificates &amp; Tokens · CSI Team Draft — Internal · FedRAMP Moderate · Date Code 2026-07-07 11:57 ET</a:t>
             </a:r>
             <a:endParaRPr lang="en-US" sz="800" dirty="0"/>
           </a:p>
@@ -5105,7 +5195,7 @@
                 <a:ea typeface="Arial" pitchFamily="34" charset="-122"/>
                 <a:cs typeface="Arial" pitchFamily="34" charset="-120"/>
               </a:rPr>
-              <a:t>Federal AAN — Book 03 Certificates &amp; Tokens · CSI Team Draft — Internal · FedRAMP Moderate · Date Code 2026-07-07 10:32 ET</a:t>
+              <a:t>Federal AAN — Book 03 Certificates &amp; Tokens · CSI Team Draft — Internal · FedRAMP Moderate · Date Code 2026-07-07 11:57 ET</a:t>
             </a:r>
             <a:endParaRPr lang="en-US" sz="800" dirty="0"/>
           </a:p>
@@ -5772,7 +5862,7 @@
                 <a:ea typeface="Arial" pitchFamily="34" charset="-122"/>
                 <a:cs typeface="Arial" pitchFamily="34" charset="-120"/>
               </a:rPr>
-              <a:t>Federal AAN — Book 03 Certificates &amp; Tokens · CSI Team Draft — Internal · FedRAMP Moderate · Date Code 2026-07-07 10:32 ET</a:t>
+              <a:t>Federal AAN — Book 03 Certificates &amp; Tokens · CSI Team Draft — Internal · FedRAMP Moderate · Date Code 2026-07-07 11:57 ET</a:t>
             </a:r>
             <a:endParaRPr lang="en-US" sz="800" dirty="0"/>
           </a:p>
@@ -7528,7 +7618,7 @@
                 <a:ea typeface="Arial" pitchFamily="34" charset="-122"/>
                 <a:cs typeface="Arial" pitchFamily="34" charset="-120"/>
               </a:rPr>
-              <a:t>Federal AAN — Book 03 Certificates &amp; Tokens · CSI Team Draft — Internal · FedRAMP Moderate · Date Code 2026-07-07 10:32 ET</a:t>
+              <a:t>Federal AAN — Book 03 Certificates &amp; Tokens · CSI Team Draft — Internal · FedRAMP Moderate · Date Code 2026-07-07 11:57 ET</a:t>
             </a:r>
             <a:endParaRPr lang="en-US" sz="800" dirty="0"/>
           </a:p>
@@ -8252,7 +8342,7 @@
                 <a:ea typeface="Arial" pitchFamily="34" charset="-122"/>
                 <a:cs typeface="Arial" pitchFamily="34" charset="-120"/>
               </a:rPr>
-              <a:t>Federal AAN — Book 03 Certificates &amp; Tokens · CSI Team Draft — Internal · FedRAMP Moderate · Date Code 2026-07-07 10:32 ET</a:t>
+              <a:t>Federal AAN — Book 03 Certificates &amp; Tokens · CSI Team Draft — Internal · FedRAMP Moderate · Date Code 2026-07-07 11:57 ET</a:t>
             </a:r>
             <a:endParaRPr lang="en-US" sz="800" dirty="0"/>
           </a:p>
@@ -9018,7 +9108,7 @@
                 <a:ea typeface="Arial" pitchFamily="34" charset="-122"/>
                 <a:cs typeface="Arial" pitchFamily="34" charset="-120"/>
               </a:rPr>
-              <a:t>Federal AAN — Book 03 Certificates &amp; Tokens · CSI Team Draft — Internal · FedRAMP Moderate · Date Code 2026-07-07 10:32 ET</a:t>
+              <a:t>Federal AAN — Book 03 Certificates &amp; Tokens · CSI Team Draft — Internal · FedRAMP Moderate · Date Code 2026-07-07 11:57 ET</a:t>
             </a:r>
             <a:endParaRPr lang="en-US" sz="800" dirty="0"/>
           </a:p>
@@ -9784,7 +9874,7 @@
                 <a:ea typeface="Arial" pitchFamily="34" charset="-122"/>
                 <a:cs typeface="Arial" pitchFamily="34" charset="-120"/>
               </a:rPr>
-              <a:t>Federal AAN — Book 03 Certificates &amp; Tokens · CSI Team Draft — Internal · FedRAMP Moderate · Date Code 2026-07-07 10:32 ET</a:t>
+              <a:t>Federal AAN — Book 03 Certificates &amp; Tokens · CSI Team Draft — Internal · FedRAMP Moderate · Date Code 2026-07-07 11:57 ET</a:t>
             </a:r>
             <a:endParaRPr lang="en-US" sz="800" dirty="0"/>
           </a:p>
@@ -10550,7 +10640,7 @@
                 <a:ea typeface="Arial" pitchFamily="34" charset="-122"/>
                 <a:cs typeface="Arial" pitchFamily="34" charset="-120"/>
               </a:rPr>
-              <a:t>Federal AAN — Book 03 Certificates &amp; Tokens · CSI Team Draft — Internal · FedRAMP Moderate · Date Code 2026-07-07 10:32 ET</a:t>
+              <a:t>Federal AAN — Book 03 Certificates &amp; Tokens · CSI Team Draft — Internal · FedRAMP Moderate · Date Code 2026-07-07 11:57 ET</a:t>
             </a:r>
             <a:endParaRPr lang="en-US" sz="800" dirty="0"/>
           </a:p>
@@ -11673,7 +11763,7 @@
                 <a:ea typeface="Arial" pitchFamily="34" charset="-122"/>
                 <a:cs typeface="Arial" pitchFamily="34" charset="-120"/>
               </a:rPr>
-              <a:t>Federal AAN — Book 03 Certificates &amp; Tokens · CSI Team Draft — Internal · FedRAMP Moderate · Date Code 2026-07-07 10:32 ET</a:t>
+              <a:t>Federal AAN — Book 03 Certificates &amp; Tokens · CSI Team Draft — Internal · FedRAMP Moderate · Date Code 2026-07-07 11:57 ET</a:t>
             </a:r>
             <a:endParaRPr lang="en-US" sz="800" dirty="0"/>
           </a:p>
@@ -13334,7 +13424,7 @@
                 <a:ea typeface="Arial" pitchFamily="34" charset="-122"/>
                 <a:cs typeface="Arial" pitchFamily="34" charset="-120"/>
               </a:rPr>
-              <a:t>Federal AAN — Book 03 Certificates &amp; Tokens · CSI Team Draft — Internal · FedRAMP Moderate · Date Code 2026-07-07 10:32 ET</a:t>
+              <a:t>Federal AAN — Book 03 Certificates &amp; Tokens · CSI Team Draft — Internal · FedRAMP Moderate · Date Code 2026-07-07 11:57 ET</a:t>
             </a:r>
             <a:endParaRPr lang="en-US" sz="800" dirty="0"/>
           </a:p>
@@ -14216,7 +14306,7 @@
                 <a:ea typeface="Arial" pitchFamily="34" charset="-122"/>
                 <a:cs typeface="Arial" pitchFamily="34" charset="-120"/>
               </a:rPr>
-              <a:t>MACHINE AND WORKLOAD IDENTITY — STEP 1 OF 2</a:t>
+              <a:t>THE FEDERAL COMPLIANCE CLOCK</a:t>
             </a:r>
             <a:endParaRPr lang="en-US" sz="1100" dirty="0"/>
           </a:p>
@@ -14247,7 +14337,7 @@
               <a:buNone/>
             </a:pPr>
             <a:r>
-              <a:rPr lang="en-US" sz="2200" b="1" dirty="0">
+              <a:rPr lang="en-US" sz="2400" b="1" dirty="0">
                 <a:solidFill>
                   <a:srgbClr val="1F3A5F"/>
                 </a:solidFill>
@@ -14255,9 +14345,9 @@
                 <a:ea typeface="Arial" pitchFamily="34" charset="-122"/>
                 <a:cs typeface="Arial" pitchFamily="34" charset="-120"/>
               </a:rPr>
-              <a:t>The non-human majority still runs on the worst credential</a:t>
-            </a:r>
-            <a:endParaRPr lang="en-US" sz="2200" dirty="0"/>
+              <a:t>Every deadline running against these controls</a:t>
+            </a:r>
+            <a:endParaRPr lang="en-US" sz="2400" dirty="0"/>
           </a:p>
         </p:txBody>
       </p:sp>
@@ -14294,7 +14384,7 @@
                 <a:ea typeface="Arial" pitchFamily="34" charset="-122"/>
                 <a:cs typeface="Arial" pitchFamily="34" charset="-120"/>
               </a:rPr>
-              <a:t>Federal AAN — Book 03 Certificates &amp; Tokens · CSI Team Draft — Internal · FedRAMP Moderate · Date Code 2026-07-07 10:32 ET</a:t>
+              <a:t>Federal AAN — Book 03 Certificates &amp; Tokens · CSI Team Draft — Internal · FedRAMP Moderate · Date Code 2026-07-07 11:57 ET</a:t>
             </a:r>
             <a:endParaRPr lang="en-US" sz="800" dirty="0"/>
           </a:p>
@@ -14347,50 +14437,761 @@
         </p:nvSpPr>
         <p:spPr>
           <a:xfrm>
-            <a:off x="338328" y="1225296"/>
-            <a:ext cx="2103120" cy="1682496"/>
-          </a:xfrm>
-          <a:prstGeom prst="roundRect">
-            <a:avLst>
-              <a:gd name="adj" fmla="val 4891"/>
-            </a:avLst>
+            <a:off x="658368" y="1271016"/>
+            <a:ext cx="118872" cy="118872"/>
+          </a:xfrm>
+          <a:prstGeom prst="ellipse">
+            <a:avLst/>
           </a:prstGeom>
           <a:solidFill>
-            <a:srgbClr val="FFFFFF"/>
+            <a:srgbClr val="1A9E8F"/>
           </a:solidFill>
-          <a:ln w="31750">
+          <a:ln/>
+        </p:spPr>
+      </p:sp>
+      <p:sp>
+        <p:nvSpPr>
+          <p:cNvPr id="7" name="Text 5"/>
+          <p:cNvSpPr/>
+          <p:nvPr/>
+        </p:nvSpPr>
+        <p:spPr>
+          <a:xfrm>
+            <a:off x="896112" y="1225296"/>
+            <a:ext cx="7818120" cy="365760"/>
+          </a:xfrm>
+          <a:prstGeom prst="rect">
+            <a:avLst/>
+          </a:prstGeom>
+          <a:noFill/>
+          <a:ln/>
+        </p:spPr>
+        <p:txBody>
+          <a:bodyPr wrap="square" lIns="0" tIns="0" rIns="0" bIns="0" rtlCol="0" anchor="t"/>
+          <a:lstStyle/>
+          <a:p>
+            <a:pPr indent="0" marL="0">
+              <a:buNone/>
+            </a:pPr>
+            <a:r>
+              <a:rPr lang="en-US" sz="1000" b="1" dirty="0">
+                <a:solidFill>
+                  <a:srgbClr val="1A9E8F"/>
+                </a:solidFill>
+                <a:latin typeface="Arial" pitchFamily="34" charset="0"/>
+                <a:ea typeface="Arial" pitchFamily="34" charset="-122"/>
+                <a:cs typeface="Arial" pitchFamily="34" charset="-120"/>
+              </a:rPr>
+              <a:t>Aug 3 / 31, 2026  </a:t>
+            </a:r>
+            <a:pPr indent="0" marL="0">
+              <a:buNone/>
+            </a:pPr>
+            <a:r>
+              <a:rPr lang="en-US" sz="950" dirty="0">
+                <a:solidFill>
+                  <a:srgbClr val="1E293B"/>
+                </a:solidFill>
+                <a:latin typeface="Arial" pitchFamily="34" charset="0"/>
+                <a:ea typeface="Arial" pitchFamily="34" charset="-122"/>
+                <a:cs typeface="Arial" pitchFamily="34" charset="-120"/>
+              </a:rPr>
+              <a:t>FedRAMP 20x opens — Class A, then Class B + C: the GCC Moderate window</a:t>
+            </a:r>
+            <a:endParaRPr lang="en-US" sz="1000" dirty="0"/>
+          </a:p>
+        </p:txBody>
+      </p:sp>
+      <p:sp>
+        <p:nvSpPr>
+          <p:cNvPr id="8" name="Shape 6"/>
+          <p:cNvSpPr/>
+          <p:nvPr/>
+        </p:nvSpPr>
+        <p:spPr>
+          <a:xfrm>
+            <a:off x="713232" y="1408176"/>
+            <a:ext cx="0" cy="256032"/>
+          </a:xfrm>
+          <a:prstGeom prst="line">
+            <a:avLst/>
+          </a:prstGeom>
+          <a:noFill/>
+          <a:ln w="19050">
             <a:solidFill>
-              <a:srgbClr val="D4860B"/>
+              <a:srgbClr val="C9D4E0"/>
             </a:solidFill>
             <a:prstDash val="solid"/>
           </a:ln>
-          <a:effectLst>
-            <a:outerShdw sx="100000" sy="100000" kx="0" ky="0" algn="bl" rotWithShape="0" blurRad="88900" dist="25400" dir="2700000">
-              <a:srgbClr val="000000">
-                <a:alpha val="14000"/>
-              </a:srgbClr>
-            </a:outerShdw>
-          </a:effectLst>
-        </p:spPr>
-      </p:sp>
-      <p:sp>
-        <p:nvSpPr>
-          <p:cNvPr id="7" name="Shape 5"/>
-          <p:cNvSpPr/>
-          <p:nvPr/>
-        </p:nvSpPr>
-        <p:spPr>
-          <a:xfrm>
-            <a:off x="393192" y="1280160"/>
-            <a:ext cx="1993392" cy="1572768"/>
+        </p:spPr>
+      </p:sp>
+      <p:sp>
+        <p:nvSpPr>
+          <p:cNvPr id="9" name="Shape 7"/>
+          <p:cNvSpPr/>
+          <p:nvPr/>
+        </p:nvSpPr>
+        <p:spPr>
+          <a:xfrm>
+            <a:off x="658368" y="1673352"/>
+            <a:ext cx="118872" cy="118872"/>
+          </a:xfrm>
+          <a:prstGeom prst="ellipse">
+            <a:avLst/>
+          </a:prstGeom>
+          <a:solidFill>
+            <a:srgbClr val="D4860B"/>
+          </a:solidFill>
+          <a:ln/>
+        </p:spPr>
+      </p:sp>
+      <p:sp>
+        <p:nvSpPr>
+          <p:cNvPr id="10" name="Text 8"/>
+          <p:cNvSpPr/>
+          <p:nvPr/>
+        </p:nvSpPr>
+        <p:spPr>
+          <a:xfrm>
+            <a:off x="896112" y="1627632"/>
+            <a:ext cx="7818120" cy="365760"/>
+          </a:xfrm>
+          <a:prstGeom prst="rect">
+            <a:avLst/>
+          </a:prstGeom>
+          <a:noFill/>
+          <a:ln/>
+        </p:spPr>
+        <p:txBody>
+          <a:bodyPr wrap="square" lIns="0" tIns="0" rIns="0" bIns="0" rtlCol="0" anchor="t"/>
+          <a:lstStyle/>
+          <a:p>
+            <a:pPr indent="0" marL="0">
+              <a:buNone/>
+            </a:pPr>
+            <a:r>
+              <a:rPr lang="en-US" sz="1000" b="1" dirty="0">
+                <a:solidFill>
+                  <a:srgbClr val="D4860B"/>
+                </a:solidFill>
+                <a:latin typeface="Arial" pitchFamily="34" charset="0"/>
+                <a:ea typeface="Arial" pitchFamily="34" charset="-122"/>
+                <a:cs typeface="Arial" pitchFamily="34" charset="-120"/>
+              </a:rPr>
+              <a:t>Aug 7, 2026  </a:t>
+            </a:r>
+            <a:pPr indent="0" marL="0">
+              <a:buNone/>
+            </a:pPr>
+            <a:r>
+              <a:rPr lang="en-US" sz="950" dirty="0">
+                <a:solidFill>
+                  <a:srgbClr val="1E293B"/>
+                </a:solidFill>
+                <a:latin typeface="Arial" pitchFamily="34" charset="0"/>
+                <a:ea typeface="Arial" pitchFamily="34" charset="-122"/>
+                <a:cs typeface="Arial" pitchFamily="34" charset="-120"/>
+              </a:rPr>
+              <a:t>BOD 26-04: agency vulnerability-management policies must support risk-based remediation</a:t>
+            </a:r>
+            <a:endParaRPr lang="en-US" sz="1000" dirty="0"/>
+          </a:p>
+        </p:txBody>
+      </p:sp>
+      <p:sp>
+        <p:nvSpPr>
+          <p:cNvPr id="11" name="Shape 9"/>
+          <p:cNvSpPr/>
+          <p:nvPr/>
+        </p:nvSpPr>
+        <p:spPr>
+          <a:xfrm>
+            <a:off x="713232" y="1810512"/>
+            <a:ext cx="0" cy="256032"/>
+          </a:xfrm>
+          <a:prstGeom prst="line">
+            <a:avLst/>
+          </a:prstGeom>
+          <a:noFill/>
+          <a:ln w="19050">
+            <a:solidFill>
+              <a:srgbClr val="C9D4E0"/>
+            </a:solidFill>
+            <a:prstDash val="solid"/>
+          </a:ln>
+        </p:spPr>
+      </p:sp>
+      <p:sp>
+        <p:nvSpPr>
+          <p:cNvPr id="12" name="Shape 10"/>
+          <p:cNvSpPr/>
+          <p:nvPr/>
+        </p:nvSpPr>
+        <p:spPr>
+          <a:xfrm>
+            <a:off x="658368" y="2075688"/>
+            <a:ext cx="118872" cy="118872"/>
+          </a:xfrm>
+          <a:prstGeom prst="ellipse">
+            <a:avLst/>
+          </a:prstGeom>
+          <a:solidFill>
+            <a:srgbClr val="C0392B"/>
+          </a:solidFill>
+          <a:ln/>
+        </p:spPr>
+      </p:sp>
+      <p:sp>
+        <p:nvSpPr>
+          <p:cNvPr id="13" name="Text 11"/>
+          <p:cNvSpPr/>
+          <p:nvPr/>
+        </p:nvSpPr>
+        <p:spPr>
+          <a:xfrm>
+            <a:off x="896112" y="2029968"/>
+            <a:ext cx="7818120" cy="365760"/>
+          </a:xfrm>
+          <a:prstGeom prst="rect">
+            <a:avLst/>
+          </a:prstGeom>
+          <a:noFill/>
+          <a:ln/>
+        </p:spPr>
+        <p:txBody>
+          <a:bodyPr wrap="square" lIns="0" tIns="0" rIns="0" bIns="0" rtlCol="0" anchor="t"/>
+          <a:lstStyle/>
+          <a:p>
+            <a:pPr indent="0" marL="0">
+              <a:buNone/>
+            </a:pPr>
+            <a:r>
+              <a:rPr lang="en-US" sz="1000" b="1" dirty="0">
+                <a:solidFill>
+                  <a:srgbClr val="C0392B"/>
+                </a:solidFill>
+                <a:latin typeface="Arial" pitchFamily="34" charset="0"/>
+                <a:ea typeface="Arial" pitchFamily="34" charset="-122"/>
+                <a:cs typeface="Arial" pitchFamily="34" charset="-120"/>
+              </a:rPr>
+              <a:t>Sep 21, 2026  </a:t>
+            </a:r>
+            <a:pPr indent="0" marL="0">
+              <a:buNone/>
+            </a:pPr>
+            <a:r>
+              <a:rPr lang="en-US" sz="950" dirty="0">
+                <a:solidFill>
+                  <a:srgbClr val="1E293B"/>
+                </a:solidFill>
+                <a:latin typeface="Arial" pitchFamily="34" charset="0"/>
+                <a:ea typeface="Arial" pitchFamily="34" charset="-122"/>
+                <a:cs typeface="Arial" pitchFamily="34" charset="-120"/>
+              </a:rPr>
+              <a:t>FIPS 140-2 certificates move to NIST's Historical List — verify FIPS 140-3 tracking (SC-13)</a:t>
+            </a:r>
+            <a:endParaRPr lang="en-US" sz="1000" dirty="0"/>
+          </a:p>
+        </p:txBody>
+      </p:sp>
+      <p:sp>
+        <p:nvSpPr>
+          <p:cNvPr id="14" name="Shape 12"/>
+          <p:cNvSpPr/>
+          <p:nvPr/>
+        </p:nvSpPr>
+        <p:spPr>
+          <a:xfrm>
+            <a:off x="713232" y="2212848"/>
+            <a:ext cx="0" cy="256032"/>
+          </a:xfrm>
+          <a:prstGeom prst="line">
+            <a:avLst/>
+          </a:prstGeom>
+          <a:noFill/>
+          <a:ln w="19050">
+            <a:solidFill>
+              <a:srgbClr val="C9D4E0"/>
+            </a:solidFill>
+            <a:prstDash val="solid"/>
+          </a:ln>
+        </p:spPr>
+      </p:sp>
+      <p:sp>
+        <p:nvSpPr>
+          <p:cNvPr id="15" name="Shape 13"/>
+          <p:cNvSpPr/>
+          <p:nvPr/>
+        </p:nvSpPr>
+        <p:spPr>
+          <a:xfrm>
+            <a:off x="658368" y="2478024"/>
+            <a:ext cx="118872" cy="118872"/>
+          </a:xfrm>
+          <a:prstGeom prst="ellipse">
+            <a:avLst/>
+          </a:prstGeom>
+          <a:solidFill>
+            <a:srgbClr val="C0392B"/>
+          </a:solidFill>
+          <a:ln/>
+        </p:spPr>
+      </p:sp>
+      <p:sp>
+        <p:nvSpPr>
+          <p:cNvPr id="16" name="Text 14"/>
+          <p:cNvSpPr/>
+          <p:nvPr/>
+        </p:nvSpPr>
+        <p:spPr>
+          <a:xfrm>
+            <a:off x="896112" y="2432304"/>
+            <a:ext cx="7818120" cy="365760"/>
+          </a:xfrm>
+          <a:prstGeom prst="rect">
+            <a:avLst/>
+          </a:prstGeom>
+          <a:noFill/>
+          <a:ln/>
+        </p:spPr>
+        <p:txBody>
+          <a:bodyPr wrap="square" lIns="0" tIns="0" rIns="0" bIns="0" rtlCol="0" anchor="t"/>
+          <a:lstStyle/>
+          <a:p>
+            <a:pPr indent="0" marL="0">
+              <a:buNone/>
+            </a:pPr>
+            <a:r>
+              <a:rPr lang="en-US" sz="1000" b="1" dirty="0">
+                <a:solidFill>
+                  <a:srgbClr val="C0392B"/>
+                </a:solidFill>
+                <a:latin typeface="Arial" pitchFamily="34" charset="0"/>
+                <a:ea typeface="Arial" pitchFamily="34" charset="-122"/>
+                <a:cs typeface="Arial" pitchFamily="34" charset="-120"/>
+              </a:rPr>
+              <a:t>Dec 7, 2026  </a:t>
+            </a:r>
+            <a:pPr indent="0" marL="0">
+              <a:buNone/>
+            </a:pPr>
+            <a:r>
+              <a:rPr lang="en-US" sz="950" dirty="0">
+                <a:solidFill>
+                  <a:srgbClr val="1E293B"/>
+                </a:solidFill>
+                <a:latin typeface="Arial" pitchFamily="34" charset="0"/>
+                <a:ea typeface="Arial" pitchFamily="34" charset="-122"/>
+                <a:cs typeface="Arial" pitchFamily="34" charset="-120"/>
+              </a:rPr>
+              <a:t>BOD 26-04 remediation timelines in force + FedRAMP VDR/VER mandatory (SBOM + vendor disclosure)</a:t>
+            </a:r>
+            <a:endParaRPr lang="en-US" sz="1000" dirty="0"/>
+          </a:p>
+        </p:txBody>
+      </p:sp>
+      <p:sp>
+        <p:nvSpPr>
+          <p:cNvPr id="17" name="Shape 15"/>
+          <p:cNvSpPr/>
+          <p:nvPr/>
+        </p:nvSpPr>
+        <p:spPr>
+          <a:xfrm>
+            <a:off x="713232" y="2615184"/>
+            <a:ext cx="0" cy="256032"/>
+          </a:xfrm>
+          <a:prstGeom prst="line">
+            <a:avLst/>
+          </a:prstGeom>
+          <a:noFill/>
+          <a:ln w="19050">
+            <a:solidFill>
+              <a:srgbClr val="C9D4E0"/>
+            </a:solidFill>
+            <a:prstDash val="solid"/>
+          </a:ln>
+        </p:spPr>
+      </p:sp>
+      <p:sp>
+        <p:nvSpPr>
+          <p:cNvPr id="18" name="Shape 16"/>
+          <p:cNvSpPr/>
+          <p:nvPr/>
+        </p:nvSpPr>
+        <p:spPr>
+          <a:xfrm>
+            <a:off x="658368" y="2880360"/>
+            <a:ext cx="118872" cy="118872"/>
+          </a:xfrm>
+          <a:prstGeom prst="ellipse">
+            <a:avLst/>
+          </a:prstGeom>
+          <a:solidFill>
+            <a:srgbClr val="1F3A5F"/>
+          </a:solidFill>
+          <a:ln/>
+        </p:spPr>
+      </p:sp>
+      <p:sp>
+        <p:nvSpPr>
+          <p:cNvPr id="19" name="Text 17"/>
+          <p:cNvSpPr/>
+          <p:nvPr/>
+        </p:nvSpPr>
+        <p:spPr>
+          <a:xfrm>
+            <a:off x="896112" y="2834640"/>
+            <a:ext cx="7818120" cy="365760"/>
+          </a:xfrm>
+          <a:prstGeom prst="rect">
+            <a:avLst/>
+          </a:prstGeom>
+          <a:noFill/>
+          <a:ln/>
+        </p:spPr>
+        <p:txBody>
+          <a:bodyPr wrap="square" lIns="0" tIns="0" rIns="0" bIns="0" rtlCol="0" anchor="t"/>
+          <a:lstStyle/>
+          <a:p>
+            <a:pPr indent="0" marL="0">
+              <a:buNone/>
+            </a:pPr>
+            <a:r>
+              <a:rPr lang="en-US" sz="1000" b="1" dirty="0">
+                <a:solidFill>
+                  <a:srgbClr val="1F3A5F"/>
+                </a:solidFill>
+                <a:latin typeface="Arial" pitchFamily="34" charset="0"/>
+                <a:ea typeface="Arial" pitchFamily="34" charset="-122"/>
+                <a:cs typeface="Arial" pitchFamily="34" charset="-120"/>
+              </a:rPr>
+              <a:t>Jan 1, 2027  </a:t>
+            </a:r>
+            <a:pPr indent="0" marL="0">
+              <a:buNone/>
+            </a:pPr>
+            <a:r>
+              <a:rPr lang="en-US" sz="950" dirty="0">
+                <a:solidFill>
+                  <a:srgbClr val="1E293B"/>
+                </a:solidFill>
+                <a:latin typeface="Arial" pitchFamily="34" charset="0"/>
+                <a:ea typeface="Arial" pitchFamily="34" charset="-122"/>
+                <a:cs typeface="Arial" pitchFamily="34" charset="-120"/>
+              </a:rPr>
+              <a:t>FedRAMP CR26 mandatory for all · CNSA 2.0 acquisition gate (NSS-scoped; civilian PQC follows)</a:t>
+            </a:r>
+            <a:endParaRPr lang="en-US" sz="1000" dirty="0"/>
+          </a:p>
+        </p:txBody>
+      </p:sp>
+      <p:sp>
+        <p:nvSpPr>
+          <p:cNvPr id="20" name="Shape 18"/>
+          <p:cNvSpPr/>
+          <p:nvPr/>
+        </p:nvSpPr>
+        <p:spPr>
+          <a:xfrm>
+            <a:off x="713232" y="3017520"/>
+            <a:ext cx="0" cy="256032"/>
+          </a:xfrm>
+          <a:prstGeom prst="line">
+            <a:avLst/>
+          </a:prstGeom>
+          <a:noFill/>
+          <a:ln w="19050">
+            <a:solidFill>
+              <a:srgbClr val="C9D4E0"/>
+            </a:solidFill>
+            <a:prstDash val="solid"/>
+          </a:ln>
+        </p:spPr>
+      </p:sp>
+      <p:sp>
+        <p:nvSpPr>
+          <p:cNvPr id="21" name="Shape 19"/>
+          <p:cNvSpPr/>
+          <p:nvPr/>
+        </p:nvSpPr>
+        <p:spPr>
+          <a:xfrm>
+            <a:off x="658368" y="3282696"/>
+            <a:ext cx="118872" cy="118872"/>
+          </a:xfrm>
+          <a:prstGeom prst="ellipse">
+            <a:avLst/>
+          </a:prstGeom>
+          <a:solidFill>
+            <a:srgbClr val="1F3A5F"/>
+          </a:solidFill>
+          <a:ln/>
+        </p:spPr>
+      </p:sp>
+      <p:sp>
+        <p:nvSpPr>
+          <p:cNvPr id="22" name="Text 20"/>
+          <p:cNvSpPr/>
+          <p:nvPr/>
+        </p:nvSpPr>
+        <p:spPr>
+          <a:xfrm>
+            <a:off x="896112" y="3236976"/>
+            <a:ext cx="7818120" cy="365760"/>
+          </a:xfrm>
+          <a:prstGeom prst="rect">
+            <a:avLst/>
+          </a:prstGeom>
+          <a:noFill/>
+          <a:ln/>
+        </p:spPr>
+        <p:txBody>
+          <a:bodyPr wrap="square" lIns="0" tIns="0" rIns="0" bIns="0" rtlCol="0" anchor="t"/>
+          <a:lstStyle/>
+          <a:p>
+            <a:pPr indent="0" marL="0">
+              <a:buNone/>
+            </a:pPr>
+            <a:r>
+              <a:rPr lang="en-US" sz="1000" b="1" dirty="0">
+                <a:solidFill>
+                  <a:srgbClr val="1F3A5F"/>
+                </a:solidFill>
+                <a:latin typeface="Arial" pitchFamily="34" charset="0"/>
+                <a:ea typeface="Arial" pitchFamily="34" charset="-122"/>
+                <a:cs typeface="Arial" pitchFamily="34" charset="-120"/>
+              </a:rPr>
+              <a:t>Jun 11, 2027  </a:t>
+            </a:r>
+            <a:pPr indent="0" marL="0">
+              <a:buNone/>
+            </a:pPr>
+            <a:r>
+              <a:rPr lang="en-US" sz="950" dirty="0">
+                <a:solidFill>
+                  <a:srgbClr val="1E293B"/>
+                </a:solidFill>
+                <a:latin typeface="Arial" pitchFamily="34" charset="0"/>
+                <a:ea typeface="Arial" pitchFamily="34" charset="-122"/>
+                <a:cs typeface="Arial" pitchFamily="34" charset="-120"/>
+              </a:rPr>
+              <a:t>No new Rev5 certifications accepted</a:t>
+            </a:r>
+            <a:endParaRPr lang="en-US" sz="1000" dirty="0"/>
+          </a:p>
+        </p:txBody>
+      </p:sp>
+      <p:sp>
+        <p:nvSpPr>
+          <p:cNvPr id="23" name="Shape 21"/>
+          <p:cNvSpPr/>
+          <p:nvPr/>
+        </p:nvSpPr>
+        <p:spPr>
+          <a:xfrm>
+            <a:off x="713232" y="3419856"/>
+            <a:ext cx="0" cy="256032"/>
+          </a:xfrm>
+          <a:prstGeom prst="line">
+            <a:avLst/>
+          </a:prstGeom>
+          <a:noFill/>
+          <a:ln w="19050">
+            <a:solidFill>
+              <a:srgbClr val="C9D4E0"/>
+            </a:solidFill>
+            <a:prstDash val="solid"/>
+          </a:ln>
+        </p:spPr>
+      </p:sp>
+      <p:sp>
+        <p:nvSpPr>
+          <p:cNvPr id="24" name="Shape 22"/>
+          <p:cNvSpPr/>
+          <p:nvPr/>
+        </p:nvSpPr>
+        <p:spPr>
+          <a:xfrm>
+            <a:off x="658368" y="3685032"/>
+            <a:ext cx="118872" cy="118872"/>
+          </a:xfrm>
+          <a:prstGeom prst="ellipse">
+            <a:avLst/>
+          </a:prstGeom>
+          <a:solidFill>
+            <a:srgbClr val="D4860B"/>
+          </a:solidFill>
+          <a:ln/>
+        </p:spPr>
+      </p:sp>
+      <p:sp>
+        <p:nvSpPr>
+          <p:cNvPr id="25" name="Text 23"/>
+          <p:cNvSpPr/>
+          <p:nvPr/>
+        </p:nvSpPr>
+        <p:spPr>
+          <a:xfrm>
+            <a:off x="896112" y="3639312"/>
+            <a:ext cx="7818120" cy="365760"/>
+          </a:xfrm>
+          <a:prstGeom prst="rect">
+            <a:avLst/>
+          </a:prstGeom>
+          <a:noFill/>
+          <a:ln/>
+        </p:spPr>
+        <p:txBody>
+          <a:bodyPr wrap="square" lIns="0" tIns="0" rIns="0" bIns="0" rtlCol="0" anchor="t"/>
+          <a:lstStyle/>
+          <a:p>
+            <a:pPr indent="0" marL="0">
+              <a:buNone/>
+            </a:pPr>
+            <a:r>
+              <a:rPr lang="en-US" sz="1000" b="1" dirty="0">
+                <a:solidFill>
+                  <a:srgbClr val="D4860B"/>
+                </a:solidFill>
+                <a:latin typeface="Arial" pitchFamily="34" charset="0"/>
+                <a:ea typeface="Arial" pitchFamily="34" charset="-122"/>
+                <a:cs typeface="Arial" pitchFamily="34" charset="-120"/>
+              </a:rPr>
+              <a:t>~Aug 2027  </a:t>
+            </a:r>
+            <a:pPr indent="0" marL="0">
+              <a:buNone/>
+            </a:pPr>
+            <a:r>
+              <a:rPr lang="en-US" sz="950" dirty="0">
+                <a:solidFill>
+                  <a:srgbClr val="1E293B"/>
+                </a:solidFill>
+                <a:latin typeface="Arial" pitchFamily="34" charset="0"/>
+                <a:ea typeface="Arial" pitchFamily="34" charset="-122"/>
+                <a:cs typeface="Arial" pitchFamily="34" charset="-120"/>
+              </a:rPr>
+              <a:t>Next scheduled NIST 800-53 release — 5.2.0 (Aug 2025) already added SA-15(13), SA-24, SI-2(7)</a:t>
+            </a:r>
+            <a:endParaRPr lang="en-US" sz="1000" dirty="0"/>
+          </a:p>
+        </p:txBody>
+      </p:sp>
+      <p:sp>
+        <p:nvSpPr>
+          <p:cNvPr id="26" name="Shape 24"/>
+          <p:cNvSpPr/>
+          <p:nvPr/>
+        </p:nvSpPr>
+        <p:spPr>
+          <a:xfrm>
+            <a:off x="713232" y="3822192"/>
+            <a:ext cx="0" cy="256032"/>
+          </a:xfrm>
+          <a:prstGeom prst="line">
+            <a:avLst/>
+          </a:prstGeom>
+          <a:noFill/>
+          <a:ln w="19050">
+            <a:solidFill>
+              <a:srgbClr val="C9D4E0"/>
+            </a:solidFill>
+            <a:prstDash val="solid"/>
+          </a:ln>
+        </p:spPr>
+      </p:sp>
+      <p:sp>
+        <p:nvSpPr>
+          <p:cNvPr id="27" name="Shape 25"/>
+          <p:cNvSpPr/>
+          <p:nvPr/>
+        </p:nvSpPr>
+        <p:spPr>
+          <a:xfrm>
+            <a:off x="658368" y="4087368"/>
+            <a:ext cx="118872" cy="118872"/>
+          </a:xfrm>
+          <a:prstGeom prst="ellipse">
+            <a:avLst/>
+          </a:prstGeom>
+          <a:solidFill>
+            <a:srgbClr val="5B6B7C"/>
+          </a:solidFill>
+          <a:ln/>
+        </p:spPr>
+      </p:sp>
+      <p:sp>
+        <p:nvSpPr>
+          <p:cNvPr id="28" name="Text 26"/>
+          <p:cNvSpPr/>
+          <p:nvPr/>
+        </p:nvSpPr>
+        <p:spPr>
+          <a:xfrm>
+            <a:off x="896112" y="4041648"/>
+            <a:ext cx="7818120" cy="365760"/>
+          </a:xfrm>
+          <a:prstGeom prst="rect">
+            <a:avLst/>
+          </a:prstGeom>
+          <a:noFill/>
+          <a:ln/>
+        </p:spPr>
+        <p:txBody>
+          <a:bodyPr wrap="square" lIns="0" tIns="0" rIns="0" bIns="0" rtlCol="0" anchor="t"/>
+          <a:lstStyle/>
+          <a:p>
+            <a:pPr indent="0" marL="0">
+              <a:buNone/>
+            </a:pPr>
+            <a:r>
+              <a:rPr lang="en-US" sz="1000" b="1" dirty="0">
+                <a:solidFill>
+                  <a:srgbClr val="5B6B7C"/>
+                </a:solidFill>
+                <a:latin typeface="Arial" pitchFamily="34" charset="0"/>
+                <a:ea typeface="Arial" pitchFamily="34" charset="-122"/>
+                <a:cs typeface="Arial" pitchFamily="34" charset="-120"/>
+              </a:rPr>
+              <a:t>2030 / 2035  </a:t>
+            </a:r>
+            <a:pPr indent="0" marL="0">
+              <a:buNone/>
+            </a:pPr>
+            <a:r>
+              <a:rPr lang="en-US" sz="950" dirty="0">
+                <a:solidFill>
+                  <a:srgbClr val="1E293B"/>
+                </a:solidFill>
+                <a:latin typeface="Arial" pitchFamily="34" charset="0"/>
+                <a:ea typeface="Arial" pitchFamily="34" charset="-122"/>
+                <a:cs typeface="Arial" pitchFamily="34" charset="-120"/>
+              </a:rPr>
+              <a:t>Quantum-vulnerable cryptography deprecated, then prohibited — M-23-02 inventories run to the horizon</a:t>
+            </a:r>
+            <a:endParaRPr lang="en-US" sz="1000" dirty="0"/>
+          </a:p>
+        </p:txBody>
+      </p:sp>
+      <p:sp>
+        <p:nvSpPr>
+          <p:cNvPr id="29" name="Shape 27"/>
+          <p:cNvSpPr/>
+          <p:nvPr/>
+        </p:nvSpPr>
+        <p:spPr>
+          <a:xfrm>
+            <a:off x="502920" y="4462272"/>
+            <a:ext cx="8229600" cy="365760"/>
           </a:xfrm>
           <a:prstGeom prst="roundRect">
             <a:avLst>
-              <a:gd name="adj" fmla="val 4070"/>
+              <a:gd name="adj" fmla="val 17500"/>
             </a:avLst>
           </a:prstGeom>
           <a:solidFill>
-            <a:srgbClr val="FFFFFF"/>
+            <a:srgbClr val="EDF3F9"/>
           </a:solidFill>
           <a:ln w="9525">
             <a:solidFill>
@@ -14398,45 +15199,18 @@
             </a:solidFill>
             <a:prstDash val="solid"/>
           </a:ln>
-          <a:effectLst>
-            <a:outerShdw sx="100000" sy="100000" kx="0" ky="0" algn="bl" rotWithShape="0" blurRad="88900" dist="25400" dir="2700000">
-              <a:srgbClr val="000000">
-                <a:alpha val="14000"/>
-              </a:srgbClr>
-            </a:outerShdw>
-          </a:effectLst>
-        </p:spPr>
-      </p:sp>
-      <p:sp>
-        <p:nvSpPr>
-          <p:cNvPr id="8" name="Shape 6"/>
-          <p:cNvSpPr/>
-          <p:nvPr/>
-        </p:nvSpPr>
-        <p:spPr>
-          <a:xfrm>
-            <a:off x="502920" y="1389888"/>
-            <a:ext cx="310896" cy="310896"/>
-          </a:xfrm>
-          <a:prstGeom prst="ellipse">
-            <a:avLst/>
-          </a:prstGeom>
-          <a:solidFill>
-            <a:srgbClr val="C0392B"/>
-          </a:solidFill>
-          <a:ln/>
-        </p:spPr>
-      </p:sp>
-      <p:sp>
-        <p:nvSpPr>
-          <p:cNvPr id="9" name="Text 7"/>
-          <p:cNvSpPr/>
-          <p:nvPr/>
-        </p:nvSpPr>
-        <p:spPr>
-          <a:xfrm>
-            <a:off x="502920" y="1376172"/>
-            <a:ext cx="310896" cy="310896"/>
+        </p:spPr>
+      </p:sp>
+      <p:sp>
+        <p:nvSpPr>
+          <p:cNvPr id="30" name="Text 28"/>
+          <p:cNvSpPr/>
+          <p:nvPr/>
+        </p:nvSpPr>
+        <p:spPr>
+          <a:xfrm>
+            <a:off x="731520" y="4462272"/>
+            <a:ext cx="7772400" cy="365760"/>
           </a:xfrm>
           <a:prstGeom prst="rect">
             <a:avLst/>
@@ -14448,842 +15222,21 @@
           <a:bodyPr wrap="square" lIns="0" tIns="0" rIns="0" bIns="0" rtlCol="0" anchor="ctr"/>
           <a:lstStyle/>
           <a:p>
-            <a:pPr algn="ctr" indent="0" marL="0">
-              <a:buNone/>
-            </a:pPr>
-            <a:r>
-              <a:rPr lang="en-US" sz="1300" b="1" dirty="0">
-                <a:solidFill>
-                  <a:srgbClr val="FFFFFF"/>
-                </a:solidFill>
-                <a:latin typeface="Arial" pitchFamily="34" charset="0"/>
-                <a:ea typeface="Arial" pitchFamily="34" charset="-122"/>
-                <a:cs typeface="Arial" pitchFamily="34" charset="-120"/>
-              </a:rPr>
-              <a:t>1</a:t>
-            </a:r>
-            <a:endParaRPr lang="en-US" sz="1300" dirty="0"/>
-          </a:p>
-        </p:txBody>
-      </p:sp>
-      <p:sp>
-        <p:nvSpPr>
-          <p:cNvPr id="10" name="Text 8"/>
-          <p:cNvSpPr/>
-          <p:nvPr/>
-        </p:nvSpPr>
-        <p:spPr>
-          <a:xfrm>
-            <a:off x="886968" y="1371600"/>
-            <a:ext cx="1426464" cy="384048"/>
-          </a:xfrm>
-          <a:prstGeom prst="rect">
-            <a:avLst/>
-          </a:prstGeom>
-          <a:noFill/>
-          <a:ln/>
-        </p:spPr>
-        <p:txBody>
-          <a:bodyPr wrap="square" lIns="0" tIns="0" rIns="0" bIns="0" rtlCol="0" anchor="ctr"/>
-          <a:lstStyle/>
-          <a:p>
-            <a:pPr indent="0" marL="0">
-              <a:buNone/>
-            </a:pPr>
-            <a:r>
-              <a:rPr lang="en-US" sz="1050" b="1" dirty="0">
-                <a:solidFill>
-                  <a:srgbClr val="1E293B"/>
-                </a:solidFill>
-                <a:latin typeface="Arial" pitchFamily="34" charset="0"/>
-                <a:ea typeface="Arial" pitchFamily="34" charset="-122"/>
-                <a:cs typeface="Arial" pitchFamily="34" charset="-120"/>
-              </a:rPr>
-              <a:t>Service account</a:t>
-            </a:r>
-            <a:endParaRPr lang="en-US" sz="1050" dirty="0"/>
-          </a:p>
-        </p:txBody>
-      </p:sp>
-      <p:sp>
-        <p:nvSpPr>
-          <p:cNvPr id="11" name="Text 9"/>
-          <p:cNvSpPr/>
-          <p:nvPr/>
-        </p:nvSpPr>
-        <p:spPr>
-          <a:xfrm>
-            <a:off x="502920" y="1828800"/>
-            <a:ext cx="1773936" cy="566928"/>
-          </a:xfrm>
-          <a:prstGeom prst="rect">
-            <a:avLst/>
-          </a:prstGeom>
-          <a:noFill/>
-          <a:ln/>
-        </p:spPr>
-        <p:txBody>
-          <a:bodyPr wrap="square" lIns="0" tIns="0" rIns="0" bIns="0" rtlCol="0" anchor="ctr"/>
-          <a:lstStyle/>
-          <a:p>
-            <a:pPr indent="0" marL="0">
-              <a:buNone/>
-            </a:pPr>
-            <a:r>
-              <a:rPr lang="en-US" sz="850" dirty="0">
-                <a:solidFill>
-                  <a:srgbClr val="1E293B"/>
-                </a:solidFill>
-                <a:latin typeface="Arial" pitchFamily="34" charset="0"/>
-                <a:ea typeface="Arial" pitchFamily="34" charset="-122"/>
-                <a:cs typeface="Arial" pitchFamily="34" charset="-120"/>
-              </a:rPr>
-              <a:t>Password in configuration — the password exists everywhere the config goes</a:t>
+            <a:pPr indent="0" marL="0">
+              <a:buNone/>
+            </a:pPr>
+            <a:r>
+              <a:rPr lang="en-US" sz="850" b="1" dirty="0">
+                <a:solidFill>
+                  <a:srgbClr val="1F3A5F"/>
+                </a:solidFill>
+                <a:latin typeface="Arial" pitchFamily="34" charset="0"/>
+                <a:ea typeface="Arial" pitchFamily="34" charset="-122"/>
+                <a:cs typeface="Arial" pitchFamily="34" charset="-120"/>
+              </a:rPr>
+              <a:t>SSOT for federal dates: the Federal AAN / ConMon Gap Roadmap (verified 2026-07-07). Already in force: M-21-31 logging, M-21-07 IPv6, M-22-09 Zero Trust (continued by M-24-14 / M-25-04), BOD 25-01 SCuBA.</a:t>
             </a:r>
             <a:endParaRPr lang="en-US" sz="850" dirty="0"/>
-          </a:p>
-        </p:txBody>
-      </p:sp>
-      <p:sp>
-        <p:nvSpPr>
-          <p:cNvPr id="12" name="Text 10"/>
-          <p:cNvSpPr/>
-          <p:nvPr/>
-        </p:nvSpPr>
-        <p:spPr>
-          <a:xfrm>
-            <a:off x="502920" y="2414016"/>
-            <a:ext cx="1773936" cy="402336"/>
-          </a:xfrm>
-          <a:prstGeom prst="rect">
-            <a:avLst/>
-          </a:prstGeom>
-          <a:noFill/>
-          <a:ln/>
-        </p:spPr>
-        <p:txBody>
-          <a:bodyPr wrap="square" lIns="0" tIns="0" rIns="0" bIns="0" rtlCol="0" anchor="ctr"/>
-          <a:lstStyle/>
-          <a:p>
-            <a:pPr indent="0" marL="0">
-              <a:buNone/>
-            </a:pPr>
-            <a:r>
-              <a:rPr lang="en-US" sz="750" i="1" dirty="0">
-                <a:solidFill>
-                  <a:srgbClr val="C0392B"/>
-                </a:solidFill>
-                <a:latin typeface="Arial" pitchFamily="34" charset="0"/>
-                <a:ea typeface="Arial" pitchFamily="34" charset="-122"/>
-                <a:cs typeface="Arial" pitchFamily="34" charset="-120"/>
-              </a:rPr>
-              <a:t>Pass-the-hash · credential sprawl · rotation outages</a:t>
-            </a:r>
-            <a:endParaRPr lang="en-US" sz="750" dirty="0"/>
-          </a:p>
-        </p:txBody>
-      </p:sp>
-      <p:sp>
-        <p:nvSpPr>
-          <p:cNvPr id="13" name="Shape 11"/>
-          <p:cNvSpPr/>
-          <p:nvPr/>
-        </p:nvSpPr>
-        <p:spPr>
-          <a:xfrm>
-            <a:off x="2404872" y="2066544"/>
-            <a:ext cx="91440" cy="0"/>
-          </a:xfrm>
-          <a:prstGeom prst="line">
-            <a:avLst/>
-          </a:prstGeom>
-          <a:noFill/>
-          <a:ln w="25400">
-            <a:solidFill>
-              <a:srgbClr val="C9D4E0"/>
-            </a:solidFill>
-            <a:prstDash val="solid"/>
-            <a:tailEnd type="triangle"/>
-          </a:ln>
-        </p:spPr>
-      </p:sp>
-      <p:sp>
-        <p:nvSpPr>
-          <p:cNvPr id="14" name="Shape 12"/>
-          <p:cNvSpPr/>
-          <p:nvPr/>
-        </p:nvSpPr>
-        <p:spPr>
-          <a:xfrm>
-            <a:off x="2514600" y="1280160"/>
-            <a:ext cx="1993392" cy="1572768"/>
-          </a:xfrm>
-          <a:prstGeom prst="roundRect">
-            <a:avLst>
-              <a:gd name="adj" fmla="val 4070"/>
-            </a:avLst>
-          </a:prstGeom>
-          <a:solidFill>
-            <a:srgbClr val="FFFFFF"/>
-          </a:solidFill>
-          <a:ln w="9525">
-            <a:solidFill>
-              <a:srgbClr val="C9D4E0"/>
-            </a:solidFill>
-            <a:prstDash val="solid"/>
-          </a:ln>
-          <a:effectLst>
-            <a:outerShdw sx="100000" sy="100000" kx="0" ky="0" algn="bl" rotWithShape="0" blurRad="88900" dist="25400" dir="2700000">
-              <a:srgbClr val="000000">
-                <a:alpha val="14000"/>
-              </a:srgbClr>
-            </a:outerShdw>
-          </a:effectLst>
-        </p:spPr>
-      </p:sp>
-      <p:sp>
-        <p:nvSpPr>
-          <p:cNvPr id="15" name="Shape 13"/>
-          <p:cNvSpPr/>
-          <p:nvPr/>
-        </p:nvSpPr>
-        <p:spPr>
-          <a:xfrm>
-            <a:off x="2624328" y="1389888"/>
-            <a:ext cx="310896" cy="310896"/>
-          </a:xfrm>
-          <a:prstGeom prst="ellipse">
-            <a:avLst/>
-          </a:prstGeom>
-          <a:solidFill>
-            <a:srgbClr val="D4860B"/>
-          </a:solidFill>
-          <a:ln/>
-        </p:spPr>
-      </p:sp>
-      <p:sp>
-        <p:nvSpPr>
-          <p:cNvPr id="16" name="Text 14"/>
-          <p:cNvSpPr/>
-          <p:nvPr/>
-        </p:nvSpPr>
-        <p:spPr>
-          <a:xfrm>
-            <a:off x="2624328" y="1376172"/>
-            <a:ext cx="310896" cy="310896"/>
-          </a:xfrm>
-          <a:prstGeom prst="rect">
-            <a:avLst/>
-          </a:prstGeom>
-          <a:noFill/>
-          <a:ln/>
-        </p:spPr>
-        <p:txBody>
-          <a:bodyPr wrap="square" lIns="0" tIns="0" rIns="0" bIns="0" rtlCol="0" anchor="ctr"/>
-          <a:lstStyle/>
-          <a:p>
-            <a:pPr algn="ctr" indent="0" marL="0">
-              <a:buNone/>
-            </a:pPr>
-            <a:r>
-              <a:rPr lang="en-US" sz="1300" b="1" dirty="0">
-                <a:solidFill>
-                  <a:srgbClr val="FFFFFF"/>
-                </a:solidFill>
-                <a:latin typeface="Arial" pitchFamily="34" charset="0"/>
-                <a:ea typeface="Arial" pitchFamily="34" charset="-122"/>
-                <a:cs typeface="Arial" pitchFamily="34" charset="-120"/>
-              </a:rPr>
-              <a:t>2</a:t>
-            </a:r>
-            <a:endParaRPr lang="en-US" sz="1300" dirty="0"/>
-          </a:p>
-        </p:txBody>
-      </p:sp>
-      <p:sp>
-        <p:nvSpPr>
-          <p:cNvPr id="17" name="Text 15"/>
-          <p:cNvSpPr/>
-          <p:nvPr/>
-        </p:nvSpPr>
-        <p:spPr>
-          <a:xfrm>
-            <a:off x="3008376" y="1371600"/>
-            <a:ext cx="1426464" cy="384048"/>
-          </a:xfrm>
-          <a:prstGeom prst="rect">
-            <a:avLst/>
-          </a:prstGeom>
-          <a:noFill/>
-          <a:ln/>
-        </p:spPr>
-        <p:txBody>
-          <a:bodyPr wrap="square" lIns="0" tIns="0" rIns="0" bIns="0" rtlCol="0" anchor="ctr"/>
-          <a:lstStyle/>
-          <a:p>
-            <a:pPr indent="0" marL="0">
-              <a:buNone/>
-            </a:pPr>
-            <a:r>
-              <a:rPr lang="en-US" sz="1050" b="1" dirty="0">
-                <a:solidFill>
-                  <a:srgbClr val="1E293B"/>
-                </a:solidFill>
-                <a:latin typeface="Arial" pitchFamily="34" charset="0"/>
-                <a:ea typeface="Arial" pitchFamily="34" charset="-122"/>
-                <a:cs typeface="Arial" pitchFamily="34" charset="-120"/>
-              </a:rPr>
-              <a:t>Service principal</a:t>
-            </a:r>
-            <a:endParaRPr lang="en-US" sz="1050" dirty="0"/>
-          </a:p>
-        </p:txBody>
-      </p:sp>
-      <p:sp>
-        <p:nvSpPr>
-          <p:cNvPr id="18" name="Text 16"/>
-          <p:cNvSpPr/>
-          <p:nvPr/>
-        </p:nvSpPr>
-        <p:spPr>
-          <a:xfrm>
-            <a:off x="2624328" y="1828800"/>
-            <a:ext cx="1773936" cy="566928"/>
-          </a:xfrm>
-          <a:prstGeom prst="rect">
-            <a:avLst/>
-          </a:prstGeom>
-          <a:noFill/>
-          <a:ln/>
-        </p:spPr>
-        <p:txBody>
-          <a:bodyPr wrap="square" lIns="0" tIns="0" rIns="0" bIns="0" rtlCol="0" anchor="ctr"/>
-          <a:lstStyle/>
-          <a:p>
-            <a:pPr indent="0" marL="0">
-              <a:buNone/>
-            </a:pPr>
-            <a:r>
-              <a:rPr lang="en-US" sz="850" dirty="0">
-                <a:solidFill>
-                  <a:srgbClr val="1E293B"/>
-                </a:solidFill>
-                <a:latin typeface="Arial" pitchFamily="34" charset="0"/>
-                <a:ea typeface="Arial" pitchFamily="34" charset="-122"/>
-                <a:cs typeface="Arial" pitchFamily="34" charset="-120"/>
-              </a:rPr>
-              <a:t>Client secret or certificate held by the application</a:t>
-            </a:r>
-            <a:endParaRPr lang="en-US" sz="850" dirty="0"/>
-          </a:p>
-        </p:txBody>
-      </p:sp>
-      <p:sp>
-        <p:nvSpPr>
-          <p:cNvPr id="19" name="Text 17"/>
-          <p:cNvSpPr/>
-          <p:nvPr/>
-        </p:nvSpPr>
-        <p:spPr>
-          <a:xfrm>
-            <a:off x="2624328" y="2414016"/>
-            <a:ext cx="1773936" cy="402336"/>
-          </a:xfrm>
-          <a:prstGeom prst="rect">
-            <a:avLst/>
-          </a:prstGeom>
-          <a:noFill/>
-          <a:ln/>
-        </p:spPr>
-        <p:txBody>
-          <a:bodyPr wrap="square" lIns="0" tIns="0" rIns="0" bIns="0" rtlCol="0" anchor="ctr"/>
-          <a:lstStyle/>
-          <a:p>
-            <a:pPr indent="0" marL="0">
-              <a:buNone/>
-            </a:pPr>
-            <a:r>
-              <a:rPr lang="en-US" sz="750" i="1" dirty="0">
-                <a:solidFill>
-                  <a:srgbClr val="D4860B"/>
-                </a:solidFill>
-                <a:latin typeface="Arial" pitchFamily="34" charset="0"/>
-                <a:ea typeface="Arial" pitchFamily="34" charset="-122"/>
-                <a:cs typeface="Arial" pitchFamily="34" charset="-120"/>
-              </a:rPr>
-              <a:t>Leaked secrets in code repos · expiry outages</a:t>
-            </a:r>
-            <a:endParaRPr lang="en-US" sz="750" dirty="0"/>
-          </a:p>
-        </p:txBody>
-      </p:sp>
-      <p:sp>
-        <p:nvSpPr>
-          <p:cNvPr id="20" name="Shape 18"/>
-          <p:cNvSpPr/>
-          <p:nvPr/>
-        </p:nvSpPr>
-        <p:spPr>
-          <a:xfrm>
-            <a:off x="4526280" y="2066544"/>
-            <a:ext cx="91440" cy="0"/>
-          </a:xfrm>
-          <a:prstGeom prst="line">
-            <a:avLst/>
-          </a:prstGeom>
-          <a:noFill/>
-          <a:ln w="25400">
-            <a:solidFill>
-              <a:srgbClr val="C9D4E0"/>
-            </a:solidFill>
-            <a:prstDash val="solid"/>
-            <a:tailEnd type="triangle"/>
-          </a:ln>
-        </p:spPr>
-      </p:sp>
-      <p:sp>
-        <p:nvSpPr>
-          <p:cNvPr id="21" name="Shape 19"/>
-          <p:cNvSpPr/>
-          <p:nvPr/>
-        </p:nvSpPr>
-        <p:spPr>
-          <a:xfrm>
-            <a:off x="4636008" y="1280160"/>
-            <a:ext cx="1993392" cy="1572768"/>
-          </a:xfrm>
-          <a:prstGeom prst="roundRect">
-            <a:avLst>
-              <a:gd name="adj" fmla="val 4070"/>
-            </a:avLst>
-          </a:prstGeom>
-          <a:solidFill>
-            <a:srgbClr val="F3F5F8"/>
-          </a:solidFill>
-          <a:ln w="9525">
-            <a:solidFill>
-              <a:srgbClr val="C9D4E0"/>
-            </a:solidFill>
-            <a:prstDash val="solid"/>
-          </a:ln>
-        </p:spPr>
-      </p:sp>
-      <p:sp>
-        <p:nvSpPr>
-          <p:cNvPr id="22" name="Shape 20"/>
-          <p:cNvSpPr/>
-          <p:nvPr/>
-        </p:nvSpPr>
-        <p:spPr>
-          <a:xfrm>
-            <a:off x="4745736" y="1389888"/>
-            <a:ext cx="310896" cy="310896"/>
-          </a:xfrm>
-          <a:prstGeom prst="ellipse">
-            <a:avLst/>
-          </a:prstGeom>
-          <a:solidFill>
-            <a:srgbClr val="C9D4E0"/>
-          </a:solidFill>
-          <a:ln/>
-        </p:spPr>
-      </p:sp>
-      <p:sp>
-        <p:nvSpPr>
-          <p:cNvPr id="23" name="Text 21"/>
-          <p:cNvSpPr/>
-          <p:nvPr/>
-        </p:nvSpPr>
-        <p:spPr>
-          <a:xfrm>
-            <a:off x="4745736" y="1376172"/>
-            <a:ext cx="310896" cy="310896"/>
-          </a:xfrm>
-          <a:prstGeom prst="rect">
-            <a:avLst/>
-          </a:prstGeom>
-          <a:noFill/>
-          <a:ln/>
-        </p:spPr>
-        <p:txBody>
-          <a:bodyPr wrap="square" lIns="0" tIns="0" rIns="0" bIns="0" rtlCol="0" anchor="ctr"/>
-          <a:lstStyle/>
-          <a:p>
-            <a:pPr algn="ctr" indent="0" marL="0">
-              <a:buNone/>
-            </a:pPr>
-            <a:r>
-              <a:rPr lang="en-US" sz="1300" b="1" dirty="0">
-                <a:solidFill>
-                  <a:srgbClr val="5B6B7C"/>
-                </a:solidFill>
-                <a:latin typeface="Arial" pitchFamily="34" charset="0"/>
-                <a:ea typeface="Arial" pitchFamily="34" charset="-122"/>
-                <a:cs typeface="Arial" pitchFamily="34" charset="-120"/>
-              </a:rPr>
-              <a:t>3</a:t>
-            </a:r>
-            <a:endParaRPr lang="en-US" sz="1300" dirty="0"/>
-          </a:p>
-        </p:txBody>
-      </p:sp>
-      <p:sp>
-        <p:nvSpPr>
-          <p:cNvPr id="24" name="Text 22"/>
-          <p:cNvSpPr/>
-          <p:nvPr/>
-        </p:nvSpPr>
-        <p:spPr>
-          <a:xfrm>
-            <a:off x="5129784" y="1371600"/>
-            <a:ext cx="1426464" cy="384048"/>
-          </a:xfrm>
-          <a:prstGeom prst="rect">
-            <a:avLst/>
-          </a:prstGeom>
-          <a:noFill/>
-          <a:ln/>
-        </p:spPr>
-        <p:txBody>
-          <a:bodyPr wrap="square" lIns="0" tIns="0" rIns="0" bIns="0" rtlCol="0" anchor="ctr"/>
-          <a:lstStyle/>
-          <a:p>
-            <a:pPr indent="0" marL="0">
-              <a:buNone/>
-            </a:pPr>
-            <a:r>
-              <a:rPr lang="en-US" sz="1050" b="1" dirty="0">
-                <a:solidFill>
-                  <a:srgbClr val="5B6B7C"/>
-                </a:solidFill>
-                <a:latin typeface="Arial" pitchFamily="34" charset="0"/>
-                <a:ea typeface="Arial" pitchFamily="34" charset="-122"/>
-                <a:cs typeface="Arial" pitchFamily="34" charset="-120"/>
-              </a:rPr>
-              <a:t>Managed identity</a:t>
-            </a:r>
-            <a:endParaRPr lang="en-US" sz="1050" dirty="0"/>
-          </a:p>
-        </p:txBody>
-      </p:sp>
-      <p:sp>
-        <p:nvSpPr>
-          <p:cNvPr id="25" name="Text 23"/>
-          <p:cNvSpPr/>
-          <p:nvPr/>
-        </p:nvSpPr>
-        <p:spPr>
-          <a:xfrm>
-            <a:off x="4745736" y="1828800"/>
-            <a:ext cx="1773936" cy="566928"/>
-          </a:xfrm>
-          <a:prstGeom prst="rect">
-            <a:avLst/>
-          </a:prstGeom>
-          <a:noFill/>
-          <a:ln/>
-        </p:spPr>
-        <p:txBody>
-          <a:bodyPr wrap="square" lIns="0" tIns="0" rIns="0" bIns="0" rtlCol="0" anchor="ctr"/>
-          <a:lstStyle/>
-          <a:p>
-            <a:pPr indent="0" marL="0">
-              <a:buNone/>
-            </a:pPr>
-            <a:r>
-              <a:rPr lang="en-US" sz="850" dirty="0">
-                <a:solidFill>
-                  <a:srgbClr val="1E293B"/>
-                </a:solidFill>
-                <a:latin typeface="Arial" pitchFamily="34" charset="0"/>
-                <a:ea typeface="Arial" pitchFamily="34" charset="-122"/>
-                <a:cs typeface="Arial" pitchFamily="34" charset="-120"/>
-              </a:rPr>
-              <a:t>…</a:t>
-            </a:r>
-            <a:endParaRPr lang="en-US" sz="850" dirty="0"/>
-          </a:p>
-        </p:txBody>
-      </p:sp>
-      <p:sp>
-        <p:nvSpPr>
-          <p:cNvPr id="26" name="Shape 24"/>
-          <p:cNvSpPr/>
-          <p:nvPr/>
-        </p:nvSpPr>
-        <p:spPr>
-          <a:xfrm>
-            <a:off x="6647688" y="2066544"/>
-            <a:ext cx="91440" cy="0"/>
-          </a:xfrm>
-          <a:prstGeom prst="line">
-            <a:avLst/>
-          </a:prstGeom>
-          <a:noFill/>
-          <a:ln w="25400">
-            <a:solidFill>
-              <a:srgbClr val="C9D4E0"/>
-            </a:solidFill>
-            <a:prstDash val="solid"/>
-            <a:tailEnd type="triangle"/>
-          </a:ln>
-        </p:spPr>
-      </p:sp>
-      <p:sp>
-        <p:nvSpPr>
-          <p:cNvPr id="27" name="Shape 25"/>
-          <p:cNvSpPr/>
-          <p:nvPr/>
-        </p:nvSpPr>
-        <p:spPr>
-          <a:xfrm>
-            <a:off x="6757416" y="1280160"/>
-            <a:ext cx="1993392" cy="1572768"/>
-          </a:xfrm>
-          <a:prstGeom prst="roundRect">
-            <a:avLst>
-              <a:gd name="adj" fmla="val 4070"/>
-            </a:avLst>
-          </a:prstGeom>
-          <a:solidFill>
-            <a:srgbClr val="F3F5F8"/>
-          </a:solidFill>
-          <a:ln w="9525">
-            <a:solidFill>
-              <a:srgbClr val="C9D4E0"/>
-            </a:solidFill>
-            <a:prstDash val="solid"/>
-          </a:ln>
-        </p:spPr>
-      </p:sp>
-      <p:sp>
-        <p:nvSpPr>
-          <p:cNvPr id="28" name="Shape 26"/>
-          <p:cNvSpPr/>
-          <p:nvPr/>
-        </p:nvSpPr>
-        <p:spPr>
-          <a:xfrm>
-            <a:off x="6867144" y="1389888"/>
-            <a:ext cx="310896" cy="310896"/>
-          </a:xfrm>
-          <a:prstGeom prst="ellipse">
-            <a:avLst/>
-          </a:prstGeom>
-          <a:solidFill>
-            <a:srgbClr val="C9D4E0"/>
-          </a:solidFill>
-          <a:ln/>
-        </p:spPr>
-      </p:sp>
-      <p:sp>
-        <p:nvSpPr>
-          <p:cNvPr id="29" name="Text 27"/>
-          <p:cNvSpPr/>
-          <p:nvPr/>
-        </p:nvSpPr>
-        <p:spPr>
-          <a:xfrm>
-            <a:off x="6867144" y="1376172"/>
-            <a:ext cx="310896" cy="310896"/>
-          </a:xfrm>
-          <a:prstGeom prst="rect">
-            <a:avLst/>
-          </a:prstGeom>
-          <a:noFill/>
-          <a:ln/>
-        </p:spPr>
-        <p:txBody>
-          <a:bodyPr wrap="square" lIns="0" tIns="0" rIns="0" bIns="0" rtlCol="0" anchor="ctr"/>
-          <a:lstStyle/>
-          <a:p>
-            <a:pPr algn="ctr" indent="0" marL="0">
-              <a:buNone/>
-            </a:pPr>
-            <a:r>
-              <a:rPr lang="en-US" sz="1300" b="1" dirty="0">
-                <a:solidFill>
-                  <a:srgbClr val="5B6B7C"/>
-                </a:solidFill>
-                <a:latin typeface="Arial" pitchFamily="34" charset="0"/>
-                <a:ea typeface="Arial" pitchFamily="34" charset="-122"/>
-                <a:cs typeface="Arial" pitchFamily="34" charset="-120"/>
-              </a:rPr>
-              <a:t>4</a:t>
-            </a:r>
-            <a:endParaRPr lang="en-US" sz="1300" dirty="0"/>
-          </a:p>
-        </p:txBody>
-      </p:sp>
-      <p:sp>
-        <p:nvSpPr>
-          <p:cNvPr id="30" name="Text 28"/>
-          <p:cNvSpPr/>
-          <p:nvPr/>
-        </p:nvSpPr>
-        <p:spPr>
-          <a:xfrm>
-            <a:off x="7251192" y="1371600"/>
-            <a:ext cx="1426464" cy="384048"/>
-          </a:xfrm>
-          <a:prstGeom prst="rect">
-            <a:avLst/>
-          </a:prstGeom>
-          <a:noFill/>
-          <a:ln/>
-        </p:spPr>
-        <p:txBody>
-          <a:bodyPr wrap="square" lIns="0" tIns="0" rIns="0" bIns="0" rtlCol="0" anchor="ctr"/>
-          <a:lstStyle/>
-          <a:p>
-            <a:pPr indent="0" marL="0">
-              <a:buNone/>
-            </a:pPr>
-            <a:r>
-              <a:rPr lang="en-US" sz="1050" b="1" dirty="0">
-                <a:solidFill>
-                  <a:srgbClr val="5B6B7C"/>
-                </a:solidFill>
-                <a:latin typeface="Arial" pitchFamily="34" charset="0"/>
-                <a:ea typeface="Arial" pitchFamily="34" charset="-122"/>
-                <a:cs typeface="Arial" pitchFamily="34" charset="-120"/>
-              </a:rPr>
-              <a:t>Identity federation</a:t>
-            </a:r>
-            <a:endParaRPr lang="en-US" sz="1050" dirty="0"/>
-          </a:p>
-        </p:txBody>
-      </p:sp>
-      <p:sp>
-        <p:nvSpPr>
-          <p:cNvPr id="31" name="Text 29"/>
-          <p:cNvSpPr/>
-          <p:nvPr/>
-        </p:nvSpPr>
-        <p:spPr>
-          <a:xfrm>
-            <a:off x="6867144" y="1828800"/>
-            <a:ext cx="1773936" cy="566928"/>
-          </a:xfrm>
-          <a:prstGeom prst="rect">
-            <a:avLst/>
-          </a:prstGeom>
-          <a:noFill/>
-          <a:ln/>
-        </p:spPr>
-        <p:txBody>
-          <a:bodyPr wrap="square" lIns="0" tIns="0" rIns="0" bIns="0" rtlCol="0" anchor="ctr"/>
-          <a:lstStyle/>
-          <a:p>
-            <a:pPr indent="0" marL="0">
-              <a:buNone/>
-            </a:pPr>
-            <a:r>
-              <a:rPr lang="en-US" sz="850" dirty="0">
-                <a:solidFill>
-                  <a:srgbClr val="1E293B"/>
-                </a:solidFill>
-                <a:latin typeface="Arial" pitchFamily="34" charset="0"/>
-                <a:ea typeface="Arial" pitchFamily="34" charset="-122"/>
-                <a:cs typeface="Arial" pitchFamily="34" charset="-120"/>
-              </a:rPr>
-              <a:t>…</a:t>
-            </a:r>
-            <a:endParaRPr lang="en-US" sz="850" dirty="0"/>
-          </a:p>
-        </p:txBody>
-      </p:sp>
-      <p:sp>
-        <p:nvSpPr>
-          <p:cNvPr id="32" name="Shape 30"/>
-          <p:cNvSpPr/>
-          <p:nvPr/>
-        </p:nvSpPr>
-        <p:spPr>
-          <a:xfrm>
-            <a:off x="548640" y="3063240"/>
-            <a:ext cx="8138160" cy="1051560"/>
-          </a:xfrm>
-          <a:prstGeom prst="roundRect">
-            <a:avLst>
-              <a:gd name="adj" fmla="val 6087"/>
-            </a:avLst>
-          </a:prstGeom>
-          <a:solidFill>
-            <a:srgbClr val="F9EAE8"/>
-          </a:solidFill>
-          <a:ln w="9525">
-            <a:solidFill>
-              <a:srgbClr val="C9D4E0"/>
-            </a:solidFill>
-            <a:prstDash val="solid"/>
-          </a:ln>
-        </p:spPr>
-      </p:sp>
-      <p:sp>
-        <p:nvSpPr>
-          <p:cNvPr id="33" name="Text 31"/>
-          <p:cNvSpPr/>
-          <p:nvPr/>
-        </p:nvSpPr>
-        <p:spPr>
-          <a:xfrm>
-            <a:off x="777240" y="3063240"/>
-            <a:ext cx="7726680" cy="1051560"/>
-          </a:xfrm>
-          <a:prstGeom prst="rect">
-            <a:avLst/>
-          </a:prstGeom>
-          <a:noFill/>
-          <a:ln/>
-        </p:spPr>
-        <p:txBody>
-          <a:bodyPr wrap="square" lIns="0" tIns="0" rIns="0" bIns="0" rtlCol="0" anchor="ctr"/>
-          <a:lstStyle/>
-          <a:p>
-            <a:pPr indent="0" marL="0">
-              <a:buNone/>
-            </a:pPr>
-            <a:r>
-              <a:rPr lang="en-US" sz="1050" dirty="0">
-                <a:solidFill>
-                  <a:srgbClr val="1E293B"/>
-                </a:solidFill>
-                <a:latin typeface="Arial" pitchFamily="34" charset="0"/>
-                <a:ea typeface="Arial" pitchFamily="34" charset="-122"/>
-                <a:cs typeface="Arial" pitchFamily="34" charset="-120"/>
-              </a:rPr>
-              <a:t>In a modernized federal environment, human authentications are a rounding error. Every app-to-database connection, pipeline deployment, and service-to-service API call authenticates — and historically each used the worst credential in the estate: a service-account password in a connection string, rotated never, known to an unknowable set of people and scripts.</a:t>
-            </a:r>
-            <a:endParaRPr lang="en-US" sz="1050" dirty="0"/>
-          </a:p>
-        </p:txBody>
-      </p:sp>
-      <p:sp>
-        <p:nvSpPr>
-          <p:cNvPr id="34" name="Text 32"/>
-          <p:cNvSpPr/>
-          <p:nvPr/>
-        </p:nvSpPr>
-        <p:spPr>
-          <a:xfrm>
-            <a:off x="548640" y="4297680"/>
-            <a:ext cx="8138160" cy="457200"/>
-          </a:xfrm>
-          <a:prstGeom prst="rect">
-            <a:avLst/>
-          </a:prstGeom>
-          <a:noFill/>
-          <a:ln/>
-        </p:spPr>
-        <p:txBody>
-          <a:bodyPr wrap="square" lIns="0" tIns="0" rIns="0" bIns="0" rtlCol="0" anchor="ctr"/>
-          <a:lstStyle/>
-          <a:p>
-            <a:pPr algn="ctr" indent="0" marL="0">
-              <a:buNone/>
-            </a:pPr>
-            <a:endParaRPr lang="en-US" sz="1000" dirty="0"/>
           </a:p>
         </p:txBody>
       </p:sp>
@@ -15352,7 +15305,7 @@
                 <a:ea typeface="Arial" pitchFamily="34" charset="-122"/>
                 <a:cs typeface="Arial" pitchFamily="34" charset="-120"/>
               </a:rPr>
-              <a:t>MACHINE AND WORKLOAD IDENTITY — STEP 2 OF 2</a:t>
+              <a:t>MACHINE AND WORKLOAD IDENTITY — STEP 1 OF 2</a:t>
             </a:r>
             <a:endParaRPr lang="en-US" sz="1100" dirty="0"/>
           </a:p>
@@ -15391,7 +15344,7 @@
                 <a:ea typeface="Arial" pitchFamily="34" charset="-122"/>
                 <a:cs typeface="Arial" pitchFamily="34" charset="-120"/>
               </a:rPr>
-              <a:t>The progression: each stage removes a class of stored secret</a:t>
+              <a:t>The non-human majority still runs on the worst credential</a:t>
             </a:r>
             <a:endParaRPr lang="en-US" sz="2200" dirty="0"/>
           </a:p>
@@ -15430,7 +15383,7 @@
                 <a:ea typeface="Arial" pitchFamily="34" charset="-122"/>
                 <a:cs typeface="Arial" pitchFamily="34" charset="-120"/>
               </a:rPr>
-              <a:t>Federal AAN — Book 03 Certificates &amp; Tokens · CSI Team Draft — Internal · FedRAMP Moderate · Date Code 2026-07-07 10:32 ET</a:t>
+              <a:t>Federal AAN — Book 03 Certificates &amp; Tokens · CSI Team Draft — Internal · FedRAMP Moderate · Date Code 2026-07-07 11:57 ET</a:t>
             </a:r>
             <a:endParaRPr lang="en-US" sz="800" dirty="0"/>
           </a:p>
@@ -15478,6 +15431,40 @@
       <p:sp>
         <p:nvSpPr>
           <p:cNvPr id="6" name="Shape 4"/>
+          <p:cNvSpPr/>
+          <p:nvPr/>
+        </p:nvSpPr>
+        <p:spPr>
+          <a:xfrm>
+            <a:off x="338328" y="1225296"/>
+            <a:ext cx="2103120" cy="1682496"/>
+          </a:xfrm>
+          <a:prstGeom prst="roundRect">
+            <a:avLst>
+              <a:gd name="adj" fmla="val 4891"/>
+            </a:avLst>
+          </a:prstGeom>
+          <a:solidFill>
+            <a:srgbClr val="FFFFFF"/>
+          </a:solidFill>
+          <a:ln w="31750">
+            <a:solidFill>
+              <a:srgbClr val="D4860B"/>
+            </a:solidFill>
+            <a:prstDash val="solid"/>
+          </a:ln>
+          <a:effectLst>
+            <a:outerShdw sx="100000" sy="100000" kx="0" ky="0" algn="bl" rotWithShape="0" blurRad="88900" dist="25400" dir="2700000">
+              <a:srgbClr val="000000">
+                <a:alpha val="14000"/>
+              </a:srgbClr>
+            </a:outerShdw>
+          </a:effectLst>
+        </p:spPr>
+      </p:sp>
+      <p:sp>
+        <p:nvSpPr>
+          <p:cNvPr id="7" name="Shape 5"/>
           <p:cNvSpPr/>
           <p:nvPr/>
         </p:nvSpPr>
@@ -15511,7 +15498,7 @@
       </p:sp>
       <p:sp>
         <p:nvSpPr>
-          <p:cNvPr id="7" name="Shape 5"/>
+          <p:cNvPr id="8" name="Shape 6"/>
           <p:cNvSpPr/>
           <p:nvPr/>
         </p:nvSpPr>
@@ -15531,7 +15518,7 @@
       </p:sp>
       <p:sp>
         <p:nvSpPr>
-          <p:cNvPr id="8" name="Text 6"/>
+          <p:cNvPr id="9" name="Text 7"/>
           <p:cNvSpPr/>
           <p:nvPr/>
         </p:nvSpPr>
@@ -15570,7 +15557,7 @@
       </p:sp>
       <p:sp>
         <p:nvSpPr>
-          <p:cNvPr id="9" name="Text 7"/>
+          <p:cNvPr id="10" name="Text 8"/>
           <p:cNvSpPr/>
           <p:nvPr/>
         </p:nvSpPr>
@@ -15609,7 +15596,7 @@
       </p:sp>
       <p:sp>
         <p:nvSpPr>
-          <p:cNvPr id="10" name="Text 8"/>
+          <p:cNvPr id="11" name="Text 9"/>
           <p:cNvSpPr/>
           <p:nvPr/>
         </p:nvSpPr>
@@ -15648,7 +15635,7 @@
       </p:sp>
       <p:sp>
         <p:nvSpPr>
-          <p:cNvPr id="11" name="Text 9"/>
+          <p:cNvPr id="12" name="Text 10"/>
           <p:cNvSpPr/>
           <p:nvPr/>
         </p:nvSpPr>
@@ -15687,7 +15674,7 @@
       </p:sp>
       <p:sp>
         <p:nvSpPr>
-          <p:cNvPr id="12" name="Shape 10"/>
+          <p:cNvPr id="13" name="Shape 11"/>
           <p:cNvSpPr/>
           <p:nvPr/>
         </p:nvSpPr>
@@ -15702,7 +15689,7 @@
           <a:noFill/>
           <a:ln w="25400">
             <a:solidFill>
-              <a:srgbClr val="5B6B7C"/>
+              <a:srgbClr val="C9D4E0"/>
             </a:solidFill>
             <a:prstDash val="solid"/>
             <a:tailEnd type="triangle"/>
@@ -15711,7 +15698,7 @@
       </p:sp>
       <p:sp>
         <p:nvSpPr>
-          <p:cNvPr id="13" name="Shape 11"/>
+          <p:cNvPr id="14" name="Shape 12"/>
           <p:cNvSpPr/>
           <p:nvPr/>
         </p:nvSpPr>
@@ -15745,7 +15732,7 @@
       </p:sp>
       <p:sp>
         <p:nvSpPr>
-          <p:cNvPr id="14" name="Shape 12"/>
+          <p:cNvPr id="15" name="Shape 13"/>
           <p:cNvSpPr/>
           <p:nvPr/>
         </p:nvSpPr>
@@ -15765,7 +15752,7 @@
       </p:sp>
       <p:sp>
         <p:nvSpPr>
-          <p:cNvPr id="15" name="Text 13"/>
+          <p:cNvPr id="16" name="Text 14"/>
           <p:cNvSpPr/>
           <p:nvPr/>
         </p:nvSpPr>
@@ -15804,7 +15791,7 @@
       </p:sp>
       <p:sp>
         <p:nvSpPr>
-          <p:cNvPr id="16" name="Text 14"/>
+          <p:cNvPr id="17" name="Text 15"/>
           <p:cNvSpPr/>
           <p:nvPr/>
         </p:nvSpPr>
@@ -15843,7 +15830,7 @@
       </p:sp>
       <p:sp>
         <p:nvSpPr>
-          <p:cNvPr id="17" name="Text 15"/>
+          <p:cNvPr id="18" name="Text 16"/>
           <p:cNvSpPr/>
           <p:nvPr/>
         </p:nvSpPr>
@@ -15882,7 +15869,7 @@
       </p:sp>
       <p:sp>
         <p:nvSpPr>
-          <p:cNvPr id="18" name="Text 16"/>
+          <p:cNvPr id="19" name="Text 17"/>
           <p:cNvSpPr/>
           <p:nvPr/>
         </p:nvSpPr>
@@ -15921,7 +15908,7 @@
       </p:sp>
       <p:sp>
         <p:nvSpPr>
-          <p:cNvPr id="19" name="Shape 17"/>
+          <p:cNvPr id="20" name="Shape 18"/>
           <p:cNvSpPr/>
           <p:nvPr/>
         </p:nvSpPr>
@@ -15936,7 +15923,7 @@
           <a:noFill/>
           <a:ln w="25400">
             <a:solidFill>
-              <a:srgbClr val="5B6B7C"/>
+              <a:srgbClr val="C9D4E0"/>
             </a:solidFill>
             <a:prstDash val="solid"/>
             <a:tailEnd type="triangle"/>
@@ -15945,7 +15932,7 @@
       </p:sp>
       <p:sp>
         <p:nvSpPr>
-          <p:cNvPr id="20" name="Shape 18"/>
+          <p:cNvPr id="21" name="Shape 19"/>
           <p:cNvSpPr/>
           <p:nvPr/>
         </p:nvSpPr>
@@ -15960,7 +15947,7 @@
             </a:avLst>
           </a:prstGeom>
           <a:solidFill>
-            <a:srgbClr val="FFFFFF"/>
+            <a:srgbClr val="F3F5F8"/>
           </a:solidFill>
           <a:ln w="9525">
             <a:solidFill>
@@ -15968,18 +15955,11 @@
             </a:solidFill>
             <a:prstDash val="solid"/>
           </a:ln>
-          <a:effectLst>
-            <a:outerShdw sx="100000" sy="100000" kx="0" ky="0" algn="bl" rotWithShape="0" blurRad="88900" dist="25400" dir="2700000">
-              <a:srgbClr val="000000">
-                <a:alpha val="14000"/>
-              </a:srgbClr>
-            </a:outerShdw>
-          </a:effectLst>
-        </p:spPr>
-      </p:sp>
-      <p:sp>
-        <p:nvSpPr>
-          <p:cNvPr id="21" name="Shape 19"/>
+        </p:spPr>
+      </p:sp>
+      <p:sp>
+        <p:nvSpPr>
+          <p:cNvPr id="22" name="Shape 20"/>
           <p:cNvSpPr/>
           <p:nvPr/>
         </p:nvSpPr>
@@ -15992,14 +15972,14 @@
             <a:avLst/>
           </a:prstGeom>
           <a:solidFill>
-            <a:srgbClr val="1A9E8F"/>
+            <a:srgbClr val="C9D4E0"/>
           </a:solidFill>
           <a:ln/>
         </p:spPr>
       </p:sp>
       <p:sp>
         <p:nvSpPr>
-          <p:cNvPr id="22" name="Text 20"/>
+          <p:cNvPr id="23" name="Text 21"/>
           <p:cNvSpPr/>
           <p:nvPr/>
         </p:nvSpPr>
@@ -16024,7 +16004,7 @@
             <a:r>
               <a:rPr lang="en-US" sz="1300" b="1" dirty="0">
                 <a:solidFill>
-                  <a:srgbClr val="FFFFFF"/>
+                  <a:srgbClr val="5B6B7C"/>
                 </a:solidFill>
                 <a:latin typeface="Arial" pitchFamily="34" charset="0"/>
                 <a:ea typeface="Arial" pitchFamily="34" charset="-122"/>
@@ -16038,7 +16018,7 @@
       </p:sp>
       <p:sp>
         <p:nvSpPr>
-          <p:cNvPr id="23" name="Text 21"/>
+          <p:cNvPr id="24" name="Text 22"/>
           <p:cNvSpPr/>
           <p:nvPr/>
         </p:nvSpPr>
@@ -16063,7 +16043,7 @@
             <a:r>
               <a:rPr lang="en-US" sz="1050" b="1" dirty="0">
                 <a:solidFill>
-                  <a:srgbClr val="1E293B"/>
+                  <a:srgbClr val="5B6B7C"/>
                 </a:solidFill>
                 <a:latin typeface="Arial" pitchFamily="34" charset="0"/>
                 <a:ea typeface="Arial" pitchFamily="34" charset="-122"/>
@@ -16077,7 +16057,7 @@
       </p:sp>
       <p:sp>
         <p:nvSpPr>
-          <p:cNvPr id="24" name="Text 22"/>
+          <p:cNvPr id="25" name="Text 23"/>
           <p:cNvSpPr/>
           <p:nvPr/>
         </p:nvSpPr>
@@ -16108,48 +16088,9 @@
                 <a:ea typeface="Arial" pitchFamily="34" charset="-122"/>
                 <a:cs typeface="Arial" pitchFamily="34" charset="-120"/>
               </a:rPr>
-              <a:t>Platform-issued token; no credential in application custody — the platform attests the workload</a:t>
+              <a:t>…</a:t>
             </a:r>
             <a:endParaRPr lang="en-US" sz="850" dirty="0"/>
-          </a:p>
-        </p:txBody>
-      </p:sp>
-      <p:sp>
-        <p:nvSpPr>
-          <p:cNvPr id="25" name="Text 23"/>
-          <p:cNvSpPr/>
-          <p:nvPr/>
-        </p:nvSpPr>
-        <p:spPr>
-          <a:xfrm>
-            <a:off x="4745736" y="2414016"/>
-            <a:ext cx="1773936" cy="402336"/>
-          </a:xfrm>
-          <a:prstGeom prst="rect">
-            <a:avLst/>
-          </a:prstGeom>
-          <a:noFill/>
-          <a:ln/>
-        </p:spPr>
-        <p:txBody>
-          <a:bodyPr wrap="square" lIns="0" tIns="0" rIns="0" bIns="0" rtlCol="0" anchor="ctr"/>
-          <a:lstStyle/>
-          <a:p>
-            <a:pPr indent="0" marL="0">
-              <a:buNone/>
-            </a:pPr>
-            <a:r>
-              <a:rPr lang="en-US" sz="750" i="1" dirty="0">
-                <a:solidFill>
-                  <a:srgbClr val="1A9E8F"/>
-                </a:solidFill>
-                <a:latin typeface="Arial" pitchFamily="34" charset="0"/>
-                <a:ea typeface="Arial" pitchFamily="34" charset="-122"/>
-                <a:cs typeface="Arial" pitchFamily="34" charset="-120"/>
-              </a:rPr>
-              <a:t>Compromise requires compromising the workload itself — the irreducible case</a:t>
-            </a:r>
-            <a:endParaRPr lang="en-US" sz="750" dirty="0"/>
           </a:p>
         </p:txBody>
       </p:sp>
@@ -16170,7 +16111,7 @@
           <a:noFill/>
           <a:ln w="25400">
             <a:solidFill>
-              <a:srgbClr val="5B6B7C"/>
+              <a:srgbClr val="C9D4E0"/>
             </a:solidFill>
             <a:prstDash val="solid"/>
             <a:tailEnd type="triangle"/>
@@ -16194,7 +16135,7 @@
             </a:avLst>
           </a:prstGeom>
           <a:solidFill>
-            <a:srgbClr val="FFFFFF"/>
+            <a:srgbClr val="F3F5F8"/>
           </a:solidFill>
           <a:ln w="9525">
             <a:solidFill>
@@ -16202,13 +16143,6 @@
             </a:solidFill>
             <a:prstDash val="solid"/>
           </a:ln>
-          <a:effectLst>
-            <a:outerShdw sx="100000" sy="100000" kx="0" ky="0" algn="bl" rotWithShape="0" blurRad="88900" dist="25400" dir="2700000">
-              <a:srgbClr val="000000">
-                <a:alpha val="14000"/>
-              </a:srgbClr>
-            </a:outerShdw>
-          </a:effectLst>
         </p:spPr>
       </p:sp>
       <p:sp>
@@ -16226,7 +16160,7 @@
             <a:avLst/>
           </a:prstGeom>
           <a:solidFill>
-            <a:srgbClr val="1F3A5F"/>
+            <a:srgbClr val="C9D4E0"/>
           </a:solidFill>
           <a:ln/>
         </p:spPr>
@@ -16258,7 +16192,7 @@
             <a:r>
               <a:rPr lang="en-US" sz="1300" b="1" dirty="0">
                 <a:solidFill>
-                  <a:srgbClr val="FFFFFF"/>
+                  <a:srgbClr val="5B6B7C"/>
                 </a:solidFill>
                 <a:latin typeface="Arial" pitchFamily="34" charset="0"/>
                 <a:ea typeface="Arial" pitchFamily="34" charset="-122"/>
@@ -16297,7 +16231,7 @@
             <a:r>
               <a:rPr lang="en-US" sz="1050" b="1" dirty="0">
                 <a:solidFill>
-                  <a:srgbClr val="1E293B"/>
+                  <a:srgbClr val="5B6B7C"/>
                 </a:solidFill>
                 <a:latin typeface="Arial" pitchFamily="34" charset="0"/>
                 <a:ea typeface="Arial" pitchFamily="34" charset="-122"/>
@@ -16342,7 +16276,7 @@
                 <a:ea typeface="Arial" pitchFamily="34" charset="-122"/>
                 <a:cs typeface="Arial" pitchFamily="34" charset="-120"/>
               </a:rPr>
-              <a:t>External workload exchanges its own platform's OIDC token; no secret crosses the boundary</a:t>
+              <a:t>…</a:t>
             </a:r>
             <a:endParaRPr lang="en-US" sz="850" dirty="0"/>
           </a:p>
@@ -16350,46 +16284,7 @@
       </p:sp>
       <p:sp>
         <p:nvSpPr>
-          <p:cNvPr id="32" name="Text 30"/>
-          <p:cNvSpPr/>
-          <p:nvPr/>
-        </p:nvSpPr>
-        <p:spPr>
-          <a:xfrm>
-            <a:off x="6867144" y="2414016"/>
-            <a:ext cx="1773936" cy="402336"/>
-          </a:xfrm>
-          <a:prstGeom prst="rect">
-            <a:avLst/>
-          </a:prstGeom>
-          <a:noFill/>
-          <a:ln/>
-        </p:spPr>
-        <p:txBody>
-          <a:bodyPr wrap="square" lIns="0" tIns="0" rIns="0" bIns="0" rtlCol="0" anchor="ctr"/>
-          <a:lstStyle/>
-          <a:p>
-            <a:pPr indent="0" marL="0">
-              <a:buNone/>
-            </a:pPr>
-            <a:r>
-              <a:rPr lang="en-US" sz="750" i="1" dirty="0">
-                <a:solidFill>
-                  <a:srgbClr val="1F3A5F"/>
-                </a:solidFill>
-                <a:latin typeface="Arial" pitchFamily="34" charset="0"/>
-                <a:ea typeface="Arial" pitchFamily="34" charset="-122"/>
-                <a:cs typeface="Arial" pitchFamily="34" charset="-120"/>
-              </a:rPr>
-              <a:t>Trust misconfiguration — governed as policy, not secret custody</a:t>
-            </a:r>
-            <a:endParaRPr lang="en-US" sz="750" dirty="0"/>
-          </a:p>
-        </p:txBody>
-      </p:sp>
-      <p:sp>
-        <p:nvSpPr>
-          <p:cNvPr id="33" name="Shape 31"/>
+          <p:cNvPr id="32" name="Shape 30"/>
           <p:cNvSpPr/>
           <p:nvPr/>
         </p:nvSpPr>
@@ -16404,7 +16299,7 @@
             </a:avLst>
           </a:prstGeom>
           <a:solidFill>
-            <a:srgbClr val="E6F5F2"/>
+            <a:srgbClr val="F9EAE8"/>
           </a:solidFill>
           <a:ln w="9525">
             <a:solidFill>
@@ -16416,7 +16311,7 @@
       </p:sp>
       <p:sp>
         <p:nvSpPr>
-          <p:cNvPr id="34" name="Text 32"/>
+          <p:cNvPr id="33" name="Text 31"/>
           <p:cNvSpPr/>
           <p:nvPr/>
         </p:nvSpPr>
@@ -16447,7 +16342,7 @@
                 <a:ea typeface="Arial" pitchFamily="34" charset="-122"/>
                 <a:cs typeface="Arial" pitchFamily="34" charset="-120"/>
               </a:rPr>
-              <a:t>Secret everywhere → secret somewhere → secret nowhere → secret nowhere on either side. The SPIFFE model formalizes the same doctrine: short-lived, automatically issued, attested credentials bound to a workload's verified identity. There is no secret to leak because there is no secret.</a:t>
+              <a:t>In a modernized federal environment, human authentications are a rounding error. Every app-to-database connection, pipeline deployment, and service-to-service API call authenticates — and historically each used the worst credential in the estate: a service-account password in a connection string, rotated never, known to an unknowable set of people and scripts.</a:t>
             </a:r>
             <a:endParaRPr lang="en-US" sz="1050" dirty="0"/>
           </a:p>
@@ -16455,7 +16350,7 @@
       </p:sp>
       <p:sp>
         <p:nvSpPr>
-          <p:cNvPr id="35" name="Text 33"/>
+          <p:cNvPr id="34" name="Text 32"/>
           <p:cNvSpPr/>
           <p:nvPr/>
         </p:nvSpPr>
@@ -16477,17 +16372,6 @@
             <a:pPr algn="ctr" indent="0" marL="0">
               <a:buNone/>
             </a:pPr>
-            <a:r>
-              <a:rPr lang="en-US" sz="1000" i="1" dirty="0">
-                <a:solidFill>
-                  <a:srgbClr val="5B6B7C"/>
-                </a:solidFill>
-                <a:latin typeface="Arial" pitchFamily="34" charset="0"/>
-                <a:ea typeface="Arial" pitchFamily="34" charset="-122"/>
-                <a:cs typeface="Arial" pitchFamily="34" charset="-120"/>
-              </a:rPr>
-              <a:t>Books 07–08 execute this progression end-to-end against the SQL Server estate — the first proof that session-bound authentication can be removed, not merely deprecated.</a:t>
-            </a:r>
             <a:endParaRPr lang="en-US" sz="1000" dirty="0"/>
           </a:p>
         </p:txBody>
@@ -16557,7 +16441,7 @@
                 <a:ea typeface="Arial" pitchFamily="34" charset="-122"/>
                 <a:cs typeface="Arial" pitchFamily="34" charset="-120"/>
               </a:rPr>
-              <a:t>KEY CUSTODY</a:t>
+              <a:t>MACHINE AND WORKLOAD IDENTITY — STEP 2 OF 2</a:t>
             </a:r>
             <a:endParaRPr lang="en-US" sz="1100" dirty="0"/>
           </a:p>
@@ -16588,7 +16472,7 @@
               <a:buNone/>
             </a:pPr>
             <a:r>
-              <a:rPr lang="en-US" sz="2600" b="1" dirty="0">
+              <a:rPr lang="en-US" sz="2200" b="1" dirty="0">
                 <a:solidFill>
                   <a:srgbClr val="1F3A5F"/>
                 </a:solidFill>
@@ -16596,9 +16480,9 @@
                 <a:ea typeface="Arial" pitchFamily="34" charset="-122"/>
                 <a:cs typeface="Arial" pitchFamily="34" charset="-120"/>
               </a:rPr>
-              <a:t>Where keys live: deeper in hardware as they live longer</a:t>
-            </a:r>
-            <a:endParaRPr lang="en-US" sz="2600" dirty="0"/>
+              <a:t>The progression: each stage removes a class of stored secret</a:t>
+            </a:r>
+            <a:endParaRPr lang="en-US" sz="2200" dirty="0"/>
           </a:p>
         </p:txBody>
       </p:sp>
@@ -16635,7 +16519,7 @@
                 <a:ea typeface="Arial" pitchFamily="34" charset="-122"/>
                 <a:cs typeface="Arial" pitchFamily="34" charset="-120"/>
               </a:rPr>
-              <a:t>Federal AAN — Book 03 Certificates &amp; Tokens · CSI Team Draft — Internal · FedRAMP Moderate · Date Code 2026-07-07 10:32 ET</a:t>
+              <a:t>Federal AAN — Book 03 Certificates &amp; Tokens · CSI Team Draft — Internal · FedRAMP Moderate · Date Code 2026-07-07 11:57 ET</a:t>
             </a:r>
             <a:endParaRPr lang="en-US" sz="800" dirty="0"/>
           </a:p>
@@ -16680,9 +16564,1214 @@
           </a:p>
         </p:txBody>
       </p:sp>
+      <p:sp>
+        <p:nvSpPr>
+          <p:cNvPr id="6" name="Shape 4"/>
+          <p:cNvSpPr/>
+          <p:nvPr/>
+        </p:nvSpPr>
+        <p:spPr>
+          <a:xfrm>
+            <a:off x="393192" y="1280160"/>
+            <a:ext cx="1993392" cy="1572768"/>
+          </a:xfrm>
+          <a:prstGeom prst="roundRect">
+            <a:avLst>
+              <a:gd name="adj" fmla="val 4070"/>
+            </a:avLst>
+          </a:prstGeom>
+          <a:solidFill>
+            <a:srgbClr val="FFFFFF"/>
+          </a:solidFill>
+          <a:ln w="9525">
+            <a:solidFill>
+              <a:srgbClr val="C9D4E0"/>
+            </a:solidFill>
+            <a:prstDash val="solid"/>
+          </a:ln>
+          <a:effectLst>
+            <a:outerShdw sx="100000" sy="100000" kx="0" ky="0" algn="bl" rotWithShape="0" blurRad="88900" dist="25400" dir="2700000">
+              <a:srgbClr val="000000">
+                <a:alpha val="14000"/>
+              </a:srgbClr>
+            </a:outerShdw>
+          </a:effectLst>
+        </p:spPr>
+      </p:sp>
+      <p:sp>
+        <p:nvSpPr>
+          <p:cNvPr id="7" name="Shape 5"/>
+          <p:cNvSpPr/>
+          <p:nvPr/>
+        </p:nvSpPr>
+        <p:spPr>
+          <a:xfrm>
+            <a:off x="502920" y="1389888"/>
+            <a:ext cx="310896" cy="310896"/>
+          </a:xfrm>
+          <a:prstGeom prst="ellipse">
+            <a:avLst/>
+          </a:prstGeom>
+          <a:solidFill>
+            <a:srgbClr val="C0392B"/>
+          </a:solidFill>
+          <a:ln/>
+        </p:spPr>
+      </p:sp>
+      <p:sp>
+        <p:nvSpPr>
+          <p:cNvPr id="8" name="Text 6"/>
+          <p:cNvSpPr/>
+          <p:nvPr/>
+        </p:nvSpPr>
+        <p:spPr>
+          <a:xfrm>
+            <a:off x="502920" y="1376172"/>
+            <a:ext cx="310896" cy="310896"/>
+          </a:xfrm>
+          <a:prstGeom prst="rect">
+            <a:avLst/>
+          </a:prstGeom>
+          <a:noFill/>
+          <a:ln/>
+        </p:spPr>
+        <p:txBody>
+          <a:bodyPr wrap="square" lIns="0" tIns="0" rIns="0" bIns="0" rtlCol="0" anchor="ctr"/>
+          <a:lstStyle/>
+          <a:p>
+            <a:pPr algn="ctr" indent="0" marL="0">
+              <a:buNone/>
+            </a:pPr>
+            <a:r>
+              <a:rPr lang="en-US" sz="1300" b="1" dirty="0">
+                <a:solidFill>
+                  <a:srgbClr val="FFFFFF"/>
+                </a:solidFill>
+                <a:latin typeface="Arial" pitchFamily="34" charset="0"/>
+                <a:ea typeface="Arial" pitchFamily="34" charset="-122"/>
+                <a:cs typeface="Arial" pitchFamily="34" charset="-120"/>
+              </a:rPr>
+              <a:t>1</a:t>
+            </a:r>
+            <a:endParaRPr lang="en-US" sz="1300" dirty="0"/>
+          </a:p>
+        </p:txBody>
+      </p:sp>
+      <p:sp>
+        <p:nvSpPr>
+          <p:cNvPr id="9" name="Text 7"/>
+          <p:cNvSpPr/>
+          <p:nvPr/>
+        </p:nvSpPr>
+        <p:spPr>
+          <a:xfrm>
+            <a:off x="886968" y="1371600"/>
+            <a:ext cx="1426464" cy="384048"/>
+          </a:xfrm>
+          <a:prstGeom prst="rect">
+            <a:avLst/>
+          </a:prstGeom>
+          <a:noFill/>
+          <a:ln/>
+        </p:spPr>
+        <p:txBody>
+          <a:bodyPr wrap="square" lIns="0" tIns="0" rIns="0" bIns="0" rtlCol="0" anchor="ctr"/>
+          <a:lstStyle/>
+          <a:p>
+            <a:pPr indent="0" marL="0">
+              <a:buNone/>
+            </a:pPr>
+            <a:r>
+              <a:rPr lang="en-US" sz="1050" b="1" dirty="0">
+                <a:solidFill>
+                  <a:srgbClr val="1E293B"/>
+                </a:solidFill>
+                <a:latin typeface="Arial" pitchFamily="34" charset="0"/>
+                <a:ea typeface="Arial" pitchFamily="34" charset="-122"/>
+                <a:cs typeface="Arial" pitchFamily="34" charset="-120"/>
+              </a:rPr>
+              <a:t>Service account</a:t>
+            </a:r>
+            <a:endParaRPr lang="en-US" sz="1050" dirty="0"/>
+          </a:p>
+        </p:txBody>
+      </p:sp>
+      <p:sp>
+        <p:nvSpPr>
+          <p:cNvPr id="10" name="Text 8"/>
+          <p:cNvSpPr/>
+          <p:nvPr/>
+        </p:nvSpPr>
+        <p:spPr>
+          <a:xfrm>
+            <a:off x="502920" y="1828800"/>
+            <a:ext cx="1773936" cy="566928"/>
+          </a:xfrm>
+          <a:prstGeom prst="rect">
+            <a:avLst/>
+          </a:prstGeom>
+          <a:noFill/>
+          <a:ln/>
+        </p:spPr>
+        <p:txBody>
+          <a:bodyPr wrap="square" lIns="0" tIns="0" rIns="0" bIns="0" rtlCol="0" anchor="ctr"/>
+          <a:lstStyle/>
+          <a:p>
+            <a:pPr indent="0" marL="0">
+              <a:buNone/>
+            </a:pPr>
+            <a:r>
+              <a:rPr lang="en-US" sz="850" dirty="0">
+                <a:solidFill>
+                  <a:srgbClr val="1E293B"/>
+                </a:solidFill>
+                <a:latin typeface="Arial" pitchFamily="34" charset="0"/>
+                <a:ea typeface="Arial" pitchFamily="34" charset="-122"/>
+                <a:cs typeface="Arial" pitchFamily="34" charset="-120"/>
+              </a:rPr>
+              <a:t>Password in configuration — the password exists everywhere the config goes</a:t>
+            </a:r>
+            <a:endParaRPr lang="en-US" sz="850" dirty="0"/>
+          </a:p>
+        </p:txBody>
+      </p:sp>
+      <p:sp>
+        <p:nvSpPr>
+          <p:cNvPr id="11" name="Text 9"/>
+          <p:cNvSpPr/>
+          <p:nvPr/>
+        </p:nvSpPr>
+        <p:spPr>
+          <a:xfrm>
+            <a:off x="502920" y="2414016"/>
+            <a:ext cx="1773936" cy="402336"/>
+          </a:xfrm>
+          <a:prstGeom prst="rect">
+            <a:avLst/>
+          </a:prstGeom>
+          <a:noFill/>
+          <a:ln/>
+        </p:spPr>
+        <p:txBody>
+          <a:bodyPr wrap="square" lIns="0" tIns="0" rIns="0" bIns="0" rtlCol="0" anchor="ctr"/>
+          <a:lstStyle/>
+          <a:p>
+            <a:pPr indent="0" marL="0">
+              <a:buNone/>
+            </a:pPr>
+            <a:r>
+              <a:rPr lang="en-US" sz="750" i="1" dirty="0">
+                <a:solidFill>
+                  <a:srgbClr val="C0392B"/>
+                </a:solidFill>
+                <a:latin typeface="Arial" pitchFamily="34" charset="0"/>
+                <a:ea typeface="Arial" pitchFamily="34" charset="-122"/>
+                <a:cs typeface="Arial" pitchFamily="34" charset="-120"/>
+              </a:rPr>
+              <a:t>Pass-the-hash · credential sprawl · rotation outages</a:t>
+            </a:r>
+            <a:endParaRPr lang="en-US" sz="750" dirty="0"/>
+          </a:p>
+        </p:txBody>
+      </p:sp>
+      <p:sp>
+        <p:nvSpPr>
+          <p:cNvPr id="12" name="Shape 10"/>
+          <p:cNvSpPr/>
+          <p:nvPr/>
+        </p:nvSpPr>
+        <p:spPr>
+          <a:xfrm>
+            <a:off x="2404872" y="2066544"/>
+            <a:ext cx="91440" cy="0"/>
+          </a:xfrm>
+          <a:prstGeom prst="line">
+            <a:avLst/>
+          </a:prstGeom>
+          <a:noFill/>
+          <a:ln w="25400">
+            <a:solidFill>
+              <a:srgbClr val="5B6B7C"/>
+            </a:solidFill>
+            <a:prstDash val="solid"/>
+            <a:tailEnd type="triangle"/>
+          </a:ln>
+        </p:spPr>
+      </p:sp>
+      <p:sp>
+        <p:nvSpPr>
+          <p:cNvPr id="13" name="Shape 11"/>
+          <p:cNvSpPr/>
+          <p:nvPr/>
+        </p:nvSpPr>
+        <p:spPr>
+          <a:xfrm>
+            <a:off x="2514600" y="1280160"/>
+            <a:ext cx="1993392" cy="1572768"/>
+          </a:xfrm>
+          <a:prstGeom prst="roundRect">
+            <a:avLst>
+              <a:gd name="adj" fmla="val 4070"/>
+            </a:avLst>
+          </a:prstGeom>
+          <a:solidFill>
+            <a:srgbClr val="FFFFFF"/>
+          </a:solidFill>
+          <a:ln w="9525">
+            <a:solidFill>
+              <a:srgbClr val="C9D4E0"/>
+            </a:solidFill>
+            <a:prstDash val="solid"/>
+          </a:ln>
+          <a:effectLst>
+            <a:outerShdw sx="100000" sy="100000" kx="0" ky="0" algn="bl" rotWithShape="0" blurRad="88900" dist="25400" dir="2700000">
+              <a:srgbClr val="000000">
+                <a:alpha val="14000"/>
+              </a:srgbClr>
+            </a:outerShdw>
+          </a:effectLst>
+        </p:spPr>
+      </p:sp>
+      <p:sp>
+        <p:nvSpPr>
+          <p:cNvPr id="14" name="Shape 12"/>
+          <p:cNvSpPr/>
+          <p:nvPr/>
+        </p:nvSpPr>
+        <p:spPr>
+          <a:xfrm>
+            <a:off x="2624328" y="1389888"/>
+            <a:ext cx="310896" cy="310896"/>
+          </a:xfrm>
+          <a:prstGeom prst="ellipse">
+            <a:avLst/>
+          </a:prstGeom>
+          <a:solidFill>
+            <a:srgbClr val="D4860B"/>
+          </a:solidFill>
+          <a:ln/>
+        </p:spPr>
+      </p:sp>
+      <p:sp>
+        <p:nvSpPr>
+          <p:cNvPr id="15" name="Text 13"/>
+          <p:cNvSpPr/>
+          <p:nvPr/>
+        </p:nvSpPr>
+        <p:spPr>
+          <a:xfrm>
+            <a:off x="2624328" y="1376172"/>
+            <a:ext cx="310896" cy="310896"/>
+          </a:xfrm>
+          <a:prstGeom prst="rect">
+            <a:avLst/>
+          </a:prstGeom>
+          <a:noFill/>
+          <a:ln/>
+        </p:spPr>
+        <p:txBody>
+          <a:bodyPr wrap="square" lIns="0" tIns="0" rIns="0" bIns="0" rtlCol="0" anchor="ctr"/>
+          <a:lstStyle/>
+          <a:p>
+            <a:pPr algn="ctr" indent="0" marL="0">
+              <a:buNone/>
+            </a:pPr>
+            <a:r>
+              <a:rPr lang="en-US" sz="1300" b="1" dirty="0">
+                <a:solidFill>
+                  <a:srgbClr val="FFFFFF"/>
+                </a:solidFill>
+                <a:latin typeface="Arial" pitchFamily="34" charset="0"/>
+                <a:ea typeface="Arial" pitchFamily="34" charset="-122"/>
+                <a:cs typeface="Arial" pitchFamily="34" charset="-120"/>
+              </a:rPr>
+              <a:t>2</a:t>
+            </a:r>
+            <a:endParaRPr lang="en-US" sz="1300" dirty="0"/>
+          </a:p>
+        </p:txBody>
+      </p:sp>
+      <p:sp>
+        <p:nvSpPr>
+          <p:cNvPr id="16" name="Text 14"/>
+          <p:cNvSpPr/>
+          <p:nvPr/>
+        </p:nvSpPr>
+        <p:spPr>
+          <a:xfrm>
+            <a:off x="3008376" y="1371600"/>
+            <a:ext cx="1426464" cy="384048"/>
+          </a:xfrm>
+          <a:prstGeom prst="rect">
+            <a:avLst/>
+          </a:prstGeom>
+          <a:noFill/>
+          <a:ln/>
+        </p:spPr>
+        <p:txBody>
+          <a:bodyPr wrap="square" lIns="0" tIns="0" rIns="0" bIns="0" rtlCol="0" anchor="ctr"/>
+          <a:lstStyle/>
+          <a:p>
+            <a:pPr indent="0" marL="0">
+              <a:buNone/>
+            </a:pPr>
+            <a:r>
+              <a:rPr lang="en-US" sz="1050" b="1" dirty="0">
+                <a:solidFill>
+                  <a:srgbClr val="1E293B"/>
+                </a:solidFill>
+                <a:latin typeface="Arial" pitchFamily="34" charset="0"/>
+                <a:ea typeface="Arial" pitchFamily="34" charset="-122"/>
+                <a:cs typeface="Arial" pitchFamily="34" charset="-120"/>
+              </a:rPr>
+              <a:t>Service principal</a:t>
+            </a:r>
+            <a:endParaRPr lang="en-US" sz="1050" dirty="0"/>
+          </a:p>
+        </p:txBody>
+      </p:sp>
+      <p:sp>
+        <p:nvSpPr>
+          <p:cNvPr id="17" name="Text 15"/>
+          <p:cNvSpPr/>
+          <p:nvPr/>
+        </p:nvSpPr>
+        <p:spPr>
+          <a:xfrm>
+            <a:off x="2624328" y="1828800"/>
+            <a:ext cx="1773936" cy="566928"/>
+          </a:xfrm>
+          <a:prstGeom prst="rect">
+            <a:avLst/>
+          </a:prstGeom>
+          <a:noFill/>
+          <a:ln/>
+        </p:spPr>
+        <p:txBody>
+          <a:bodyPr wrap="square" lIns="0" tIns="0" rIns="0" bIns="0" rtlCol="0" anchor="ctr"/>
+          <a:lstStyle/>
+          <a:p>
+            <a:pPr indent="0" marL="0">
+              <a:buNone/>
+            </a:pPr>
+            <a:r>
+              <a:rPr lang="en-US" sz="850" dirty="0">
+                <a:solidFill>
+                  <a:srgbClr val="1E293B"/>
+                </a:solidFill>
+                <a:latin typeface="Arial" pitchFamily="34" charset="0"/>
+                <a:ea typeface="Arial" pitchFamily="34" charset="-122"/>
+                <a:cs typeface="Arial" pitchFamily="34" charset="-120"/>
+              </a:rPr>
+              <a:t>Client secret or certificate held by the application</a:t>
+            </a:r>
+            <a:endParaRPr lang="en-US" sz="850" dirty="0"/>
+          </a:p>
+        </p:txBody>
+      </p:sp>
+      <p:sp>
+        <p:nvSpPr>
+          <p:cNvPr id="18" name="Text 16"/>
+          <p:cNvSpPr/>
+          <p:nvPr/>
+        </p:nvSpPr>
+        <p:spPr>
+          <a:xfrm>
+            <a:off x="2624328" y="2414016"/>
+            <a:ext cx="1773936" cy="402336"/>
+          </a:xfrm>
+          <a:prstGeom prst="rect">
+            <a:avLst/>
+          </a:prstGeom>
+          <a:noFill/>
+          <a:ln/>
+        </p:spPr>
+        <p:txBody>
+          <a:bodyPr wrap="square" lIns="0" tIns="0" rIns="0" bIns="0" rtlCol="0" anchor="ctr"/>
+          <a:lstStyle/>
+          <a:p>
+            <a:pPr indent="0" marL="0">
+              <a:buNone/>
+            </a:pPr>
+            <a:r>
+              <a:rPr lang="en-US" sz="750" i="1" dirty="0">
+                <a:solidFill>
+                  <a:srgbClr val="D4860B"/>
+                </a:solidFill>
+                <a:latin typeface="Arial" pitchFamily="34" charset="0"/>
+                <a:ea typeface="Arial" pitchFamily="34" charset="-122"/>
+                <a:cs typeface="Arial" pitchFamily="34" charset="-120"/>
+              </a:rPr>
+              <a:t>Leaked secrets in code repos · expiry outages</a:t>
+            </a:r>
+            <a:endParaRPr lang="en-US" sz="750" dirty="0"/>
+          </a:p>
+        </p:txBody>
+      </p:sp>
+      <p:sp>
+        <p:nvSpPr>
+          <p:cNvPr id="19" name="Shape 17"/>
+          <p:cNvSpPr/>
+          <p:nvPr/>
+        </p:nvSpPr>
+        <p:spPr>
+          <a:xfrm>
+            <a:off x="4526280" y="2066544"/>
+            <a:ext cx="91440" cy="0"/>
+          </a:xfrm>
+          <a:prstGeom prst="line">
+            <a:avLst/>
+          </a:prstGeom>
+          <a:noFill/>
+          <a:ln w="25400">
+            <a:solidFill>
+              <a:srgbClr val="5B6B7C"/>
+            </a:solidFill>
+            <a:prstDash val="solid"/>
+            <a:tailEnd type="triangle"/>
+          </a:ln>
+        </p:spPr>
+      </p:sp>
+      <p:sp>
+        <p:nvSpPr>
+          <p:cNvPr id="20" name="Shape 18"/>
+          <p:cNvSpPr/>
+          <p:nvPr/>
+        </p:nvSpPr>
+        <p:spPr>
+          <a:xfrm>
+            <a:off x="4636008" y="1280160"/>
+            <a:ext cx="1993392" cy="1572768"/>
+          </a:xfrm>
+          <a:prstGeom prst="roundRect">
+            <a:avLst>
+              <a:gd name="adj" fmla="val 4070"/>
+            </a:avLst>
+          </a:prstGeom>
+          <a:solidFill>
+            <a:srgbClr val="FFFFFF"/>
+          </a:solidFill>
+          <a:ln w="9525">
+            <a:solidFill>
+              <a:srgbClr val="C9D4E0"/>
+            </a:solidFill>
+            <a:prstDash val="solid"/>
+          </a:ln>
+          <a:effectLst>
+            <a:outerShdw sx="100000" sy="100000" kx="0" ky="0" algn="bl" rotWithShape="0" blurRad="88900" dist="25400" dir="2700000">
+              <a:srgbClr val="000000">
+                <a:alpha val="14000"/>
+              </a:srgbClr>
+            </a:outerShdw>
+          </a:effectLst>
+        </p:spPr>
+      </p:sp>
+      <p:sp>
+        <p:nvSpPr>
+          <p:cNvPr id="21" name="Shape 19"/>
+          <p:cNvSpPr/>
+          <p:nvPr/>
+        </p:nvSpPr>
+        <p:spPr>
+          <a:xfrm>
+            <a:off x="4745736" y="1389888"/>
+            <a:ext cx="310896" cy="310896"/>
+          </a:xfrm>
+          <a:prstGeom prst="ellipse">
+            <a:avLst/>
+          </a:prstGeom>
+          <a:solidFill>
+            <a:srgbClr val="1A9E8F"/>
+          </a:solidFill>
+          <a:ln/>
+        </p:spPr>
+      </p:sp>
+      <p:sp>
+        <p:nvSpPr>
+          <p:cNvPr id="22" name="Text 20"/>
+          <p:cNvSpPr/>
+          <p:nvPr/>
+        </p:nvSpPr>
+        <p:spPr>
+          <a:xfrm>
+            <a:off x="4745736" y="1376172"/>
+            <a:ext cx="310896" cy="310896"/>
+          </a:xfrm>
+          <a:prstGeom prst="rect">
+            <a:avLst/>
+          </a:prstGeom>
+          <a:noFill/>
+          <a:ln/>
+        </p:spPr>
+        <p:txBody>
+          <a:bodyPr wrap="square" lIns="0" tIns="0" rIns="0" bIns="0" rtlCol="0" anchor="ctr"/>
+          <a:lstStyle/>
+          <a:p>
+            <a:pPr algn="ctr" indent="0" marL="0">
+              <a:buNone/>
+            </a:pPr>
+            <a:r>
+              <a:rPr lang="en-US" sz="1300" b="1" dirty="0">
+                <a:solidFill>
+                  <a:srgbClr val="FFFFFF"/>
+                </a:solidFill>
+                <a:latin typeface="Arial" pitchFamily="34" charset="0"/>
+                <a:ea typeface="Arial" pitchFamily="34" charset="-122"/>
+                <a:cs typeface="Arial" pitchFamily="34" charset="-120"/>
+              </a:rPr>
+              <a:t>3</a:t>
+            </a:r>
+            <a:endParaRPr lang="en-US" sz="1300" dirty="0"/>
+          </a:p>
+        </p:txBody>
+      </p:sp>
+      <p:sp>
+        <p:nvSpPr>
+          <p:cNvPr id="23" name="Text 21"/>
+          <p:cNvSpPr/>
+          <p:nvPr/>
+        </p:nvSpPr>
+        <p:spPr>
+          <a:xfrm>
+            <a:off x="5129784" y="1371600"/>
+            <a:ext cx="1426464" cy="384048"/>
+          </a:xfrm>
+          <a:prstGeom prst="rect">
+            <a:avLst/>
+          </a:prstGeom>
+          <a:noFill/>
+          <a:ln/>
+        </p:spPr>
+        <p:txBody>
+          <a:bodyPr wrap="square" lIns="0" tIns="0" rIns="0" bIns="0" rtlCol="0" anchor="ctr"/>
+          <a:lstStyle/>
+          <a:p>
+            <a:pPr indent="0" marL="0">
+              <a:buNone/>
+            </a:pPr>
+            <a:r>
+              <a:rPr lang="en-US" sz="1050" b="1" dirty="0">
+                <a:solidFill>
+                  <a:srgbClr val="1E293B"/>
+                </a:solidFill>
+                <a:latin typeface="Arial" pitchFamily="34" charset="0"/>
+                <a:ea typeface="Arial" pitchFamily="34" charset="-122"/>
+                <a:cs typeface="Arial" pitchFamily="34" charset="-120"/>
+              </a:rPr>
+              <a:t>Managed identity</a:t>
+            </a:r>
+            <a:endParaRPr lang="en-US" sz="1050" dirty="0"/>
+          </a:p>
+        </p:txBody>
+      </p:sp>
+      <p:sp>
+        <p:nvSpPr>
+          <p:cNvPr id="24" name="Text 22"/>
+          <p:cNvSpPr/>
+          <p:nvPr/>
+        </p:nvSpPr>
+        <p:spPr>
+          <a:xfrm>
+            <a:off x="4745736" y="1828800"/>
+            <a:ext cx="1773936" cy="566928"/>
+          </a:xfrm>
+          <a:prstGeom prst="rect">
+            <a:avLst/>
+          </a:prstGeom>
+          <a:noFill/>
+          <a:ln/>
+        </p:spPr>
+        <p:txBody>
+          <a:bodyPr wrap="square" lIns="0" tIns="0" rIns="0" bIns="0" rtlCol="0" anchor="ctr"/>
+          <a:lstStyle/>
+          <a:p>
+            <a:pPr indent="0" marL="0">
+              <a:buNone/>
+            </a:pPr>
+            <a:r>
+              <a:rPr lang="en-US" sz="850" dirty="0">
+                <a:solidFill>
+                  <a:srgbClr val="1E293B"/>
+                </a:solidFill>
+                <a:latin typeface="Arial" pitchFamily="34" charset="0"/>
+                <a:ea typeface="Arial" pitchFamily="34" charset="-122"/>
+                <a:cs typeface="Arial" pitchFamily="34" charset="-120"/>
+              </a:rPr>
+              <a:t>Platform-issued token; no credential in application custody — the platform attests the workload</a:t>
+            </a:r>
+            <a:endParaRPr lang="en-US" sz="850" dirty="0"/>
+          </a:p>
+        </p:txBody>
+      </p:sp>
+      <p:sp>
+        <p:nvSpPr>
+          <p:cNvPr id="25" name="Text 23"/>
+          <p:cNvSpPr/>
+          <p:nvPr/>
+        </p:nvSpPr>
+        <p:spPr>
+          <a:xfrm>
+            <a:off x="4745736" y="2414016"/>
+            <a:ext cx="1773936" cy="402336"/>
+          </a:xfrm>
+          <a:prstGeom prst="rect">
+            <a:avLst/>
+          </a:prstGeom>
+          <a:noFill/>
+          <a:ln/>
+        </p:spPr>
+        <p:txBody>
+          <a:bodyPr wrap="square" lIns="0" tIns="0" rIns="0" bIns="0" rtlCol="0" anchor="ctr"/>
+          <a:lstStyle/>
+          <a:p>
+            <a:pPr indent="0" marL="0">
+              <a:buNone/>
+            </a:pPr>
+            <a:r>
+              <a:rPr lang="en-US" sz="750" i="1" dirty="0">
+                <a:solidFill>
+                  <a:srgbClr val="1A9E8F"/>
+                </a:solidFill>
+                <a:latin typeface="Arial" pitchFamily="34" charset="0"/>
+                <a:ea typeface="Arial" pitchFamily="34" charset="-122"/>
+                <a:cs typeface="Arial" pitchFamily="34" charset="-120"/>
+              </a:rPr>
+              <a:t>Compromise requires compromising the workload itself — the irreducible case</a:t>
+            </a:r>
+            <a:endParaRPr lang="en-US" sz="750" dirty="0"/>
+          </a:p>
+        </p:txBody>
+      </p:sp>
+      <p:sp>
+        <p:nvSpPr>
+          <p:cNvPr id="26" name="Shape 24"/>
+          <p:cNvSpPr/>
+          <p:nvPr/>
+        </p:nvSpPr>
+        <p:spPr>
+          <a:xfrm>
+            <a:off x="6647688" y="2066544"/>
+            <a:ext cx="91440" cy="0"/>
+          </a:xfrm>
+          <a:prstGeom prst="line">
+            <a:avLst/>
+          </a:prstGeom>
+          <a:noFill/>
+          <a:ln w="25400">
+            <a:solidFill>
+              <a:srgbClr val="5B6B7C"/>
+            </a:solidFill>
+            <a:prstDash val="solid"/>
+            <a:tailEnd type="triangle"/>
+          </a:ln>
+        </p:spPr>
+      </p:sp>
+      <p:sp>
+        <p:nvSpPr>
+          <p:cNvPr id="27" name="Shape 25"/>
+          <p:cNvSpPr/>
+          <p:nvPr/>
+        </p:nvSpPr>
+        <p:spPr>
+          <a:xfrm>
+            <a:off x="6757416" y="1280160"/>
+            <a:ext cx="1993392" cy="1572768"/>
+          </a:xfrm>
+          <a:prstGeom prst="roundRect">
+            <a:avLst>
+              <a:gd name="adj" fmla="val 4070"/>
+            </a:avLst>
+          </a:prstGeom>
+          <a:solidFill>
+            <a:srgbClr val="FFFFFF"/>
+          </a:solidFill>
+          <a:ln w="9525">
+            <a:solidFill>
+              <a:srgbClr val="C9D4E0"/>
+            </a:solidFill>
+            <a:prstDash val="solid"/>
+          </a:ln>
+          <a:effectLst>
+            <a:outerShdw sx="100000" sy="100000" kx="0" ky="0" algn="bl" rotWithShape="0" blurRad="88900" dist="25400" dir="2700000">
+              <a:srgbClr val="000000">
+                <a:alpha val="14000"/>
+              </a:srgbClr>
+            </a:outerShdw>
+          </a:effectLst>
+        </p:spPr>
+      </p:sp>
+      <p:sp>
+        <p:nvSpPr>
+          <p:cNvPr id="28" name="Shape 26"/>
+          <p:cNvSpPr/>
+          <p:nvPr/>
+        </p:nvSpPr>
+        <p:spPr>
+          <a:xfrm>
+            <a:off x="6867144" y="1389888"/>
+            <a:ext cx="310896" cy="310896"/>
+          </a:xfrm>
+          <a:prstGeom prst="ellipse">
+            <a:avLst/>
+          </a:prstGeom>
+          <a:solidFill>
+            <a:srgbClr val="1F3A5F"/>
+          </a:solidFill>
+          <a:ln/>
+        </p:spPr>
+      </p:sp>
+      <p:sp>
+        <p:nvSpPr>
+          <p:cNvPr id="29" name="Text 27"/>
+          <p:cNvSpPr/>
+          <p:nvPr/>
+        </p:nvSpPr>
+        <p:spPr>
+          <a:xfrm>
+            <a:off x="6867144" y="1376172"/>
+            <a:ext cx="310896" cy="310896"/>
+          </a:xfrm>
+          <a:prstGeom prst="rect">
+            <a:avLst/>
+          </a:prstGeom>
+          <a:noFill/>
+          <a:ln/>
+        </p:spPr>
+        <p:txBody>
+          <a:bodyPr wrap="square" lIns="0" tIns="0" rIns="0" bIns="0" rtlCol="0" anchor="ctr"/>
+          <a:lstStyle/>
+          <a:p>
+            <a:pPr algn="ctr" indent="0" marL="0">
+              <a:buNone/>
+            </a:pPr>
+            <a:r>
+              <a:rPr lang="en-US" sz="1300" b="1" dirty="0">
+                <a:solidFill>
+                  <a:srgbClr val="FFFFFF"/>
+                </a:solidFill>
+                <a:latin typeface="Arial" pitchFamily="34" charset="0"/>
+                <a:ea typeface="Arial" pitchFamily="34" charset="-122"/>
+                <a:cs typeface="Arial" pitchFamily="34" charset="-120"/>
+              </a:rPr>
+              <a:t>4</a:t>
+            </a:r>
+            <a:endParaRPr lang="en-US" sz="1300" dirty="0"/>
+          </a:p>
+        </p:txBody>
+      </p:sp>
+      <p:sp>
+        <p:nvSpPr>
+          <p:cNvPr id="30" name="Text 28"/>
+          <p:cNvSpPr/>
+          <p:nvPr/>
+        </p:nvSpPr>
+        <p:spPr>
+          <a:xfrm>
+            <a:off x="7251192" y="1371600"/>
+            <a:ext cx="1426464" cy="384048"/>
+          </a:xfrm>
+          <a:prstGeom prst="rect">
+            <a:avLst/>
+          </a:prstGeom>
+          <a:noFill/>
+          <a:ln/>
+        </p:spPr>
+        <p:txBody>
+          <a:bodyPr wrap="square" lIns="0" tIns="0" rIns="0" bIns="0" rtlCol="0" anchor="ctr"/>
+          <a:lstStyle/>
+          <a:p>
+            <a:pPr indent="0" marL="0">
+              <a:buNone/>
+            </a:pPr>
+            <a:r>
+              <a:rPr lang="en-US" sz="1050" b="1" dirty="0">
+                <a:solidFill>
+                  <a:srgbClr val="1E293B"/>
+                </a:solidFill>
+                <a:latin typeface="Arial" pitchFamily="34" charset="0"/>
+                <a:ea typeface="Arial" pitchFamily="34" charset="-122"/>
+                <a:cs typeface="Arial" pitchFamily="34" charset="-120"/>
+              </a:rPr>
+              <a:t>Identity federation</a:t>
+            </a:r>
+            <a:endParaRPr lang="en-US" sz="1050" dirty="0"/>
+          </a:p>
+        </p:txBody>
+      </p:sp>
+      <p:sp>
+        <p:nvSpPr>
+          <p:cNvPr id="31" name="Text 29"/>
+          <p:cNvSpPr/>
+          <p:nvPr/>
+        </p:nvSpPr>
+        <p:spPr>
+          <a:xfrm>
+            <a:off x="6867144" y="1828800"/>
+            <a:ext cx="1773936" cy="566928"/>
+          </a:xfrm>
+          <a:prstGeom prst="rect">
+            <a:avLst/>
+          </a:prstGeom>
+          <a:noFill/>
+          <a:ln/>
+        </p:spPr>
+        <p:txBody>
+          <a:bodyPr wrap="square" lIns="0" tIns="0" rIns="0" bIns="0" rtlCol="0" anchor="ctr"/>
+          <a:lstStyle/>
+          <a:p>
+            <a:pPr indent="0" marL="0">
+              <a:buNone/>
+            </a:pPr>
+            <a:r>
+              <a:rPr lang="en-US" sz="850" dirty="0">
+                <a:solidFill>
+                  <a:srgbClr val="1E293B"/>
+                </a:solidFill>
+                <a:latin typeface="Arial" pitchFamily="34" charset="0"/>
+                <a:ea typeface="Arial" pitchFamily="34" charset="-122"/>
+                <a:cs typeface="Arial" pitchFamily="34" charset="-120"/>
+              </a:rPr>
+              <a:t>External workload exchanges its own platform's OIDC token; no secret crosses the boundary</a:t>
+            </a:r>
+            <a:endParaRPr lang="en-US" sz="850" dirty="0"/>
+          </a:p>
+        </p:txBody>
+      </p:sp>
+      <p:sp>
+        <p:nvSpPr>
+          <p:cNvPr id="32" name="Text 30"/>
+          <p:cNvSpPr/>
+          <p:nvPr/>
+        </p:nvSpPr>
+        <p:spPr>
+          <a:xfrm>
+            <a:off x="6867144" y="2414016"/>
+            <a:ext cx="1773936" cy="402336"/>
+          </a:xfrm>
+          <a:prstGeom prst="rect">
+            <a:avLst/>
+          </a:prstGeom>
+          <a:noFill/>
+          <a:ln/>
+        </p:spPr>
+        <p:txBody>
+          <a:bodyPr wrap="square" lIns="0" tIns="0" rIns="0" bIns="0" rtlCol="0" anchor="ctr"/>
+          <a:lstStyle/>
+          <a:p>
+            <a:pPr indent="0" marL="0">
+              <a:buNone/>
+            </a:pPr>
+            <a:r>
+              <a:rPr lang="en-US" sz="750" i="1" dirty="0">
+                <a:solidFill>
+                  <a:srgbClr val="1F3A5F"/>
+                </a:solidFill>
+                <a:latin typeface="Arial" pitchFamily="34" charset="0"/>
+                <a:ea typeface="Arial" pitchFamily="34" charset="-122"/>
+                <a:cs typeface="Arial" pitchFamily="34" charset="-120"/>
+              </a:rPr>
+              <a:t>Trust misconfiguration — governed as policy, not secret custody</a:t>
+            </a:r>
+            <a:endParaRPr lang="en-US" sz="750" dirty="0"/>
+          </a:p>
+        </p:txBody>
+      </p:sp>
+      <p:sp>
+        <p:nvSpPr>
+          <p:cNvPr id="33" name="Shape 31"/>
+          <p:cNvSpPr/>
+          <p:nvPr/>
+        </p:nvSpPr>
+        <p:spPr>
+          <a:xfrm>
+            <a:off x="548640" y="3063240"/>
+            <a:ext cx="8138160" cy="1051560"/>
+          </a:xfrm>
+          <a:prstGeom prst="roundRect">
+            <a:avLst>
+              <a:gd name="adj" fmla="val 6087"/>
+            </a:avLst>
+          </a:prstGeom>
+          <a:solidFill>
+            <a:srgbClr val="E6F5F2"/>
+          </a:solidFill>
+          <a:ln w="9525">
+            <a:solidFill>
+              <a:srgbClr val="C9D4E0"/>
+            </a:solidFill>
+            <a:prstDash val="solid"/>
+          </a:ln>
+        </p:spPr>
+      </p:sp>
+      <p:sp>
+        <p:nvSpPr>
+          <p:cNvPr id="34" name="Text 32"/>
+          <p:cNvSpPr/>
+          <p:nvPr/>
+        </p:nvSpPr>
+        <p:spPr>
+          <a:xfrm>
+            <a:off x="777240" y="3063240"/>
+            <a:ext cx="7726680" cy="1051560"/>
+          </a:xfrm>
+          <a:prstGeom prst="rect">
+            <a:avLst/>
+          </a:prstGeom>
+          <a:noFill/>
+          <a:ln/>
+        </p:spPr>
+        <p:txBody>
+          <a:bodyPr wrap="square" lIns="0" tIns="0" rIns="0" bIns="0" rtlCol="0" anchor="ctr"/>
+          <a:lstStyle/>
+          <a:p>
+            <a:pPr indent="0" marL="0">
+              <a:buNone/>
+            </a:pPr>
+            <a:r>
+              <a:rPr lang="en-US" sz="1050" dirty="0">
+                <a:solidFill>
+                  <a:srgbClr val="1E293B"/>
+                </a:solidFill>
+                <a:latin typeface="Arial" pitchFamily="34" charset="0"/>
+                <a:ea typeface="Arial" pitchFamily="34" charset="-122"/>
+                <a:cs typeface="Arial" pitchFamily="34" charset="-120"/>
+              </a:rPr>
+              <a:t>Secret everywhere → secret somewhere → secret nowhere → secret nowhere on either side. The SPIFFE model formalizes the same doctrine: short-lived, automatically issued, attested credentials bound to a workload's verified identity. There is no secret to leak because there is no secret.</a:t>
+            </a:r>
+            <a:endParaRPr lang="en-US" sz="1050" dirty="0"/>
+          </a:p>
+        </p:txBody>
+      </p:sp>
+      <p:sp>
+        <p:nvSpPr>
+          <p:cNvPr id="35" name="Text 33"/>
+          <p:cNvSpPr/>
+          <p:nvPr/>
+        </p:nvSpPr>
+        <p:spPr>
+          <a:xfrm>
+            <a:off x="548640" y="4297680"/>
+            <a:ext cx="8138160" cy="457200"/>
+          </a:xfrm>
+          <a:prstGeom prst="rect">
+            <a:avLst/>
+          </a:prstGeom>
+          <a:noFill/>
+          <a:ln/>
+        </p:spPr>
+        <p:txBody>
+          <a:bodyPr wrap="square" lIns="0" tIns="0" rIns="0" bIns="0" rtlCol="0" anchor="ctr"/>
+          <a:lstStyle/>
+          <a:p>
+            <a:pPr algn="ctr" indent="0" marL="0">
+              <a:buNone/>
+            </a:pPr>
+            <a:r>
+              <a:rPr lang="en-US" sz="1000" i="1" dirty="0">
+                <a:solidFill>
+                  <a:srgbClr val="5B6B7C"/>
+                </a:solidFill>
+                <a:latin typeface="Arial" pitchFamily="34" charset="0"/>
+                <a:ea typeface="Arial" pitchFamily="34" charset="-122"/>
+                <a:cs typeface="Arial" pitchFamily="34" charset="-120"/>
+              </a:rPr>
+              <a:t>Books 07–08 execute this progression end-to-end against the SQL Server estate — the first proof that session-bound authentication can be removed, not merely deprecated.</a:t>
+            </a:r>
+            <a:endParaRPr lang="en-US" sz="1000" dirty="0"/>
+          </a:p>
+        </p:txBody>
+      </p:sp>
+    </p:spTree>
+  </p:cSld>
+  <p:clrMapOvr>
+    <a:masterClrMapping/>
+  </p:clrMapOvr>
+</p:sld>
+</file>
+
+<file path=ppt/slides/slide23.xml><?xml version="1.0" encoding="utf-8"?>
+<p:sld xmlns:a="http://schemas.openxmlformats.org/drawingml/2006/main" xmlns:r="http://schemas.openxmlformats.org/officeDocument/2006/relationships" xmlns:p="http://schemas.openxmlformats.org/presentationml/2006/main">
+  <p:cSld name="Slide 23">
+    <p:bg>
+      <p:bgPr>
+        <a:solidFill>
+          <a:srgbClr val="FFFFFF"/>
+        </a:solidFill>
+      </p:bgPr>
+    </p:bg>
+    <p:spTree>
+      <p:nvGrpSpPr>
+        <p:cNvPr id="1" name=""/>
+        <p:cNvGrpSpPr/>
+        <p:nvPr/>
+      </p:nvGrpSpPr>
+      <p:grpSpPr>
+        <a:xfrm>
+          <a:off x="0" y="0"/>
+          <a:ext cx="0" cy="0"/>
+          <a:chOff x="0" y="0"/>
+          <a:chExt cx="0" cy="0"/>
+        </a:xfrm>
+      </p:grpSpPr>
+      <p:sp>
+        <p:nvSpPr>
+          <p:cNvPr id="2" name="Text 0"/>
+          <p:cNvSpPr/>
+          <p:nvPr/>
+        </p:nvSpPr>
+        <p:spPr>
+          <a:xfrm>
+            <a:off x="502920" y="256032"/>
+            <a:ext cx="8229600" cy="274320"/>
+          </a:xfrm>
+          <a:prstGeom prst="rect">
+            <a:avLst/>
+          </a:prstGeom>
+          <a:noFill/>
+          <a:ln/>
+        </p:spPr>
+        <p:txBody>
+          <a:bodyPr wrap="square" lIns="0" tIns="0" rIns="0" bIns="0" rtlCol="0" anchor="ctr"/>
+          <a:lstStyle/>
+          <a:p>
+            <a:pPr indent="0" marL="0">
+              <a:buNone/>
+            </a:pPr>
+            <a:r>
+              <a:rPr lang="en-US" sz="1100" b="1" spc="200" kern="0" dirty="0">
+                <a:solidFill>
+                  <a:srgbClr val="1A9E8F"/>
+                </a:solidFill>
+                <a:latin typeface="Arial" pitchFamily="34" charset="0"/>
+                <a:ea typeface="Arial" pitchFamily="34" charset="-122"/>
+                <a:cs typeface="Arial" pitchFamily="34" charset="-120"/>
+              </a:rPr>
+              <a:t>KEY CUSTODY</a:t>
+            </a:r>
+            <a:endParaRPr lang="en-US" sz="1100" dirty="0"/>
+          </a:p>
+        </p:txBody>
+      </p:sp>
+      <p:sp>
+        <p:nvSpPr>
+          <p:cNvPr id="3" name="Text 1"/>
+          <p:cNvSpPr/>
+          <p:nvPr/>
+        </p:nvSpPr>
+        <p:spPr>
+          <a:xfrm>
+            <a:off x="502920" y="512064"/>
+            <a:ext cx="8138160" cy="566928"/>
+          </a:xfrm>
+          <a:prstGeom prst="rect">
+            <a:avLst/>
+          </a:prstGeom>
+          <a:noFill/>
+          <a:ln/>
+        </p:spPr>
+        <p:txBody>
+          <a:bodyPr wrap="square" lIns="0" tIns="0" rIns="0" bIns="0" rtlCol="0" anchor="ctr"/>
+          <a:lstStyle/>
+          <a:p>
+            <a:pPr indent="0" marL="0">
+              <a:buNone/>
+            </a:pPr>
+            <a:r>
+              <a:rPr lang="en-US" sz="2600" b="1" dirty="0">
+                <a:solidFill>
+                  <a:srgbClr val="1F3A5F"/>
+                </a:solidFill>
+                <a:latin typeface="Arial" pitchFamily="34" charset="0"/>
+                <a:ea typeface="Arial" pitchFamily="34" charset="-122"/>
+                <a:cs typeface="Arial" pitchFamily="34" charset="-120"/>
+              </a:rPr>
+              <a:t>Where keys live: deeper in hardware as they live longer</a:t>
+            </a:r>
+            <a:endParaRPr lang="en-US" sz="2600" dirty="0"/>
+          </a:p>
+        </p:txBody>
+      </p:sp>
+      <p:sp>
+        <p:nvSpPr>
+          <p:cNvPr id="4" name="Text 2"/>
+          <p:cNvSpPr/>
+          <p:nvPr/>
+        </p:nvSpPr>
+        <p:spPr>
+          <a:xfrm>
+            <a:off x="502920" y="4864608"/>
+            <a:ext cx="7315200" cy="219456"/>
+          </a:xfrm>
+          <a:prstGeom prst="rect">
+            <a:avLst/>
+          </a:prstGeom>
+          <a:noFill/>
+          <a:ln/>
+        </p:spPr>
+        <p:txBody>
+          <a:bodyPr wrap="square" lIns="0" tIns="0" rIns="0" bIns="0" rtlCol="0" anchor="ctr"/>
+          <a:lstStyle/>
+          <a:p>
+            <a:pPr indent="0" marL="0">
+              <a:buNone/>
+            </a:pPr>
+            <a:r>
+              <a:rPr lang="en-US" sz="800" dirty="0">
+                <a:solidFill>
+                  <a:srgbClr val="5B6B7C"/>
+                </a:solidFill>
+                <a:latin typeface="Arial" pitchFamily="34" charset="0"/>
+                <a:ea typeface="Arial" pitchFamily="34" charset="-122"/>
+                <a:cs typeface="Arial" pitchFamily="34" charset="-120"/>
+              </a:rPr>
+              <a:t>Federal AAN — Book 03 Certificates &amp; Tokens · CSI Team Draft — Internal · FedRAMP Moderate · Date Code 2026-07-07 11:57 ET</a:t>
+            </a:r>
+            <a:endParaRPr lang="en-US" sz="800" dirty="0"/>
+          </a:p>
+        </p:txBody>
+      </p:sp>
+      <p:sp>
+        <p:nvSpPr>
+          <p:cNvPr id="5" name="Text 3"/>
+          <p:cNvSpPr/>
+          <p:nvPr/>
+        </p:nvSpPr>
+        <p:spPr>
+          <a:xfrm>
+            <a:off x="8412480" y="4864608"/>
+            <a:ext cx="320040" cy="219456"/>
+          </a:xfrm>
+          <a:prstGeom prst="rect">
+            <a:avLst/>
+          </a:prstGeom>
+          <a:noFill/>
+          <a:ln/>
+        </p:spPr>
+        <p:txBody>
+          <a:bodyPr wrap="square" lIns="0" tIns="0" rIns="0" bIns="0" rtlCol="0" anchor="ctr"/>
+          <a:lstStyle/>
+          <a:p>
+            <a:pPr algn="r" indent="0" marL="0">
+              <a:buNone/>
+            </a:pPr>
+            <a:r>
+              <a:rPr lang="en-US" sz="800" dirty="0">
+                <a:solidFill>
+                  <a:srgbClr val="5B6B7C"/>
+                </a:solidFill>
+                <a:latin typeface="Arial" pitchFamily="34" charset="0"/>
+                <a:ea typeface="Arial" pitchFamily="34" charset="-122"/>
+                <a:cs typeface="Arial" pitchFamily="34" charset="-120"/>
+              </a:rPr>
+              <a:t>23</a:t>
+            </a:r>
+            <a:endParaRPr lang="en-US" sz="800" dirty="0"/>
+          </a:p>
+        </p:txBody>
+      </p:sp>
       <p:graphicFrame>
         <p:nvGraphicFramePr>
-          <p:cNvPr id="23" name="Table 0"/>
+          <p:cNvPr id="24" name="Table 0"/>
           <p:cNvGraphicFramePr>
             <a:graphicFrameLocks noGrp="1"/>
           </p:cNvGraphicFramePr>
@@ -18170,1292 +19259,6 @@
 </p:sld>
 </file>
 
-<file path=ppt/slides/slide23.xml><?xml version="1.0" encoding="utf-8"?>
-<p:sld xmlns:a="http://schemas.openxmlformats.org/drawingml/2006/main" xmlns:r="http://schemas.openxmlformats.org/officeDocument/2006/relationships" xmlns:p="http://schemas.openxmlformats.org/presentationml/2006/main">
-  <p:cSld name="Slide 23">
-    <p:bg>
-      <p:bgPr>
-        <a:solidFill>
-          <a:srgbClr val="FFFFFF"/>
-        </a:solidFill>
-      </p:bgPr>
-    </p:bg>
-    <p:spTree>
-      <p:nvGrpSpPr>
-        <p:cNvPr id="1" name=""/>
-        <p:cNvGrpSpPr/>
-        <p:nvPr/>
-      </p:nvGrpSpPr>
-      <p:grpSpPr>
-        <a:xfrm>
-          <a:off x="0" y="0"/>
-          <a:ext cx="0" cy="0"/>
-          <a:chOff x="0" y="0"/>
-          <a:chExt cx="0" cy="0"/>
-        </a:xfrm>
-      </p:grpSpPr>
-      <p:sp>
-        <p:nvSpPr>
-          <p:cNvPr id="2" name="Text 0"/>
-          <p:cNvSpPr/>
-          <p:nvPr/>
-        </p:nvSpPr>
-        <p:spPr>
-          <a:xfrm>
-            <a:off x="502920" y="256032"/>
-            <a:ext cx="8229600" cy="274320"/>
-          </a:xfrm>
-          <a:prstGeom prst="rect">
-            <a:avLst/>
-          </a:prstGeom>
-          <a:noFill/>
-          <a:ln/>
-        </p:spPr>
-        <p:txBody>
-          <a:bodyPr wrap="square" lIns="0" tIns="0" rIns="0" bIns="0" rtlCol="0" anchor="ctr"/>
-          <a:lstStyle/>
-          <a:p>
-            <a:pPr indent="0" marL="0">
-              <a:buNone/>
-            </a:pPr>
-            <a:r>
-              <a:rPr lang="en-US" sz="1100" b="1" spc="200" kern="0" dirty="0">
-                <a:solidFill>
-                  <a:srgbClr val="1A9E8F"/>
-                </a:solidFill>
-                <a:latin typeface="Arial" pitchFamily="34" charset="0"/>
-                <a:ea typeface="Arial" pitchFamily="34" charset="-122"/>
-                <a:cs typeface="Arial" pitchFamily="34" charset="-120"/>
-              </a:rPr>
-              <a:t>PHASED IMPLEMENTATION — STEP 1 OF 2</a:t>
-            </a:r>
-            <a:endParaRPr lang="en-US" sz="1100" dirty="0"/>
-          </a:p>
-        </p:txBody>
-      </p:sp>
-      <p:sp>
-        <p:nvSpPr>
-          <p:cNvPr id="3" name="Text 1"/>
-          <p:cNvSpPr/>
-          <p:nvPr/>
-        </p:nvSpPr>
-        <p:spPr>
-          <a:xfrm>
-            <a:off x="502920" y="512064"/>
-            <a:ext cx="8138160" cy="566928"/>
-          </a:xfrm>
-          <a:prstGeom prst="rect">
-            <a:avLst/>
-          </a:prstGeom>
-          <a:noFill/>
-          <a:ln/>
-        </p:spPr>
-        <p:txBody>
-          <a:bodyPr wrap="square" lIns="0" tIns="0" rIns="0" bIns="0" rtlCol="0" anchor="ctr"/>
-          <a:lstStyle/>
-          <a:p>
-            <a:pPr indent="0" marL="0">
-              <a:buNone/>
-            </a:pPr>
-            <a:r>
-              <a:rPr lang="en-US" sz="2200" b="1" dirty="0">
-                <a:solidFill>
-                  <a:srgbClr val="1F3A5F"/>
-                </a:solidFill>
-                <a:latin typeface="Arial" pitchFamily="34" charset="0"/>
-                <a:ea typeface="Arial" pitchFamily="34" charset="-122"/>
-                <a:cs typeface="Arial" pitchFamily="34" charset="-120"/>
-              </a:rPr>
-              <a:t>Establish truth before demanding it: discovery, then automation</a:t>
-            </a:r>
-            <a:endParaRPr lang="en-US" sz="2200" dirty="0"/>
-          </a:p>
-        </p:txBody>
-      </p:sp>
-      <p:sp>
-        <p:nvSpPr>
-          <p:cNvPr id="4" name="Text 2"/>
-          <p:cNvSpPr/>
-          <p:nvPr/>
-        </p:nvSpPr>
-        <p:spPr>
-          <a:xfrm>
-            <a:off x="502920" y="4864608"/>
-            <a:ext cx="7315200" cy="219456"/>
-          </a:xfrm>
-          <a:prstGeom prst="rect">
-            <a:avLst/>
-          </a:prstGeom>
-          <a:noFill/>
-          <a:ln/>
-        </p:spPr>
-        <p:txBody>
-          <a:bodyPr wrap="square" lIns="0" tIns="0" rIns="0" bIns="0" rtlCol="0" anchor="ctr"/>
-          <a:lstStyle/>
-          <a:p>
-            <a:pPr indent="0" marL="0">
-              <a:buNone/>
-            </a:pPr>
-            <a:r>
-              <a:rPr lang="en-US" sz="800" dirty="0">
-                <a:solidFill>
-                  <a:srgbClr val="5B6B7C"/>
-                </a:solidFill>
-                <a:latin typeface="Arial" pitchFamily="34" charset="0"/>
-                <a:ea typeface="Arial" pitchFamily="34" charset="-122"/>
-                <a:cs typeface="Arial" pitchFamily="34" charset="-120"/>
-              </a:rPr>
-              <a:t>Federal AAN — Book 03 Certificates &amp; Tokens · CSI Team Draft — Internal · FedRAMP Moderate · Date Code 2026-07-07 10:32 ET</a:t>
-            </a:r>
-            <a:endParaRPr lang="en-US" sz="800" dirty="0"/>
-          </a:p>
-        </p:txBody>
-      </p:sp>
-      <p:sp>
-        <p:nvSpPr>
-          <p:cNvPr id="5" name="Text 3"/>
-          <p:cNvSpPr/>
-          <p:nvPr/>
-        </p:nvSpPr>
-        <p:spPr>
-          <a:xfrm>
-            <a:off x="8412480" y="4864608"/>
-            <a:ext cx="320040" cy="219456"/>
-          </a:xfrm>
-          <a:prstGeom prst="rect">
-            <a:avLst/>
-          </a:prstGeom>
-          <a:noFill/>
-          <a:ln/>
-        </p:spPr>
-        <p:txBody>
-          <a:bodyPr wrap="square" lIns="0" tIns="0" rIns="0" bIns="0" rtlCol="0" anchor="ctr"/>
-          <a:lstStyle/>
-          <a:p>
-            <a:pPr algn="r" indent="0" marL="0">
-              <a:buNone/>
-            </a:pPr>
-            <a:r>
-              <a:rPr lang="en-US" sz="800" dirty="0">
-                <a:solidFill>
-                  <a:srgbClr val="5B6B7C"/>
-                </a:solidFill>
-                <a:latin typeface="Arial" pitchFamily="34" charset="0"/>
-                <a:ea typeface="Arial" pitchFamily="34" charset="-122"/>
-                <a:cs typeface="Arial" pitchFamily="34" charset="-120"/>
-              </a:rPr>
-              <a:t>23</a:t>
-            </a:r>
-            <a:endParaRPr lang="en-US" sz="800" dirty="0"/>
-          </a:p>
-        </p:txBody>
-      </p:sp>
-      <p:sp>
-        <p:nvSpPr>
-          <p:cNvPr id="6" name="Shape 4"/>
-          <p:cNvSpPr/>
-          <p:nvPr/>
-        </p:nvSpPr>
-        <p:spPr>
-          <a:xfrm>
-            <a:off x="338328" y="1225296"/>
-            <a:ext cx="2103120" cy="1481328"/>
-          </a:xfrm>
-          <a:prstGeom prst="roundRect">
-            <a:avLst>
-              <a:gd name="adj" fmla="val 5556"/>
-            </a:avLst>
-          </a:prstGeom>
-          <a:solidFill>
-            <a:srgbClr val="FFFFFF"/>
-          </a:solidFill>
-          <a:ln w="31750">
-            <a:solidFill>
-              <a:srgbClr val="D4860B"/>
-            </a:solidFill>
-            <a:prstDash val="solid"/>
-          </a:ln>
-          <a:effectLst>
-            <a:outerShdw sx="100000" sy="100000" kx="0" ky="0" algn="bl" rotWithShape="0" blurRad="88900" dist="25400" dir="2700000">
-              <a:srgbClr val="000000">
-                <a:alpha val="14000"/>
-              </a:srgbClr>
-            </a:outerShdw>
-          </a:effectLst>
-        </p:spPr>
-      </p:sp>
-      <p:sp>
-        <p:nvSpPr>
-          <p:cNvPr id="7" name="Shape 5"/>
-          <p:cNvSpPr/>
-          <p:nvPr/>
-        </p:nvSpPr>
-        <p:spPr>
-          <a:xfrm>
-            <a:off x="393192" y="1280160"/>
-            <a:ext cx="1993392" cy="1371600"/>
-          </a:xfrm>
-          <a:prstGeom prst="roundRect">
-            <a:avLst>
-              <a:gd name="adj" fmla="val 4667"/>
-            </a:avLst>
-          </a:prstGeom>
-          <a:solidFill>
-            <a:srgbClr val="FFFFFF"/>
-          </a:solidFill>
-          <a:ln w="9525">
-            <a:solidFill>
-              <a:srgbClr val="C9D4E0"/>
-            </a:solidFill>
-            <a:prstDash val="solid"/>
-          </a:ln>
-          <a:effectLst>
-            <a:outerShdw sx="100000" sy="100000" kx="0" ky="0" algn="bl" rotWithShape="0" blurRad="88900" dist="25400" dir="2700000">
-              <a:srgbClr val="000000">
-                <a:alpha val="14000"/>
-              </a:srgbClr>
-            </a:outerShdw>
-          </a:effectLst>
-        </p:spPr>
-      </p:sp>
-      <p:sp>
-        <p:nvSpPr>
-          <p:cNvPr id="8" name="Shape 6"/>
-          <p:cNvSpPr/>
-          <p:nvPr/>
-        </p:nvSpPr>
-        <p:spPr>
-          <a:xfrm>
-            <a:off x="502920" y="1389888"/>
-            <a:ext cx="329184" cy="329184"/>
-          </a:xfrm>
-          <a:prstGeom prst="ellipse">
-            <a:avLst/>
-          </a:prstGeom>
-          <a:solidFill>
-            <a:srgbClr val="1F3A5F"/>
-          </a:solidFill>
-          <a:ln/>
-        </p:spPr>
-      </p:sp>
-      <p:sp>
-        <p:nvSpPr>
-          <p:cNvPr id="9" name="Text 7"/>
-          <p:cNvSpPr/>
-          <p:nvPr/>
-        </p:nvSpPr>
-        <p:spPr>
-          <a:xfrm>
-            <a:off x="502920" y="1376172"/>
-            <a:ext cx="329184" cy="329184"/>
-          </a:xfrm>
-          <a:prstGeom prst="rect">
-            <a:avLst/>
-          </a:prstGeom>
-          <a:noFill/>
-          <a:ln/>
-        </p:spPr>
-        <p:txBody>
-          <a:bodyPr wrap="square" lIns="0" tIns="0" rIns="0" bIns="0" rtlCol="0" anchor="ctr"/>
-          <a:lstStyle/>
-          <a:p>
-            <a:pPr algn="ctr" indent="0" marL="0">
-              <a:buNone/>
-            </a:pPr>
-            <a:r>
-              <a:rPr lang="en-US" sz="1300" b="1" dirty="0">
-                <a:solidFill>
-                  <a:srgbClr val="FFFFFF"/>
-                </a:solidFill>
-                <a:latin typeface="Arial" pitchFamily="34" charset="0"/>
-                <a:ea typeface="Arial" pitchFamily="34" charset="-122"/>
-                <a:cs typeface="Arial" pitchFamily="34" charset="-120"/>
-              </a:rPr>
-              <a:t>1</a:t>
-            </a:r>
-            <a:endParaRPr lang="en-US" sz="1300" dirty="0"/>
-          </a:p>
-        </p:txBody>
-      </p:sp>
-      <p:sp>
-        <p:nvSpPr>
-          <p:cNvPr id="10" name="Text 8"/>
-          <p:cNvSpPr/>
-          <p:nvPr/>
-        </p:nvSpPr>
-        <p:spPr>
-          <a:xfrm>
-            <a:off x="905256" y="1353312"/>
-            <a:ext cx="1399032" cy="402336"/>
-          </a:xfrm>
-          <a:prstGeom prst="rect">
-            <a:avLst/>
-          </a:prstGeom>
-          <a:noFill/>
-          <a:ln/>
-        </p:spPr>
-        <p:txBody>
-          <a:bodyPr wrap="square" lIns="0" tIns="0" rIns="0" bIns="0" rtlCol="0" anchor="ctr"/>
-          <a:lstStyle/>
-          <a:p>
-            <a:pPr indent="0" marL="0">
-              <a:buNone/>
-            </a:pPr>
-            <a:r>
-              <a:rPr lang="en-US" sz="950" b="1" dirty="0">
-                <a:solidFill>
-                  <a:srgbClr val="1E293B"/>
-                </a:solidFill>
-                <a:latin typeface="Arial" pitchFamily="34" charset="0"/>
-                <a:ea typeface="Arial" pitchFamily="34" charset="-122"/>
-                <a:cs typeface="Arial" pitchFamily="34" charset="-120"/>
-              </a:rPr>
-              <a:t>Estate discovery</a:t>
-            </a:r>
-            <a:endParaRPr lang="en-US" sz="950" dirty="0"/>
-          </a:p>
-        </p:txBody>
-      </p:sp>
-      <p:sp>
-        <p:nvSpPr>
-          <p:cNvPr id="11" name="Text 9"/>
-          <p:cNvSpPr/>
-          <p:nvPr/>
-        </p:nvSpPr>
-        <p:spPr>
-          <a:xfrm>
-            <a:off x="905256" y="1755648"/>
-            <a:ext cx="1399032" cy="182880"/>
-          </a:xfrm>
-          <a:prstGeom prst="rect">
-            <a:avLst/>
-          </a:prstGeom>
-          <a:noFill/>
-          <a:ln/>
-        </p:spPr>
-        <p:txBody>
-          <a:bodyPr wrap="square" lIns="0" tIns="0" rIns="0" bIns="0" rtlCol="0" anchor="ctr"/>
-          <a:lstStyle/>
-          <a:p>
-            <a:pPr indent="0" marL="0">
-              <a:buNone/>
-            </a:pPr>
-            <a:r>
-              <a:rPr lang="en-US" sz="850" b="1" dirty="0">
-                <a:solidFill>
-                  <a:srgbClr val="1F3A5F"/>
-                </a:solidFill>
-                <a:latin typeface="Arial" pitchFamily="34" charset="0"/>
-                <a:ea typeface="Arial" pitchFamily="34" charset="-122"/>
-                <a:cs typeface="Arial" pitchFamily="34" charset="-120"/>
-              </a:rPr>
-              <a:t>Weeks 1–4</a:t>
-            </a:r>
-            <a:endParaRPr lang="en-US" sz="850" dirty="0"/>
-          </a:p>
-        </p:txBody>
-      </p:sp>
-      <p:sp>
-        <p:nvSpPr>
-          <p:cNvPr id="12" name="Text 10"/>
-          <p:cNvSpPr/>
-          <p:nvPr/>
-        </p:nvSpPr>
-        <p:spPr>
-          <a:xfrm>
-            <a:off x="502920" y="1975104"/>
-            <a:ext cx="1773936" cy="585216"/>
-          </a:xfrm>
-          <a:prstGeom prst="rect">
-            <a:avLst/>
-          </a:prstGeom>
-          <a:noFill/>
-          <a:ln/>
-        </p:spPr>
-        <p:txBody>
-          <a:bodyPr wrap="square" lIns="0" tIns="0" rIns="0" bIns="0" rtlCol="0" anchor="ctr"/>
-          <a:lstStyle/>
-          <a:p>
-            <a:pPr indent="0" marL="0">
-              <a:buNone/>
-            </a:pPr>
-            <a:r>
-              <a:rPr lang="en-US" sz="750" dirty="0">
-                <a:solidFill>
-                  <a:srgbClr val="5B6B7C"/>
-                </a:solidFill>
-                <a:latin typeface="Arial" pitchFamily="34" charset="0"/>
-                <a:ea typeface="Arial" pitchFamily="34" charset="-122"/>
-                <a:cs typeface="Arial" pitchFamily="34" charset="-120"/>
-              </a:rPr>
-              <a:t>Gate: Every production cert has an owner, an issuer, and an IPAM binding — or an investigation ticket</a:t>
-            </a:r>
-            <a:endParaRPr lang="en-US" sz="750" dirty="0"/>
-          </a:p>
-        </p:txBody>
-      </p:sp>
-      <p:sp>
-        <p:nvSpPr>
-          <p:cNvPr id="13" name="Shape 11"/>
-          <p:cNvSpPr/>
-          <p:nvPr/>
-        </p:nvSpPr>
-        <p:spPr>
-          <a:xfrm>
-            <a:off x="2404872" y="1965960"/>
-            <a:ext cx="91440" cy="0"/>
-          </a:xfrm>
-          <a:prstGeom prst="line">
-            <a:avLst/>
-          </a:prstGeom>
-          <a:noFill/>
-          <a:ln w="25400">
-            <a:solidFill>
-              <a:srgbClr val="C9D4E0"/>
-            </a:solidFill>
-            <a:prstDash val="solid"/>
-            <a:tailEnd type="triangle"/>
-          </a:ln>
-        </p:spPr>
-      </p:sp>
-      <p:sp>
-        <p:nvSpPr>
-          <p:cNvPr id="14" name="Shape 12"/>
-          <p:cNvSpPr/>
-          <p:nvPr/>
-        </p:nvSpPr>
-        <p:spPr>
-          <a:xfrm>
-            <a:off x="2514600" y="1280160"/>
-            <a:ext cx="1993392" cy="1371600"/>
-          </a:xfrm>
-          <a:prstGeom prst="roundRect">
-            <a:avLst>
-              <a:gd name="adj" fmla="val 4667"/>
-            </a:avLst>
-          </a:prstGeom>
-          <a:solidFill>
-            <a:srgbClr val="FFFFFF"/>
-          </a:solidFill>
-          <a:ln w="9525">
-            <a:solidFill>
-              <a:srgbClr val="C9D4E0"/>
-            </a:solidFill>
-            <a:prstDash val="solid"/>
-          </a:ln>
-          <a:effectLst>
-            <a:outerShdw sx="100000" sy="100000" kx="0" ky="0" algn="bl" rotWithShape="0" blurRad="88900" dist="25400" dir="2700000">
-              <a:srgbClr val="000000">
-                <a:alpha val="14000"/>
-              </a:srgbClr>
-            </a:outerShdw>
-          </a:effectLst>
-        </p:spPr>
-      </p:sp>
-      <p:sp>
-        <p:nvSpPr>
-          <p:cNvPr id="15" name="Shape 13"/>
-          <p:cNvSpPr/>
-          <p:nvPr/>
-        </p:nvSpPr>
-        <p:spPr>
-          <a:xfrm>
-            <a:off x="2624328" y="1389888"/>
-            <a:ext cx="329184" cy="329184"/>
-          </a:xfrm>
-          <a:prstGeom prst="ellipse">
-            <a:avLst/>
-          </a:prstGeom>
-          <a:solidFill>
-            <a:srgbClr val="1A9E8F"/>
-          </a:solidFill>
-          <a:ln/>
-        </p:spPr>
-      </p:sp>
-      <p:sp>
-        <p:nvSpPr>
-          <p:cNvPr id="16" name="Text 14"/>
-          <p:cNvSpPr/>
-          <p:nvPr/>
-        </p:nvSpPr>
-        <p:spPr>
-          <a:xfrm>
-            <a:off x="2624328" y="1376172"/>
-            <a:ext cx="329184" cy="329184"/>
-          </a:xfrm>
-          <a:prstGeom prst="rect">
-            <a:avLst/>
-          </a:prstGeom>
-          <a:noFill/>
-          <a:ln/>
-        </p:spPr>
-        <p:txBody>
-          <a:bodyPr wrap="square" lIns="0" tIns="0" rIns="0" bIns="0" rtlCol="0" anchor="ctr"/>
-          <a:lstStyle/>
-          <a:p>
-            <a:pPr algn="ctr" indent="0" marL="0">
-              <a:buNone/>
-            </a:pPr>
-            <a:r>
-              <a:rPr lang="en-US" sz="1300" b="1" dirty="0">
-                <a:solidFill>
-                  <a:srgbClr val="FFFFFF"/>
-                </a:solidFill>
-                <a:latin typeface="Arial" pitchFamily="34" charset="0"/>
-                <a:ea typeface="Arial" pitchFamily="34" charset="-122"/>
-                <a:cs typeface="Arial" pitchFamily="34" charset="-120"/>
-              </a:rPr>
-              <a:t>2</a:t>
-            </a:r>
-            <a:endParaRPr lang="en-US" sz="1300" dirty="0"/>
-          </a:p>
-        </p:txBody>
-      </p:sp>
-      <p:sp>
-        <p:nvSpPr>
-          <p:cNvPr id="17" name="Text 15"/>
-          <p:cNvSpPr/>
-          <p:nvPr/>
-        </p:nvSpPr>
-        <p:spPr>
-          <a:xfrm>
-            <a:off x="3026664" y="1353312"/>
-            <a:ext cx="1399032" cy="402336"/>
-          </a:xfrm>
-          <a:prstGeom prst="rect">
-            <a:avLst/>
-          </a:prstGeom>
-          <a:noFill/>
-          <a:ln/>
-        </p:spPr>
-        <p:txBody>
-          <a:bodyPr wrap="square" lIns="0" tIns="0" rIns="0" bIns="0" rtlCol="0" anchor="ctr"/>
-          <a:lstStyle/>
-          <a:p>
-            <a:pPr indent="0" marL="0">
-              <a:buNone/>
-            </a:pPr>
-            <a:r>
-              <a:rPr lang="en-US" sz="950" b="1" dirty="0">
-                <a:solidFill>
-                  <a:srgbClr val="1E293B"/>
-                </a:solidFill>
-                <a:latin typeface="Arial" pitchFamily="34" charset="0"/>
-                <a:ea typeface="Arial" pitchFamily="34" charset="-122"/>
-                <a:cs typeface="Arial" pitchFamily="34" charset="-120"/>
-              </a:rPr>
-              <a:t>Issuance automation</a:t>
-            </a:r>
-            <a:endParaRPr lang="en-US" sz="950" dirty="0"/>
-          </a:p>
-        </p:txBody>
-      </p:sp>
-      <p:sp>
-        <p:nvSpPr>
-          <p:cNvPr id="18" name="Text 16"/>
-          <p:cNvSpPr/>
-          <p:nvPr/>
-        </p:nvSpPr>
-        <p:spPr>
-          <a:xfrm>
-            <a:off x="3026664" y="1755648"/>
-            <a:ext cx="1399032" cy="182880"/>
-          </a:xfrm>
-          <a:prstGeom prst="rect">
-            <a:avLst/>
-          </a:prstGeom>
-          <a:noFill/>
-          <a:ln/>
-        </p:spPr>
-        <p:txBody>
-          <a:bodyPr wrap="square" lIns="0" tIns="0" rIns="0" bIns="0" rtlCol="0" anchor="ctr"/>
-          <a:lstStyle/>
-          <a:p>
-            <a:pPr indent="0" marL="0">
-              <a:buNone/>
-            </a:pPr>
-            <a:r>
-              <a:rPr lang="en-US" sz="850" b="1" dirty="0">
-                <a:solidFill>
-                  <a:srgbClr val="1A9E8F"/>
-                </a:solidFill>
-                <a:latin typeface="Arial" pitchFamily="34" charset="0"/>
-                <a:ea typeface="Arial" pitchFamily="34" charset="-122"/>
-                <a:cs typeface="Arial" pitchFamily="34" charset="-120"/>
-              </a:rPr>
-              <a:t>Weeks 5–12</a:t>
-            </a:r>
-            <a:endParaRPr lang="en-US" sz="850" dirty="0"/>
-          </a:p>
-        </p:txBody>
-      </p:sp>
-      <p:sp>
-        <p:nvSpPr>
-          <p:cNvPr id="19" name="Text 17"/>
-          <p:cNvSpPr/>
-          <p:nvPr/>
-        </p:nvSpPr>
-        <p:spPr>
-          <a:xfrm>
-            <a:off x="2624328" y="1975104"/>
-            <a:ext cx="1773936" cy="585216"/>
-          </a:xfrm>
-          <a:prstGeom prst="rect">
-            <a:avLst/>
-          </a:prstGeom>
-          <a:noFill/>
-          <a:ln/>
-        </p:spPr>
-        <p:txBody>
-          <a:bodyPr wrap="square" lIns="0" tIns="0" rIns="0" bIns="0" rtlCol="0" anchor="ctr"/>
-          <a:lstStyle/>
-          <a:p>
-            <a:pPr indent="0" marL="0">
-              <a:buNone/>
-            </a:pPr>
-            <a:r>
-              <a:rPr lang="en-US" sz="750" dirty="0">
-                <a:solidFill>
-                  <a:srgbClr val="5B6B7C"/>
-                </a:solidFill>
-                <a:latin typeface="Arial" pitchFamily="34" charset="0"/>
-                <a:ea typeface="Arial" pitchFamily="34" charset="-122"/>
-                <a:cs typeface="Arial" pitchFamily="34" charset="-120"/>
-              </a:rPr>
-              <a:t>Gate: Zero manual issuance requests for covered classes in a 30-day window; renewal automation through one full cycle</a:t>
-            </a:r>
-            <a:endParaRPr lang="en-US" sz="750" dirty="0"/>
-          </a:p>
-        </p:txBody>
-      </p:sp>
-      <p:sp>
-        <p:nvSpPr>
-          <p:cNvPr id="20" name="Shape 18"/>
-          <p:cNvSpPr/>
-          <p:nvPr/>
-        </p:nvSpPr>
-        <p:spPr>
-          <a:xfrm>
-            <a:off x="4526280" y="1965960"/>
-            <a:ext cx="91440" cy="0"/>
-          </a:xfrm>
-          <a:prstGeom prst="line">
-            <a:avLst/>
-          </a:prstGeom>
-          <a:noFill/>
-          <a:ln w="25400">
-            <a:solidFill>
-              <a:srgbClr val="C9D4E0"/>
-            </a:solidFill>
-            <a:prstDash val="solid"/>
-            <a:tailEnd type="triangle"/>
-          </a:ln>
-        </p:spPr>
-      </p:sp>
-      <p:sp>
-        <p:nvSpPr>
-          <p:cNvPr id="21" name="Shape 19"/>
-          <p:cNvSpPr/>
-          <p:nvPr/>
-        </p:nvSpPr>
-        <p:spPr>
-          <a:xfrm>
-            <a:off x="4636008" y="1280160"/>
-            <a:ext cx="1993392" cy="1371600"/>
-          </a:xfrm>
-          <a:prstGeom prst="roundRect">
-            <a:avLst>
-              <a:gd name="adj" fmla="val 4667"/>
-            </a:avLst>
-          </a:prstGeom>
-          <a:solidFill>
-            <a:srgbClr val="F3F5F8"/>
-          </a:solidFill>
-          <a:ln w="9525">
-            <a:solidFill>
-              <a:srgbClr val="C9D4E0"/>
-            </a:solidFill>
-            <a:prstDash val="solid"/>
-          </a:ln>
-        </p:spPr>
-      </p:sp>
-      <p:sp>
-        <p:nvSpPr>
-          <p:cNvPr id="22" name="Shape 20"/>
-          <p:cNvSpPr/>
-          <p:nvPr/>
-        </p:nvSpPr>
-        <p:spPr>
-          <a:xfrm>
-            <a:off x="4745736" y="1389888"/>
-            <a:ext cx="329184" cy="329184"/>
-          </a:xfrm>
-          <a:prstGeom prst="ellipse">
-            <a:avLst/>
-          </a:prstGeom>
-          <a:solidFill>
-            <a:srgbClr val="C9D4E0"/>
-          </a:solidFill>
-          <a:ln/>
-        </p:spPr>
-      </p:sp>
-      <p:sp>
-        <p:nvSpPr>
-          <p:cNvPr id="23" name="Text 21"/>
-          <p:cNvSpPr/>
-          <p:nvPr/>
-        </p:nvSpPr>
-        <p:spPr>
-          <a:xfrm>
-            <a:off x="4745736" y="1376172"/>
-            <a:ext cx="329184" cy="329184"/>
-          </a:xfrm>
-          <a:prstGeom prst="rect">
-            <a:avLst/>
-          </a:prstGeom>
-          <a:noFill/>
-          <a:ln/>
-        </p:spPr>
-        <p:txBody>
-          <a:bodyPr wrap="square" lIns="0" tIns="0" rIns="0" bIns="0" rtlCol="0" anchor="ctr"/>
-          <a:lstStyle/>
-          <a:p>
-            <a:pPr algn="ctr" indent="0" marL="0">
-              <a:buNone/>
-            </a:pPr>
-            <a:r>
-              <a:rPr lang="en-US" sz="1300" b="1" dirty="0">
-                <a:solidFill>
-                  <a:srgbClr val="5B6B7C"/>
-                </a:solidFill>
-                <a:latin typeface="Arial" pitchFamily="34" charset="0"/>
-                <a:ea typeface="Arial" pitchFamily="34" charset="-122"/>
-                <a:cs typeface="Arial" pitchFamily="34" charset="-120"/>
-              </a:rPr>
-              <a:t>3</a:t>
-            </a:r>
-            <a:endParaRPr lang="en-US" sz="1300" dirty="0"/>
-          </a:p>
-        </p:txBody>
-      </p:sp>
-      <p:sp>
-        <p:nvSpPr>
-          <p:cNvPr id="24" name="Text 22"/>
-          <p:cNvSpPr/>
-          <p:nvPr/>
-        </p:nvSpPr>
-        <p:spPr>
-          <a:xfrm>
-            <a:off x="5148072" y="1353312"/>
-            <a:ext cx="1399032" cy="402336"/>
-          </a:xfrm>
-          <a:prstGeom prst="rect">
-            <a:avLst/>
-          </a:prstGeom>
-          <a:noFill/>
-          <a:ln/>
-        </p:spPr>
-        <p:txBody>
-          <a:bodyPr wrap="square" lIns="0" tIns="0" rIns="0" bIns="0" rtlCol="0" anchor="ctr"/>
-          <a:lstStyle/>
-          <a:p>
-            <a:pPr indent="0" marL="0">
-              <a:buNone/>
-            </a:pPr>
-            <a:r>
-              <a:rPr lang="en-US" sz="950" b="1" dirty="0">
-                <a:solidFill>
-                  <a:srgbClr val="5B6B7C"/>
-                </a:solidFill>
-                <a:latin typeface="Arial" pitchFamily="34" charset="0"/>
-                <a:ea typeface="Arial" pitchFamily="34" charset="-122"/>
-                <a:cs typeface="Arial" pitchFamily="34" charset="-120"/>
-              </a:rPr>
-              <a:t>Token migration + phishing-resistant MFA</a:t>
-            </a:r>
-            <a:endParaRPr lang="en-US" sz="950" dirty="0"/>
-          </a:p>
-        </p:txBody>
-      </p:sp>
-      <p:sp>
-        <p:nvSpPr>
-          <p:cNvPr id="25" name="Text 23"/>
-          <p:cNvSpPr/>
-          <p:nvPr/>
-        </p:nvSpPr>
-        <p:spPr>
-          <a:xfrm>
-            <a:off x="5148072" y="1755648"/>
-            <a:ext cx="1399032" cy="182880"/>
-          </a:xfrm>
-          <a:prstGeom prst="rect">
-            <a:avLst/>
-          </a:prstGeom>
-          <a:noFill/>
-          <a:ln/>
-        </p:spPr>
-        <p:txBody>
-          <a:bodyPr wrap="square" lIns="0" tIns="0" rIns="0" bIns="0" rtlCol="0" anchor="ctr"/>
-          <a:lstStyle/>
-          <a:p>
-            <a:pPr indent="0" marL="0">
-              <a:buNone/>
-            </a:pPr>
-            <a:r>
-              <a:rPr lang="en-US" sz="850" b="1" dirty="0">
-                <a:solidFill>
-                  <a:srgbClr val="5B6B7C"/>
-                </a:solidFill>
-                <a:latin typeface="Arial" pitchFamily="34" charset="0"/>
-                <a:ea typeface="Arial" pitchFamily="34" charset="-122"/>
-                <a:cs typeface="Arial" pitchFamily="34" charset="-120"/>
-              </a:rPr>
-              <a:t>Weeks 13–24</a:t>
-            </a:r>
-            <a:endParaRPr lang="en-US" sz="850" dirty="0"/>
-          </a:p>
-        </p:txBody>
-      </p:sp>
-      <p:sp>
-        <p:nvSpPr>
-          <p:cNvPr id="26" name="Text 24"/>
-          <p:cNvSpPr/>
-          <p:nvPr/>
-        </p:nvSpPr>
-        <p:spPr>
-          <a:xfrm>
-            <a:off x="4745736" y="1975104"/>
-            <a:ext cx="1773936" cy="585216"/>
-          </a:xfrm>
-          <a:prstGeom prst="rect">
-            <a:avLst/>
-          </a:prstGeom>
-          <a:noFill/>
-          <a:ln/>
-        </p:spPr>
-        <p:txBody>
-          <a:bodyPr wrap="square" lIns="0" tIns="0" rIns="0" bIns="0" rtlCol="0" anchor="ctr"/>
-          <a:lstStyle/>
-          <a:p>
-            <a:pPr indent="0" marL="0">
-              <a:buNone/>
-            </a:pPr>
-            <a:r>
-              <a:rPr lang="en-US" sz="750" dirty="0">
-                <a:solidFill>
-                  <a:srgbClr val="5B6B7C"/>
-                </a:solidFill>
-                <a:latin typeface="Arial" pitchFamily="34" charset="0"/>
-                <a:ea typeface="Arial" pitchFamily="34" charset="-122"/>
-                <a:cs typeface="Arial" pitchFamily="34" charset="-120"/>
-              </a:rPr>
-              <a:t>…</a:t>
-            </a:r>
-            <a:endParaRPr lang="en-US" sz="750" dirty="0"/>
-          </a:p>
-        </p:txBody>
-      </p:sp>
-      <p:sp>
-        <p:nvSpPr>
-          <p:cNvPr id="27" name="Shape 25"/>
-          <p:cNvSpPr/>
-          <p:nvPr/>
-        </p:nvSpPr>
-        <p:spPr>
-          <a:xfrm>
-            <a:off x="6647688" y="1965960"/>
-            <a:ext cx="91440" cy="0"/>
-          </a:xfrm>
-          <a:prstGeom prst="line">
-            <a:avLst/>
-          </a:prstGeom>
-          <a:noFill/>
-          <a:ln w="25400">
-            <a:solidFill>
-              <a:srgbClr val="C9D4E0"/>
-            </a:solidFill>
-            <a:prstDash val="solid"/>
-            <a:tailEnd type="triangle"/>
-          </a:ln>
-        </p:spPr>
-      </p:sp>
-      <p:sp>
-        <p:nvSpPr>
-          <p:cNvPr id="28" name="Shape 26"/>
-          <p:cNvSpPr/>
-          <p:nvPr/>
-        </p:nvSpPr>
-        <p:spPr>
-          <a:xfrm>
-            <a:off x="6757416" y="1280160"/>
-            <a:ext cx="1993392" cy="1371600"/>
-          </a:xfrm>
-          <a:prstGeom prst="roundRect">
-            <a:avLst>
-              <a:gd name="adj" fmla="val 4667"/>
-            </a:avLst>
-          </a:prstGeom>
-          <a:solidFill>
-            <a:srgbClr val="F3F5F8"/>
-          </a:solidFill>
-          <a:ln w="9525">
-            <a:solidFill>
-              <a:srgbClr val="C9D4E0"/>
-            </a:solidFill>
-            <a:prstDash val="solid"/>
-          </a:ln>
-        </p:spPr>
-      </p:sp>
-      <p:sp>
-        <p:nvSpPr>
-          <p:cNvPr id="29" name="Shape 27"/>
-          <p:cNvSpPr/>
-          <p:nvPr/>
-        </p:nvSpPr>
-        <p:spPr>
-          <a:xfrm>
-            <a:off x="6867144" y="1389888"/>
-            <a:ext cx="329184" cy="329184"/>
-          </a:xfrm>
-          <a:prstGeom prst="ellipse">
-            <a:avLst/>
-          </a:prstGeom>
-          <a:solidFill>
-            <a:srgbClr val="C9D4E0"/>
-          </a:solidFill>
-          <a:ln/>
-        </p:spPr>
-      </p:sp>
-      <p:sp>
-        <p:nvSpPr>
-          <p:cNvPr id="30" name="Text 28"/>
-          <p:cNvSpPr/>
-          <p:nvPr/>
-        </p:nvSpPr>
-        <p:spPr>
-          <a:xfrm>
-            <a:off x="6867144" y="1376172"/>
-            <a:ext cx="329184" cy="329184"/>
-          </a:xfrm>
-          <a:prstGeom prst="rect">
-            <a:avLst/>
-          </a:prstGeom>
-          <a:noFill/>
-          <a:ln/>
-        </p:spPr>
-        <p:txBody>
-          <a:bodyPr wrap="square" lIns="0" tIns="0" rIns="0" bIns="0" rtlCol="0" anchor="ctr"/>
-          <a:lstStyle/>
-          <a:p>
-            <a:pPr algn="ctr" indent="0" marL="0">
-              <a:buNone/>
-            </a:pPr>
-            <a:r>
-              <a:rPr lang="en-US" sz="1300" b="1" dirty="0">
-                <a:solidFill>
-                  <a:srgbClr val="5B6B7C"/>
-                </a:solidFill>
-                <a:latin typeface="Arial" pitchFamily="34" charset="0"/>
-                <a:ea typeface="Arial" pitchFamily="34" charset="-122"/>
-                <a:cs typeface="Arial" pitchFamily="34" charset="-120"/>
-              </a:rPr>
-              <a:t>4</a:t>
-            </a:r>
-            <a:endParaRPr lang="en-US" sz="1300" dirty="0"/>
-          </a:p>
-        </p:txBody>
-      </p:sp>
-      <p:sp>
-        <p:nvSpPr>
-          <p:cNvPr id="31" name="Text 29"/>
-          <p:cNvSpPr/>
-          <p:nvPr/>
-        </p:nvSpPr>
-        <p:spPr>
-          <a:xfrm>
-            <a:off x="7269480" y="1353312"/>
-            <a:ext cx="1399032" cy="402336"/>
-          </a:xfrm>
-          <a:prstGeom prst="rect">
-            <a:avLst/>
-          </a:prstGeom>
-          <a:noFill/>
-          <a:ln/>
-        </p:spPr>
-        <p:txBody>
-          <a:bodyPr wrap="square" lIns="0" tIns="0" rIns="0" bIns="0" rtlCol="0" anchor="ctr"/>
-          <a:lstStyle/>
-          <a:p>
-            <a:pPr indent="0" marL="0">
-              <a:buNone/>
-            </a:pPr>
-            <a:r>
-              <a:rPr lang="en-US" sz="950" b="1" dirty="0">
-                <a:solidFill>
-                  <a:srgbClr val="5B6B7C"/>
-                </a:solidFill>
-                <a:latin typeface="Arial" pitchFamily="34" charset="0"/>
-                <a:ea typeface="Arial" pitchFamily="34" charset="-122"/>
-                <a:cs typeface="Arial" pitchFamily="34" charset="-120"/>
-              </a:rPr>
-              <a:t>Workload identity conversion</a:t>
-            </a:r>
-            <a:endParaRPr lang="en-US" sz="950" dirty="0"/>
-          </a:p>
-        </p:txBody>
-      </p:sp>
-      <p:sp>
-        <p:nvSpPr>
-          <p:cNvPr id="32" name="Text 30"/>
-          <p:cNvSpPr/>
-          <p:nvPr/>
-        </p:nvSpPr>
-        <p:spPr>
-          <a:xfrm>
-            <a:off x="7269480" y="1755648"/>
-            <a:ext cx="1399032" cy="182880"/>
-          </a:xfrm>
-          <a:prstGeom prst="rect">
-            <a:avLst/>
-          </a:prstGeom>
-          <a:noFill/>
-          <a:ln/>
-        </p:spPr>
-        <p:txBody>
-          <a:bodyPr wrap="square" lIns="0" tIns="0" rIns="0" bIns="0" rtlCol="0" anchor="ctr"/>
-          <a:lstStyle/>
-          <a:p>
-            <a:pPr indent="0" marL="0">
-              <a:buNone/>
-            </a:pPr>
-            <a:r>
-              <a:rPr lang="en-US" sz="850" b="1" dirty="0">
-                <a:solidFill>
-                  <a:srgbClr val="5B6B7C"/>
-                </a:solidFill>
-                <a:latin typeface="Arial" pitchFamily="34" charset="0"/>
-                <a:ea typeface="Arial" pitchFamily="34" charset="-122"/>
-                <a:cs typeface="Arial" pitchFamily="34" charset="-120"/>
-              </a:rPr>
-              <a:t>Weeks 25–40</a:t>
-            </a:r>
-            <a:endParaRPr lang="en-US" sz="850" dirty="0"/>
-          </a:p>
-        </p:txBody>
-      </p:sp>
-      <p:sp>
-        <p:nvSpPr>
-          <p:cNvPr id="33" name="Text 31"/>
-          <p:cNvSpPr/>
-          <p:nvPr/>
-        </p:nvSpPr>
-        <p:spPr>
-          <a:xfrm>
-            <a:off x="6867144" y="1975104"/>
-            <a:ext cx="1773936" cy="585216"/>
-          </a:xfrm>
-          <a:prstGeom prst="rect">
-            <a:avLst/>
-          </a:prstGeom>
-          <a:noFill/>
-          <a:ln/>
-        </p:spPr>
-        <p:txBody>
-          <a:bodyPr wrap="square" lIns="0" tIns="0" rIns="0" bIns="0" rtlCol="0" anchor="ctr"/>
-          <a:lstStyle/>
-          <a:p>
-            <a:pPr indent="0" marL="0">
-              <a:buNone/>
-            </a:pPr>
-            <a:r>
-              <a:rPr lang="en-US" sz="750" dirty="0">
-                <a:solidFill>
-                  <a:srgbClr val="5B6B7C"/>
-                </a:solidFill>
-                <a:latin typeface="Arial" pitchFamily="34" charset="0"/>
-                <a:ea typeface="Arial" pitchFamily="34" charset="-122"/>
-                <a:cs typeface="Arial" pitchFamily="34" charset="-120"/>
-              </a:rPr>
-              <a:t>…</a:t>
-            </a:r>
-            <a:endParaRPr lang="en-US" sz="750" dirty="0"/>
-          </a:p>
-        </p:txBody>
-      </p:sp>
-      <p:sp>
-        <p:nvSpPr>
-          <p:cNvPr id="34" name="Shape 32"/>
-          <p:cNvSpPr/>
-          <p:nvPr/>
-        </p:nvSpPr>
-        <p:spPr>
-          <a:xfrm>
-            <a:off x="548640" y="2880360"/>
-            <a:ext cx="8138160" cy="868680"/>
-          </a:xfrm>
-          <a:prstGeom prst="roundRect">
-            <a:avLst>
-              <a:gd name="adj" fmla="val 7368"/>
-            </a:avLst>
-          </a:prstGeom>
-          <a:solidFill>
-            <a:srgbClr val="EDF3F9"/>
-          </a:solidFill>
-          <a:ln w="9525">
-            <a:solidFill>
-              <a:srgbClr val="C9D4E0"/>
-            </a:solidFill>
-            <a:prstDash val="solid"/>
-          </a:ln>
-        </p:spPr>
-      </p:sp>
-      <p:sp>
-        <p:nvSpPr>
-          <p:cNvPr id="35" name="Text 33"/>
-          <p:cNvSpPr/>
-          <p:nvPr/>
-        </p:nvSpPr>
-        <p:spPr>
-          <a:xfrm>
-            <a:off x="777240" y="2953512"/>
-            <a:ext cx="7680960" cy="731520"/>
-          </a:xfrm>
-          <a:prstGeom prst="rect">
-            <a:avLst/>
-          </a:prstGeom>
-          <a:noFill/>
-          <a:ln/>
-        </p:spPr>
-        <p:txBody>
-          <a:bodyPr wrap="square" lIns="0" tIns="0" rIns="0" bIns="0" rtlCol="0" anchor="ctr"/>
-          <a:lstStyle/>
-          <a:p>
-            <a:pPr indent="0" marL="0">
-              <a:buNone/>
-            </a:pPr>
-            <a:r>
-              <a:rPr lang="en-US" sz="900" b="1" spc="100" kern="0" dirty="0">
-                <a:solidFill>
-                  <a:srgbClr val="1F3A5F"/>
-                </a:solidFill>
-                <a:latin typeface="Arial" pitchFamily="34" charset="0"/>
-                <a:ea typeface="Arial" pitchFamily="34" charset="-122"/>
-                <a:cs typeface="Arial" pitchFamily="34" charset="-120"/>
-              </a:rPr>
-              <a:t>PHASE 1 — ESTATE DISCOVERY   </a:t>
-            </a:r>
-            <a:endParaRPr lang="en-US" sz="900" dirty="0"/>
-          </a:p>
-          <a:p>
-            <a:pPr indent="0" marL="0">
-              <a:buNone/>
-            </a:pPr>
-            <a:r>
-              <a:rPr lang="en-US" sz="950" dirty="0">
-                <a:solidFill>
-                  <a:srgbClr val="1E293B"/>
-                </a:solidFill>
-                <a:latin typeface="Arial" pitchFamily="34" charset="0"/>
-                <a:ea typeface="Arial" pitchFamily="34" charset="-122"/>
-                <a:cs typeface="Arial" pitchFamily="34" charset="-120"/>
-              </a:rPr>
-              <a:t>Scan every listener; export every CA database; audit trust stores; correlate against IPAM. Enable auth-protocol auditing (the Kerberos/NTLM measurement)</a:t>
-            </a:r>
-            <a:endParaRPr lang="en-US" sz="900" dirty="0"/>
-          </a:p>
-        </p:txBody>
-      </p:sp>
-      <p:sp>
-        <p:nvSpPr>
-          <p:cNvPr id="36" name="Shape 34"/>
-          <p:cNvSpPr/>
-          <p:nvPr/>
-        </p:nvSpPr>
-        <p:spPr>
-          <a:xfrm>
-            <a:off x="548640" y="3840480"/>
-            <a:ext cx="8138160" cy="868680"/>
-          </a:xfrm>
-          <a:prstGeom prst="roundRect">
-            <a:avLst>
-              <a:gd name="adj" fmla="val 7368"/>
-            </a:avLst>
-          </a:prstGeom>
-          <a:solidFill>
-            <a:srgbClr val="E6F5F2"/>
-          </a:solidFill>
-          <a:ln w="9525">
-            <a:solidFill>
-              <a:srgbClr val="C9D4E0"/>
-            </a:solidFill>
-            <a:prstDash val="solid"/>
-          </a:ln>
-        </p:spPr>
-      </p:sp>
-      <p:sp>
-        <p:nvSpPr>
-          <p:cNvPr id="37" name="Text 35"/>
-          <p:cNvSpPr/>
-          <p:nvPr/>
-        </p:nvSpPr>
-        <p:spPr>
-          <a:xfrm>
-            <a:off x="777240" y="3913632"/>
-            <a:ext cx="7680960" cy="731520"/>
-          </a:xfrm>
-          <a:prstGeom prst="rect">
-            <a:avLst/>
-          </a:prstGeom>
-          <a:noFill/>
-          <a:ln/>
-        </p:spPr>
-        <p:txBody>
-          <a:bodyPr wrap="square" lIns="0" tIns="0" rIns="0" bIns="0" rtlCol="0" anchor="ctr"/>
-          <a:lstStyle/>
-          <a:p>
-            <a:pPr indent="0" marL="0">
-              <a:buNone/>
-            </a:pPr>
-            <a:r>
-              <a:rPr lang="en-US" sz="900" b="1" spc="100" kern="0" dirty="0">
-                <a:solidFill>
-                  <a:srgbClr val="1A9E8F"/>
-                </a:solidFill>
-                <a:latin typeface="Arial" pitchFamily="34" charset="0"/>
-                <a:ea typeface="Arial" pitchFamily="34" charset="-122"/>
-                <a:cs typeface="Arial" pitchFamily="34" charset="-120"/>
-              </a:rPr>
-              <a:t>PHASE 2 — ISSUANCE AUTOMATION   </a:t>
-            </a:r>
-            <a:endParaRPr lang="en-US" sz="900" dirty="0"/>
-          </a:p>
-          <a:p>
-            <a:pPr indent="0" marL="0">
-              <a:buNone/>
-            </a:pPr>
-            <a:r>
-              <a:rPr lang="en-US" sz="950" dirty="0">
-                <a:solidFill>
-                  <a:srgbClr val="1E293B"/>
-                </a:solidFill>
-                <a:latin typeface="Arial" pitchFamily="34" charset="0"/>
-                <a:ea typeface="Arial" pitchFamily="34" charset="-122"/>
-                <a:cs typeface="Arial" pitchFamily="34" charset="-120"/>
-              </a:rPr>
-              <a:t>Offline root ceremony; purpose-scoped issuing CAs on HSMs; CAA published in every public zone; ACME wired to the DDI API; SCEP/EST confirmed on the Book 02 pipeline</a:t>
-            </a:r>
-            <a:endParaRPr lang="en-US" sz="900" dirty="0"/>
-          </a:p>
-        </p:txBody>
-      </p:sp>
-    </p:spTree>
-  </p:cSld>
-  <p:clrMapOvr>
-    <a:masterClrMapping/>
-  </p:clrMapOvr>
-</p:sld>
-</file>
-
 <file path=ppt/slides/slide24.xml><?xml version="1.0" encoding="utf-8"?>
 <p:sld xmlns:a="http://schemas.openxmlformats.org/drawingml/2006/main" xmlns:r="http://schemas.openxmlformats.org/officeDocument/2006/relationships" xmlns:p="http://schemas.openxmlformats.org/presentationml/2006/main">
   <p:cSld name="Slide 24">
@@ -19513,7 +19316,7 @@
                 <a:ea typeface="Arial" pitchFamily="34" charset="-122"/>
                 <a:cs typeface="Arial" pitchFamily="34" charset="-120"/>
               </a:rPr>
-              <a:t>PHASED IMPLEMENTATION — STEP 2 OF 2</a:t>
+              <a:t>PHASED IMPLEMENTATION — STEP 1 OF 2</a:t>
             </a:r>
             <a:endParaRPr lang="en-US" sz="1100" dirty="0"/>
           </a:p>
@@ -19552,7 +19355,7 @@
                 <a:ea typeface="Arial" pitchFamily="34" charset="-122"/>
                 <a:cs typeface="Arial" pitchFamily="34" charset="-120"/>
               </a:rPr>
-              <a:t>Then enforce: tokens, phishing-resistant MFA, workload conversion</a:t>
+              <a:t>Establish truth before demanding it: discovery, then automation</a:t>
             </a:r>
             <a:endParaRPr lang="en-US" sz="2200" dirty="0"/>
           </a:p>
@@ -19591,7 +19394,7 @@
                 <a:ea typeface="Arial" pitchFamily="34" charset="-122"/>
                 <a:cs typeface="Arial" pitchFamily="34" charset="-120"/>
               </a:rPr>
-              <a:t>Federal AAN — Book 03 Certificates &amp; Tokens · CSI Team Draft — Internal · FedRAMP Moderate · Date Code 2026-07-07 10:32 ET</a:t>
+              <a:t>Federal AAN — Book 03 Certificates &amp; Tokens · CSI Team Draft — Internal · FedRAMP Moderate · Date Code 2026-07-07 11:57 ET</a:t>
             </a:r>
             <a:endParaRPr lang="en-US" sz="800" dirty="0"/>
           </a:p>
@@ -19639,6 +19442,40 @@
       <p:sp>
         <p:nvSpPr>
           <p:cNvPr id="6" name="Shape 4"/>
+          <p:cNvSpPr/>
+          <p:nvPr/>
+        </p:nvSpPr>
+        <p:spPr>
+          <a:xfrm>
+            <a:off x="338328" y="1225296"/>
+            <a:ext cx="2103120" cy="1481328"/>
+          </a:xfrm>
+          <a:prstGeom prst="roundRect">
+            <a:avLst>
+              <a:gd name="adj" fmla="val 5556"/>
+            </a:avLst>
+          </a:prstGeom>
+          <a:solidFill>
+            <a:srgbClr val="FFFFFF"/>
+          </a:solidFill>
+          <a:ln w="31750">
+            <a:solidFill>
+              <a:srgbClr val="D4860B"/>
+            </a:solidFill>
+            <a:prstDash val="solid"/>
+          </a:ln>
+          <a:effectLst>
+            <a:outerShdw sx="100000" sy="100000" kx="0" ky="0" algn="bl" rotWithShape="0" blurRad="88900" dist="25400" dir="2700000">
+              <a:srgbClr val="000000">
+                <a:alpha val="14000"/>
+              </a:srgbClr>
+            </a:outerShdw>
+          </a:effectLst>
+        </p:spPr>
+      </p:sp>
+      <p:sp>
+        <p:nvSpPr>
+          <p:cNvPr id="7" name="Shape 5"/>
           <p:cNvSpPr/>
           <p:nvPr/>
         </p:nvSpPr>
@@ -19672,7 +19509,7 @@
       </p:sp>
       <p:sp>
         <p:nvSpPr>
-          <p:cNvPr id="7" name="Shape 5"/>
+          <p:cNvPr id="8" name="Shape 6"/>
           <p:cNvSpPr/>
           <p:nvPr/>
         </p:nvSpPr>
@@ -19692,7 +19529,7 @@
       </p:sp>
       <p:sp>
         <p:nvSpPr>
-          <p:cNvPr id="8" name="Text 6"/>
+          <p:cNvPr id="9" name="Text 7"/>
           <p:cNvSpPr/>
           <p:nvPr/>
         </p:nvSpPr>
@@ -19731,7 +19568,7 @@
       </p:sp>
       <p:sp>
         <p:nvSpPr>
-          <p:cNvPr id="9" name="Text 7"/>
+          <p:cNvPr id="10" name="Text 8"/>
           <p:cNvSpPr/>
           <p:nvPr/>
         </p:nvSpPr>
@@ -19770,7 +19607,7 @@
       </p:sp>
       <p:sp>
         <p:nvSpPr>
-          <p:cNvPr id="10" name="Text 8"/>
+          <p:cNvPr id="11" name="Text 9"/>
           <p:cNvSpPr/>
           <p:nvPr/>
         </p:nvSpPr>
@@ -19809,7 +19646,7 @@
       </p:sp>
       <p:sp>
         <p:nvSpPr>
-          <p:cNvPr id="11" name="Text 9"/>
+          <p:cNvPr id="12" name="Text 10"/>
           <p:cNvSpPr/>
           <p:nvPr/>
         </p:nvSpPr>
@@ -19848,7 +19685,7 @@
       </p:sp>
       <p:sp>
         <p:nvSpPr>
-          <p:cNvPr id="12" name="Shape 10"/>
+          <p:cNvPr id="13" name="Shape 11"/>
           <p:cNvSpPr/>
           <p:nvPr/>
         </p:nvSpPr>
@@ -19863,7 +19700,7 @@
           <a:noFill/>
           <a:ln w="25400">
             <a:solidFill>
-              <a:srgbClr val="5B6B7C"/>
+              <a:srgbClr val="C9D4E0"/>
             </a:solidFill>
             <a:prstDash val="solid"/>
             <a:tailEnd type="triangle"/>
@@ -19872,7 +19709,7 @@
       </p:sp>
       <p:sp>
         <p:nvSpPr>
-          <p:cNvPr id="13" name="Shape 11"/>
+          <p:cNvPr id="14" name="Shape 12"/>
           <p:cNvSpPr/>
           <p:nvPr/>
         </p:nvSpPr>
@@ -19906,7 +19743,7 @@
       </p:sp>
       <p:sp>
         <p:nvSpPr>
-          <p:cNvPr id="14" name="Shape 12"/>
+          <p:cNvPr id="15" name="Shape 13"/>
           <p:cNvSpPr/>
           <p:nvPr/>
         </p:nvSpPr>
@@ -19926,7 +19763,7 @@
       </p:sp>
       <p:sp>
         <p:nvSpPr>
-          <p:cNvPr id="15" name="Text 13"/>
+          <p:cNvPr id="16" name="Text 14"/>
           <p:cNvSpPr/>
           <p:nvPr/>
         </p:nvSpPr>
@@ -19965,7 +19802,7 @@
       </p:sp>
       <p:sp>
         <p:nvSpPr>
-          <p:cNvPr id="16" name="Text 14"/>
+          <p:cNvPr id="17" name="Text 15"/>
           <p:cNvSpPr/>
           <p:nvPr/>
         </p:nvSpPr>
@@ -20004,7 +19841,7 @@
       </p:sp>
       <p:sp>
         <p:nvSpPr>
-          <p:cNvPr id="17" name="Text 15"/>
+          <p:cNvPr id="18" name="Text 16"/>
           <p:cNvSpPr/>
           <p:nvPr/>
         </p:nvSpPr>
@@ -20043,7 +19880,7 @@
       </p:sp>
       <p:sp>
         <p:nvSpPr>
-          <p:cNvPr id="18" name="Text 16"/>
+          <p:cNvPr id="19" name="Text 17"/>
           <p:cNvSpPr/>
           <p:nvPr/>
         </p:nvSpPr>
@@ -20082,7 +19919,7 @@
       </p:sp>
       <p:sp>
         <p:nvSpPr>
-          <p:cNvPr id="19" name="Shape 17"/>
+          <p:cNvPr id="20" name="Shape 18"/>
           <p:cNvSpPr/>
           <p:nvPr/>
         </p:nvSpPr>
@@ -20097,7 +19934,7 @@
           <a:noFill/>
           <a:ln w="25400">
             <a:solidFill>
-              <a:srgbClr val="5B6B7C"/>
+              <a:srgbClr val="C9D4E0"/>
             </a:solidFill>
             <a:prstDash val="solid"/>
             <a:tailEnd type="triangle"/>
@@ -20106,40 +19943,6 @@
       </p:sp>
       <p:sp>
         <p:nvSpPr>
-          <p:cNvPr id="20" name="Shape 18"/>
-          <p:cNvSpPr/>
-          <p:nvPr/>
-        </p:nvSpPr>
-        <p:spPr>
-          <a:xfrm>
-            <a:off x="4581144" y="1225296"/>
-            <a:ext cx="2103120" cy="1481328"/>
-          </a:xfrm>
-          <a:prstGeom prst="roundRect">
-            <a:avLst>
-              <a:gd name="adj" fmla="val 5556"/>
-            </a:avLst>
-          </a:prstGeom>
-          <a:solidFill>
-            <a:srgbClr val="FFFFFF"/>
-          </a:solidFill>
-          <a:ln w="31750">
-            <a:solidFill>
-              <a:srgbClr val="D4860B"/>
-            </a:solidFill>
-            <a:prstDash val="solid"/>
-          </a:ln>
-          <a:effectLst>
-            <a:outerShdw sx="100000" sy="100000" kx="0" ky="0" algn="bl" rotWithShape="0" blurRad="88900" dist="25400" dir="2700000">
-              <a:srgbClr val="000000">
-                <a:alpha val="14000"/>
-              </a:srgbClr>
-            </a:outerShdw>
-          </a:effectLst>
-        </p:spPr>
-      </p:sp>
-      <p:sp>
-        <p:nvSpPr>
           <p:cNvPr id="21" name="Shape 19"/>
           <p:cNvSpPr/>
           <p:nvPr/>
@@ -20155,7 +19958,7 @@
             </a:avLst>
           </a:prstGeom>
           <a:solidFill>
-            <a:srgbClr val="FFFFFF"/>
+            <a:srgbClr val="F3F5F8"/>
           </a:solidFill>
           <a:ln w="9525">
             <a:solidFill>
@@ -20163,13 +19966,6 @@
             </a:solidFill>
             <a:prstDash val="solid"/>
           </a:ln>
-          <a:effectLst>
-            <a:outerShdw sx="100000" sy="100000" kx="0" ky="0" algn="bl" rotWithShape="0" blurRad="88900" dist="25400" dir="2700000">
-              <a:srgbClr val="000000">
-                <a:alpha val="14000"/>
-              </a:srgbClr>
-            </a:outerShdw>
-          </a:effectLst>
         </p:spPr>
       </p:sp>
       <p:sp>
@@ -20187,7 +19983,7 @@
             <a:avLst/>
           </a:prstGeom>
           <a:solidFill>
-            <a:srgbClr val="D4860B"/>
+            <a:srgbClr val="C9D4E0"/>
           </a:solidFill>
           <a:ln/>
         </p:spPr>
@@ -20219,7 +20015,7 @@
             <a:r>
               <a:rPr lang="en-US" sz="1300" b="1" dirty="0">
                 <a:solidFill>
-                  <a:srgbClr val="FFFFFF"/>
+                  <a:srgbClr val="5B6B7C"/>
                 </a:solidFill>
                 <a:latin typeface="Arial" pitchFamily="34" charset="0"/>
                 <a:ea typeface="Arial" pitchFamily="34" charset="-122"/>
@@ -20258,7 +20054,7 @@
             <a:r>
               <a:rPr lang="en-US" sz="950" b="1" dirty="0">
                 <a:solidFill>
-                  <a:srgbClr val="1E293B"/>
+                  <a:srgbClr val="5B6B7C"/>
                 </a:solidFill>
                 <a:latin typeface="Arial" pitchFamily="34" charset="0"/>
                 <a:ea typeface="Arial" pitchFamily="34" charset="-122"/>
@@ -20297,7 +20093,7 @@
             <a:r>
               <a:rPr lang="en-US" sz="850" b="1" dirty="0">
                 <a:solidFill>
-                  <a:srgbClr val="D4860B"/>
+                  <a:srgbClr val="5B6B7C"/>
                 </a:solidFill>
                 <a:latin typeface="Arial" pitchFamily="34" charset="0"/>
                 <a:ea typeface="Arial" pitchFamily="34" charset="-122"/>
@@ -20342,7 +20138,7 @@
                 <a:ea typeface="Arial" pitchFamily="34" charset="-122"/>
                 <a:cs typeface="Arial" pitchFamily="34" charset="-120"/>
               </a:rPr>
-              <a:t>Gate: Legacy auth blocked with measured zero business impact; privileged access impossible without a phishing-resistant assertion</a:t>
+              <a:t>…</a:t>
             </a:r>
             <a:endParaRPr lang="en-US" sz="750" dirty="0"/>
           </a:p>
@@ -20365,7 +20161,7 @@
           <a:noFill/>
           <a:ln w="25400">
             <a:solidFill>
-              <a:srgbClr val="5B6B7C"/>
+              <a:srgbClr val="C9D4E0"/>
             </a:solidFill>
             <a:prstDash val="solid"/>
             <a:tailEnd type="triangle"/>
@@ -20389,7 +20185,7 @@
             </a:avLst>
           </a:prstGeom>
           <a:solidFill>
-            <a:srgbClr val="FFFFFF"/>
+            <a:srgbClr val="F3F5F8"/>
           </a:solidFill>
           <a:ln w="9525">
             <a:solidFill>
@@ -20397,13 +20193,6 @@
             </a:solidFill>
             <a:prstDash val="solid"/>
           </a:ln>
-          <a:effectLst>
-            <a:outerShdw sx="100000" sy="100000" kx="0" ky="0" algn="bl" rotWithShape="0" blurRad="88900" dist="25400" dir="2700000">
-              <a:srgbClr val="000000">
-                <a:alpha val="14000"/>
-              </a:srgbClr>
-            </a:outerShdw>
-          </a:effectLst>
         </p:spPr>
       </p:sp>
       <p:sp>
@@ -20421,7 +20210,7 @@
             <a:avLst/>
           </a:prstGeom>
           <a:solidFill>
-            <a:srgbClr val="C0392B"/>
+            <a:srgbClr val="C9D4E0"/>
           </a:solidFill>
           <a:ln/>
         </p:spPr>
@@ -20453,7 +20242,7 @@
             <a:r>
               <a:rPr lang="en-US" sz="1300" b="1" dirty="0">
                 <a:solidFill>
-                  <a:srgbClr val="FFFFFF"/>
+                  <a:srgbClr val="5B6B7C"/>
                 </a:solidFill>
                 <a:latin typeface="Arial" pitchFamily="34" charset="0"/>
                 <a:ea typeface="Arial" pitchFamily="34" charset="-122"/>
@@ -20492,7 +20281,7 @@
             <a:r>
               <a:rPr lang="en-US" sz="950" b="1" dirty="0">
                 <a:solidFill>
-                  <a:srgbClr val="1E293B"/>
+                  <a:srgbClr val="5B6B7C"/>
                 </a:solidFill>
                 <a:latin typeface="Arial" pitchFamily="34" charset="0"/>
                 <a:ea typeface="Arial" pitchFamily="34" charset="-122"/>
@@ -20531,7 +20320,7 @@
             <a:r>
               <a:rPr lang="en-US" sz="850" b="1" dirty="0">
                 <a:solidFill>
-                  <a:srgbClr val="C0392B"/>
+                  <a:srgbClr val="5B6B7C"/>
                 </a:solidFill>
                 <a:latin typeface="Arial" pitchFamily="34" charset="0"/>
                 <a:ea typeface="Arial" pitchFamily="34" charset="-122"/>
@@ -20576,7 +20365,7 @@
                 <a:ea typeface="Arial" pitchFamily="34" charset="-122"/>
                 <a:cs typeface="Arial" pitchFamily="34" charset="-120"/>
               </a:rPr>
-              <a:t>Gate: Secret inventory trends monotonically to zero; every remaining entry has a named exception with an expiry date</a:t>
+              <a:t>…</a:t>
             </a:r>
             <a:endParaRPr lang="en-US" sz="750" dirty="0"/>
           </a:p>
@@ -20636,13 +20425,13 @@
             <a:r>
               <a:rPr lang="en-US" sz="900" b="1" spc="100" kern="0" dirty="0">
                 <a:solidFill>
-                  <a:srgbClr val="D4860B"/>
-                </a:solidFill>
-                <a:latin typeface="Arial" pitchFamily="34" charset="0"/>
-                <a:ea typeface="Arial" pitchFamily="34" charset="-122"/>
-                <a:cs typeface="Arial" pitchFamily="34" charset="-120"/>
-              </a:rPr>
-              <a:t>PHASE 3 — TOKEN MIGRATION + PHISHING-RESISTANT MFA   </a:t>
+                  <a:srgbClr val="1F3A5F"/>
+                </a:solidFill>
+                <a:latin typeface="Arial" pitchFamily="34" charset="0"/>
+                <a:ea typeface="Arial" pitchFamily="34" charset="-122"/>
+                <a:cs typeface="Arial" pitchFamily="34" charset="-120"/>
+              </a:rPr>
+              <a:t>PHASE 1 — ESTATE DISCOVERY   </a:t>
             </a:r>
             <a:endParaRPr lang="en-US" sz="900" dirty="0"/>
           </a:p>
@@ -20659,7 +20448,7 @@
                 <a:ea typeface="Arial" pitchFamily="34" charset="-122"/>
                 <a:cs typeface="Arial" pitchFamily="34" charset="-120"/>
               </a:rPr>
-              <a:t>Apps registered to the IdP; phishing-resistant authenticators enforced — privileged first (IA-2(1)), then everyone (IA-2(2)); legacy auth disabled tenant-wide per BOD 25-01</a:t>
+              <a:t>Scan every listener; export every CA database; audit trust stores; correlate against IPAM. Enable auth-protocol auditing (the Kerberos/NTLM measurement)</a:t>
             </a:r>
             <a:endParaRPr lang="en-US" sz="900" dirty="0"/>
           </a:p>
@@ -20719,13 +20508,13 @@
             <a:r>
               <a:rPr lang="en-US" sz="900" b="1" spc="100" kern="0" dirty="0">
                 <a:solidFill>
-                  <a:srgbClr val="C0392B"/>
-                </a:solidFill>
-                <a:latin typeface="Arial" pitchFamily="34" charset="0"/>
-                <a:ea typeface="Arial" pitchFamily="34" charset="-122"/>
-                <a:cs typeface="Arial" pitchFamily="34" charset="-120"/>
-              </a:rPr>
-              <a:t>PHASE 4 — WORKLOAD IDENTITY CONVERSION   </a:t>
+                  <a:srgbClr val="1A9E8F"/>
+                </a:solidFill>
+                <a:latin typeface="Arial" pitchFamily="34" charset="0"/>
+                <a:ea typeface="Arial" pitchFamily="34" charset="-122"/>
+                <a:cs typeface="Arial" pitchFamily="34" charset="-120"/>
+              </a:rPr>
+              <a:t>PHASE 2 — ISSUANCE AUTOMATION   </a:t>
             </a:r>
             <a:endParaRPr lang="en-US" sz="900" dirty="0"/>
           </a:p>
@@ -20742,7 +20531,7 @@
                 <a:ea typeface="Arial" pitchFamily="34" charset="-122"/>
                 <a:cs typeface="Arial" pitchFamily="34" charset="-120"/>
               </a:rPr>
-              <a:t>Inventory every stored secret; convert platform workloads to managed identities; federate cross-platform; expire the vacated secrets rather than abandoning them</a:t>
+              <a:t>Offline root ceremony; purpose-scoped issuing CAs on HSMs; CAA published in every public zone; ACME wired to the DDI API; SCEP/EST confirmed on the Book 02 pipeline</a:t>
             </a:r>
             <a:endParaRPr lang="en-US" sz="900" dirty="0"/>
           </a:p>
@@ -20813,7 +20602,7 @@
                 <a:ea typeface="Arial" pitchFamily="34" charset="-122"/>
                 <a:cs typeface="Arial" pitchFamily="34" charset="-120"/>
               </a:rPr>
-              <a:t>COMPLIANCE OUTCOME</a:t>
+              <a:t>PHASED IMPLEMENTATION — STEP 2 OF 2</a:t>
             </a:r>
             <a:endParaRPr lang="en-US" sz="1100" dirty="0"/>
           </a:p>
@@ -20844,7 +20633,7 @@
               <a:buNone/>
             </a:pPr>
             <a:r>
-              <a:rPr lang="en-US" sz="2600" b="1" dirty="0">
+              <a:rPr lang="en-US" sz="2200" b="1" dirty="0">
                 <a:solidFill>
                   <a:srgbClr val="1F3A5F"/>
                 </a:solidFill>
@@ -20852,9 +20641,9 @@
                 <a:ea typeface="Arial" pitchFamily="34" charset="-122"/>
                 <a:cs typeface="Arial" pitchFamily="34" charset="-120"/>
               </a:rPr>
-              <a:t>Five Moderate-baseline controls with no alternate closure path</a:t>
-            </a:r>
-            <a:endParaRPr lang="en-US" sz="2600" dirty="0"/>
+              <a:t>Then enforce: tokens, phishing-resistant MFA, workload conversion</a:t>
+            </a:r>
+            <a:endParaRPr lang="en-US" sz="2200" dirty="0"/>
           </a:p>
         </p:txBody>
       </p:sp>
@@ -20891,7 +20680,7 @@
                 <a:ea typeface="Arial" pitchFamily="34" charset="-122"/>
                 <a:cs typeface="Arial" pitchFamily="34" charset="-120"/>
               </a:rPr>
-              <a:t>Federal AAN — Book 03 Certificates &amp; Tokens · CSI Team Draft — Internal · FedRAMP Moderate · Date Code 2026-07-07 10:32 ET</a:t>
+              <a:t>Federal AAN — Book 03 Certificates &amp; Tokens · CSI Team Draft — Internal · FedRAMP Moderate · Date Code 2026-07-07 11:57 ET</a:t>
             </a:r>
             <a:endParaRPr lang="en-US" sz="800" dirty="0"/>
           </a:p>
@@ -20944,12 +20733,12 @@
         </p:nvSpPr>
         <p:spPr>
           <a:xfrm>
-            <a:off x="502920" y="1207008"/>
-            <a:ext cx="4114800" cy="3566160"/>
+            <a:off x="393192" y="1280160"/>
+            <a:ext cx="1993392" cy="1371600"/>
           </a:xfrm>
           <a:prstGeom prst="roundRect">
             <a:avLst>
-              <a:gd name="adj" fmla="val 1795"/>
+              <a:gd name="adj" fmla="val 4667"/>
             </a:avLst>
           </a:prstGeom>
           <a:solidFill>
@@ -20972,14 +20761,34 @@
       </p:sp>
       <p:sp>
         <p:nvSpPr>
-          <p:cNvPr id="7" name="Text 5"/>
-          <p:cNvSpPr/>
-          <p:nvPr/>
-        </p:nvSpPr>
-        <p:spPr>
-          <a:xfrm>
-            <a:off x="731520" y="1371600"/>
-            <a:ext cx="3657600" cy="1051560"/>
+          <p:cNvPr id="7" name="Shape 5"/>
+          <p:cNvSpPr/>
+          <p:nvPr/>
+        </p:nvSpPr>
+        <p:spPr>
+          <a:xfrm>
+            <a:off x="502920" y="1389888"/>
+            <a:ext cx="329184" cy="329184"/>
+          </a:xfrm>
+          <a:prstGeom prst="ellipse">
+            <a:avLst/>
+          </a:prstGeom>
+          <a:solidFill>
+            <a:srgbClr val="1F3A5F"/>
+          </a:solidFill>
+          <a:ln/>
+        </p:spPr>
+      </p:sp>
+      <p:sp>
+        <p:nvSpPr>
+          <p:cNvPr id="8" name="Text 6"/>
+          <p:cNvSpPr/>
+          <p:nvPr/>
+        </p:nvSpPr>
+        <p:spPr>
+          <a:xfrm>
+            <a:off x="502920" y="1376172"/>
+            <a:ext cx="329184" cy="329184"/>
           </a:xfrm>
           <a:prstGeom prst="rect">
             <a:avLst/>
@@ -20991,11 +20800,89 @@
           <a:bodyPr wrap="square" lIns="0" tIns="0" rIns="0" bIns="0" rtlCol="0" anchor="ctr"/>
           <a:lstStyle/>
           <a:p>
-            <a:pPr indent="0" marL="0">
-              <a:buNone/>
-            </a:pPr>
-            <a:r>
-              <a:rPr lang="en-US" sz="4000" b="1" dirty="0">
+            <a:pPr algn="ctr" indent="0" marL="0">
+              <a:buNone/>
+            </a:pPr>
+            <a:r>
+              <a:rPr lang="en-US" sz="1300" b="1" dirty="0">
+                <a:solidFill>
+                  <a:srgbClr val="FFFFFF"/>
+                </a:solidFill>
+                <a:latin typeface="Arial" pitchFamily="34" charset="0"/>
+                <a:ea typeface="Arial" pitchFamily="34" charset="-122"/>
+                <a:cs typeface="Arial" pitchFamily="34" charset="-120"/>
+              </a:rPr>
+              <a:t>1</a:t>
+            </a:r>
+            <a:endParaRPr lang="en-US" sz="1300" dirty="0"/>
+          </a:p>
+        </p:txBody>
+      </p:sp>
+      <p:sp>
+        <p:nvSpPr>
+          <p:cNvPr id="9" name="Text 7"/>
+          <p:cNvSpPr/>
+          <p:nvPr/>
+        </p:nvSpPr>
+        <p:spPr>
+          <a:xfrm>
+            <a:off x="905256" y="1353312"/>
+            <a:ext cx="1399032" cy="402336"/>
+          </a:xfrm>
+          <a:prstGeom prst="rect">
+            <a:avLst/>
+          </a:prstGeom>
+          <a:noFill/>
+          <a:ln/>
+        </p:spPr>
+        <p:txBody>
+          <a:bodyPr wrap="square" lIns="0" tIns="0" rIns="0" bIns="0" rtlCol="0" anchor="ctr"/>
+          <a:lstStyle/>
+          <a:p>
+            <a:pPr indent="0" marL="0">
+              <a:buNone/>
+            </a:pPr>
+            <a:r>
+              <a:rPr lang="en-US" sz="950" b="1" dirty="0">
+                <a:solidFill>
+                  <a:srgbClr val="1E293B"/>
+                </a:solidFill>
+                <a:latin typeface="Arial" pitchFamily="34" charset="0"/>
+                <a:ea typeface="Arial" pitchFamily="34" charset="-122"/>
+                <a:cs typeface="Arial" pitchFamily="34" charset="-120"/>
+              </a:rPr>
+              <a:t>Estate discovery</a:t>
+            </a:r>
+            <a:endParaRPr lang="en-US" sz="950" dirty="0"/>
+          </a:p>
+        </p:txBody>
+      </p:sp>
+      <p:sp>
+        <p:nvSpPr>
+          <p:cNvPr id="10" name="Text 8"/>
+          <p:cNvSpPr/>
+          <p:nvPr/>
+        </p:nvSpPr>
+        <p:spPr>
+          <a:xfrm>
+            <a:off x="905256" y="1755648"/>
+            <a:ext cx="1399032" cy="182880"/>
+          </a:xfrm>
+          <a:prstGeom prst="rect">
+            <a:avLst/>
+          </a:prstGeom>
+          <a:noFill/>
+          <a:ln/>
+        </p:spPr>
+        <p:txBody>
+          <a:bodyPr wrap="square" lIns="0" tIns="0" rIns="0" bIns="0" rtlCol="0" anchor="ctr"/>
+          <a:lstStyle/>
+          <a:p>
+            <a:pPr indent="0" marL="0">
+              <a:buNone/>
+            </a:pPr>
+            <a:r>
+              <a:rPr lang="en-US" sz="850" b="1" dirty="0">
                 <a:solidFill>
                   <a:srgbClr val="1F3A5F"/>
                 </a:solidFill>
@@ -21003,348 +20890,89 @@
                 <a:ea typeface="Arial" pitchFamily="34" charset="-122"/>
                 <a:cs typeface="Arial" pitchFamily="34" charset="-120"/>
               </a:rPr>
-              <a:t>5</a:t>
-            </a:r>
-            <a:endParaRPr lang="en-US" sz="4000" dirty="0"/>
-          </a:p>
-          <a:p>
-            <a:pPr indent="0" marL="0">
-              <a:buNone/>
-            </a:pPr>
-            <a:r>
-              <a:rPr lang="en-US" sz="1100" dirty="0">
-                <a:solidFill>
-                  <a:srgbClr val="1E293B"/>
-                </a:solidFill>
-                <a:latin typeface="Arial" pitchFamily="34" charset="0"/>
-                <a:ea typeface="Arial" pitchFamily="34" charset="-122"/>
-                <a:cs typeface="Arial" pitchFamily="34" charset="-120"/>
-              </a:rPr>
-              <a:t>NIST SP 800-53 Rev 5 controls (FedRAMP Moderate baseline) closed — each with a named mechanism that admits no alternative</a:t>
-            </a:r>
-            <a:endParaRPr lang="en-US" sz="4000" dirty="0"/>
-          </a:p>
-        </p:txBody>
-      </p:sp>
-      <p:sp>
-        <p:nvSpPr>
-          <p:cNvPr id="8" name="Shape 6"/>
-          <p:cNvSpPr/>
-          <p:nvPr/>
-        </p:nvSpPr>
-        <p:spPr>
-          <a:xfrm>
-            <a:off x="731520" y="2514600"/>
-            <a:ext cx="3657600" cy="347472"/>
+              <a:t>Weeks 1–4</a:t>
+            </a:r>
+            <a:endParaRPr lang="en-US" sz="850" dirty="0"/>
+          </a:p>
+        </p:txBody>
+      </p:sp>
+      <p:sp>
+        <p:nvSpPr>
+          <p:cNvPr id="11" name="Text 9"/>
+          <p:cNvSpPr/>
+          <p:nvPr/>
+        </p:nvSpPr>
+        <p:spPr>
+          <a:xfrm>
+            <a:off x="502920" y="1975104"/>
+            <a:ext cx="1773936" cy="585216"/>
+          </a:xfrm>
+          <a:prstGeom prst="rect">
+            <a:avLst/>
+          </a:prstGeom>
+          <a:noFill/>
+          <a:ln/>
+        </p:spPr>
+        <p:txBody>
+          <a:bodyPr wrap="square" lIns="0" tIns="0" rIns="0" bIns="0" rtlCol="0" anchor="ctr"/>
+          <a:lstStyle/>
+          <a:p>
+            <a:pPr indent="0" marL="0">
+              <a:buNone/>
+            </a:pPr>
+            <a:r>
+              <a:rPr lang="en-US" sz="750" dirty="0">
+                <a:solidFill>
+                  <a:srgbClr val="5B6B7C"/>
+                </a:solidFill>
+                <a:latin typeface="Arial" pitchFamily="34" charset="0"/>
+                <a:ea typeface="Arial" pitchFamily="34" charset="-122"/>
+                <a:cs typeface="Arial" pitchFamily="34" charset="-120"/>
+              </a:rPr>
+              <a:t>Gate: Every production cert has an owner, an issuer, and an IPAM binding — or an investigation ticket</a:t>
+            </a:r>
+            <a:endParaRPr lang="en-US" sz="750" dirty="0"/>
+          </a:p>
+        </p:txBody>
+      </p:sp>
+      <p:sp>
+        <p:nvSpPr>
+          <p:cNvPr id="12" name="Shape 10"/>
+          <p:cNvSpPr/>
+          <p:nvPr/>
+        </p:nvSpPr>
+        <p:spPr>
+          <a:xfrm>
+            <a:off x="2404872" y="1965960"/>
+            <a:ext cx="91440" cy="0"/>
+          </a:xfrm>
+          <a:prstGeom prst="line">
+            <a:avLst/>
+          </a:prstGeom>
+          <a:noFill/>
+          <a:ln w="25400">
+            <a:solidFill>
+              <a:srgbClr val="5B6B7C"/>
+            </a:solidFill>
+            <a:prstDash val="solid"/>
+            <a:tailEnd type="triangle"/>
+          </a:ln>
+        </p:spPr>
+      </p:sp>
+      <p:sp>
+        <p:nvSpPr>
+          <p:cNvPr id="13" name="Shape 11"/>
+          <p:cNvSpPr/>
+          <p:nvPr/>
+        </p:nvSpPr>
+        <p:spPr>
+          <a:xfrm>
+            <a:off x="2514600" y="1280160"/>
+            <a:ext cx="1993392" cy="1371600"/>
           </a:xfrm>
           <a:prstGeom prst="roundRect">
             <a:avLst>
-              <a:gd name="adj" fmla="val 15789"/>
-            </a:avLst>
-          </a:prstGeom>
-          <a:solidFill>
-            <a:srgbClr val="EDF3F9"/>
-          </a:solidFill>
-          <a:ln/>
-        </p:spPr>
-      </p:sp>
-      <p:sp>
-        <p:nvSpPr>
-          <p:cNvPr id="9" name="Text 7"/>
-          <p:cNvSpPr/>
-          <p:nvPr/>
-        </p:nvSpPr>
-        <p:spPr>
-          <a:xfrm>
-            <a:off x="841248" y="2514600"/>
-            <a:ext cx="3474720" cy="347472"/>
-          </a:xfrm>
-          <a:prstGeom prst="rect">
-            <a:avLst/>
-          </a:prstGeom>
-          <a:noFill/>
-          <a:ln/>
-        </p:spPr>
-        <p:txBody>
-          <a:bodyPr wrap="square" lIns="0" tIns="0" rIns="0" bIns="0" rtlCol="0" anchor="ctr"/>
-          <a:lstStyle/>
-          <a:p>
-            <a:pPr indent="0" marL="0">
-              <a:buNone/>
-            </a:pPr>
-            <a:r>
-              <a:rPr lang="en-US" sz="950" b="1" dirty="0">
-                <a:solidFill>
-                  <a:srgbClr val="1F3A5F"/>
-                </a:solidFill>
-                <a:latin typeface="Arial" pitchFamily="34" charset="0"/>
-                <a:ea typeface="Arial" pitchFamily="34" charset="-122"/>
-                <a:cs typeface="Arial" pitchFamily="34" charset="-120"/>
-              </a:rPr>
-              <a:t>IA-5(2) PKI-based authentication</a:t>
-            </a:r>
-            <a:endParaRPr lang="en-US" sz="950" dirty="0"/>
-          </a:p>
-        </p:txBody>
-      </p:sp>
-      <p:sp>
-        <p:nvSpPr>
-          <p:cNvPr id="10" name="Shape 8"/>
-          <p:cNvSpPr/>
-          <p:nvPr/>
-        </p:nvSpPr>
-        <p:spPr>
-          <a:xfrm>
-            <a:off x="731520" y="2935224"/>
-            <a:ext cx="3657600" cy="347472"/>
-          </a:xfrm>
-          <a:prstGeom prst="roundRect">
-            <a:avLst>
-              <a:gd name="adj" fmla="val 15789"/>
-            </a:avLst>
-          </a:prstGeom>
-          <a:solidFill>
-            <a:srgbClr val="EDF3F9"/>
-          </a:solidFill>
-          <a:ln/>
-        </p:spPr>
-      </p:sp>
-      <p:sp>
-        <p:nvSpPr>
-          <p:cNvPr id="11" name="Text 9"/>
-          <p:cNvSpPr/>
-          <p:nvPr/>
-        </p:nvSpPr>
-        <p:spPr>
-          <a:xfrm>
-            <a:off x="841248" y="2935224"/>
-            <a:ext cx="3474720" cy="347472"/>
-          </a:xfrm>
-          <a:prstGeom prst="rect">
-            <a:avLst/>
-          </a:prstGeom>
-          <a:noFill/>
-          <a:ln/>
-        </p:spPr>
-        <p:txBody>
-          <a:bodyPr wrap="square" lIns="0" tIns="0" rIns="0" bIns="0" rtlCol="0" anchor="ctr"/>
-          <a:lstStyle/>
-          <a:p>
-            <a:pPr indent="0" marL="0">
-              <a:buNone/>
-            </a:pPr>
-            <a:r>
-              <a:rPr lang="en-US" sz="950" b="1" dirty="0">
-                <a:solidFill>
-                  <a:srgbClr val="1F3A5F"/>
-                </a:solidFill>
-                <a:latin typeface="Arial" pitchFamily="34" charset="0"/>
-                <a:ea typeface="Arial" pitchFamily="34" charset="-122"/>
-                <a:cs typeface="Arial" pitchFamily="34" charset="-120"/>
-              </a:rPr>
-              <a:t>SC-12 key establishment + mgmt</a:t>
-            </a:r>
-            <a:endParaRPr lang="en-US" sz="950" dirty="0"/>
-          </a:p>
-        </p:txBody>
-      </p:sp>
-      <p:sp>
-        <p:nvSpPr>
-          <p:cNvPr id="12" name="Shape 10"/>
-          <p:cNvSpPr/>
-          <p:nvPr/>
-        </p:nvSpPr>
-        <p:spPr>
-          <a:xfrm>
-            <a:off x="731520" y="3355848"/>
-            <a:ext cx="3657600" cy="347472"/>
-          </a:xfrm>
-          <a:prstGeom prst="roundRect">
-            <a:avLst>
-              <a:gd name="adj" fmla="val 15789"/>
-            </a:avLst>
-          </a:prstGeom>
-          <a:solidFill>
-            <a:srgbClr val="EDF3F9"/>
-          </a:solidFill>
-          <a:ln/>
-        </p:spPr>
-      </p:sp>
-      <p:sp>
-        <p:nvSpPr>
-          <p:cNvPr id="13" name="Text 11"/>
-          <p:cNvSpPr/>
-          <p:nvPr/>
-        </p:nvSpPr>
-        <p:spPr>
-          <a:xfrm>
-            <a:off x="841248" y="3355848"/>
-            <a:ext cx="3474720" cy="347472"/>
-          </a:xfrm>
-          <a:prstGeom prst="rect">
-            <a:avLst/>
-          </a:prstGeom>
-          <a:noFill/>
-          <a:ln/>
-        </p:spPr>
-        <p:txBody>
-          <a:bodyPr wrap="square" lIns="0" tIns="0" rIns="0" bIns="0" rtlCol="0" anchor="ctr"/>
-          <a:lstStyle/>
-          <a:p>
-            <a:pPr indent="0" marL="0">
-              <a:buNone/>
-            </a:pPr>
-            <a:r>
-              <a:rPr lang="en-US" sz="950" b="1" dirty="0">
-                <a:solidFill>
-                  <a:srgbClr val="1F3A5F"/>
-                </a:solidFill>
-                <a:latin typeface="Arial" pitchFamily="34" charset="0"/>
-                <a:ea typeface="Arial" pitchFamily="34" charset="-122"/>
-                <a:cs typeface="Arial" pitchFamily="34" charset="-120"/>
-              </a:rPr>
-              <a:t>SC-17 PKI certificates under policy</a:t>
-            </a:r>
-            <a:endParaRPr lang="en-US" sz="950" dirty="0"/>
-          </a:p>
-        </p:txBody>
-      </p:sp>
-      <p:sp>
-        <p:nvSpPr>
-          <p:cNvPr id="14" name="Shape 12"/>
-          <p:cNvSpPr/>
-          <p:nvPr/>
-        </p:nvSpPr>
-        <p:spPr>
-          <a:xfrm>
-            <a:off x="731520" y="3776472"/>
-            <a:ext cx="3657600" cy="347472"/>
-          </a:xfrm>
-          <a:prstGeom prst="roundRect">
-            <a:avLst>
-              <a:gd name="adj" fmla="val 15789"/>
-            </a:avLst>
-          </a:prstGeom>
-          <a:solidFill>
-            <a:srgbClr val="EDF3F9"/>
-          </a:solidFill>
-          <a:ln/>
-        </p:spPr>
-      </p:sp>
-      <p:sp>
-        <p:nvSpPr>
-          <p:cNvPr id="15" name="Text 13"/>
-          <p:cNvSpPr/>
-          <p:nvPr/>
-        </p:nvSpPr>
-        <p:spPr>
-          <a:xfrm>
-            <a:off x="841248" y="3776472"/>
-            <a:ext cx="3474720" cy="347472"/>
-          </a:xfrm>
-          <a:prstGeom prst="rect">
-            <a:avLst/>
-          </a:prstGeom>
-          <a:noFill/>
-          <a:ln/>
-        </p:spPr>
-        <p:txBody>
-          <a:bodyPr wrap="square" lIns="0" tIns="0" rIns="0" bIns="0" rtlCol="0" anchor="ctr"/>
-          <a:lstStyle/>
-          <a:p>
-            <a:pPr indent="0" marL="0">
-              <a:buNone/>
-            </a:pPr>
-            <a:r>
-              <a:rPr lang="en-US" sz="950" b="1" dirty="0">
-                <a:solidFill>
-                  <a:srgbClr val="1F3A5F"/>
-                </a:solidFill>
-                <a:latin typeface="Arial" pitchFamily="34" charset="0"/>
-                <a:ea typeface="Arial" pitchFamily="34" charset="-122"/>
-                <a:cs typeface="Arial" pitchFamily="34" charset="-120"/>
-              </a:rPr>
-              <a:t>IA-2(1) MFA — privileged accounts</a:t>
-            </a:r>
-            <a:endParaRPr lang="en-US" sz="950" dirty="0"/>
-          </a:p>
-        </p:txBody>
-      </p:sp>
-      <p:sp>
-        <p:nvSpPr>
-          <p:cNvPr id="16" name="Shape 14"/>
-          <p:cNvSpPr/>
-          <p:nvPr/>
-        </p:nvSpPr>
-        <p:spPr>
-          <a:xfrm>
-            <a:off x="731520" y="4197096"/>
-            <a:ext cx="3657600" cy="347472"/>
-          </a:xfrm>
-          <a:prstGeom prst="roundRect">
-            <a:avLst>
-              <a:gd name="adj" fmla="val 15789"/>
-            </a:avLst>
-          </a:prstGeom>
-          <a:solidFill>
-            <a:srgbClr val="EDF3F9"/>
-          </a:solidFill>
-          <a:ln/>
-        </p:spPr>
-      </p:sp>
-      <p:sp>
-        <p:nvSpPr>
-          <p:cNvPr id="17" name="Text 15"/>
-          <p:cNvSpPr/>
-          <p:nvPr/>
-        </p:nvSpPr>
-        <p:spPr>
-          <a:xfrm>
-            <a:off x="841248" y="4197096"/>
-            <a:ext cx="3474720" cy="347472"/>
-          </a:xfrm>
-          <a:prstGeom prst="rect">
-            <a:avLst/>
-          </a:prstGeom>
-          <a:noFill/>
-          <a:ln/>
-        </p:spPr>
-        <p:txBody>
-          <a:bodyPr wrap="square" lIns="0" tIns="0" rIns="0" bIns="0" rtlCol="0" anchor="ctr"/>
-          <a:lstStyle/>
-          <a:p>
-            <a:pPr indent="0" marL="0">
-              <a:buNone/>
-            </a:pPr>
-            <a:r>
-              <a:rPr lang="en-US" sz="950" b="1" dirty="0">
-                <a:solidFill>
-                  <a:srgbClr val="1F3A5F"/>
-                </a:solidFill>
-                <a:latin typeface="Arial" pitchFamily="34" charset="0"/>
-                <a:ea typeface="Arial" pitchFamily="34" charset="-122"/>
-                <a:cs typeface="Arial" pitchFamily="34" charset="-120"/>
-              </a:rPr>
-              <a:t>IA-2(2) MFA — non-privileged</a:t>
-            </a:r>
-            <a:endParaRPr lang="en-US" sz="950" dirty="0"/>
-          </a:p>
-        </p:txBody>
-      </p:sp>
-      <p:sp>
-        <p:nvSpPr>
-          <p:cNvPr id="18" name="Shape 16"/>
-          <p:cNvSpPr/>
-          <p:nvPr/>
-        </p:nvSpPr>
-        <p:spPr>
-          <a:xfrm>
-            <a:off x="4800600" y="1207008"/>
-            <a:ext cx="3931920" cy="3566160"/>
-          </a:xfrm>
-          <a:prstGeom prst="roundRect">
-            <a:avLst>
-              <a:gd name="adj" fmla="val 1795"/>
+              <a:gd name="adj" fmla="val 4667"/>
             </a:avLst>
           </a:prstGeom>
           <a:solidFill>
@@ -21367,14 +20995,34 @@
       </p:sp>
       <p:sp>
         <p:nvSpPr>
-          <p:cNvPr id="19" name="Text 17"/>
-          <p:cNvSpPr/>
-          <p:nvPr/>
-        </p:nvSpPr>
-        <p:spPr>
-          <a:xfrm>
-            <a:off x="5029200" y="1353312"/>
-            <a:ext cx="3566160" cy="256032"/>
+          <p:cNvPr id="14" name="Shape 12"/>
+          <p:cNvSpPr/>
+          <p:nvPr/>
+        </p:nvSpPr>
+        <p:spPr>
+          <a:xfrm>
+            <a:off x="2624328" y="1389888"/>
+            <a:ext cx="329184" cy="329184"/>
+          </a:xfrm>
+          <a:prstGeom prst="ellipse">
+            <a:avLst/>
+          </a:prstGeom>
+          <a:solidFill>
+            <a:srgbClr val="1A9E8F"/>
+          </a:solidFill>
+          <a:ln/>
+        </p:spPr>
+      </p:sp>
+      <p:sp>
+        <p:nvSpPr>
+          <p:cNvPr id="15" name="Text 13"/>
+          <p:cNvSpPr/>
+          <p:nvPr/>
+        </p:nvSpPr>
+        <p:spPr>
+          <a:xfrm>
+            <a:off x="2624328" y="1376172"/>
+            <a:ext cx="329184" cy="329184"/>
           </a:xfrm>
           <a:prstGeom prst="rect">
             <a:avLst/>
@@ -21386,11 +21034,357 @@
           <a:bodyPr wrap="square" lIns="0" tIns="0" rIns="0" bIns="0" rtlCol="0" anchor="ctr"/>
           <a:lstStyle/>
           <a:p>
-            <a:pPr indent="0" marL="0">
-              <a:buNone/>
-            </a:pPr>
-            <a:r>
-              <a:rPr lang="en-US" sz="1000" b="1" spc="150" kern="0" dirty="0">
+            <a:pPr algn="ctr" indent="0" marL="0">
+              <a:buNone/>
+            </a:pPr>
+            <a:r>
+              <a:rPr lang="en-US" sz="1300" b="1" dirty="0">
+                <a:solidFill>
+                  <a:srgbClr val="FFFFFF"/>
+                </a:solidFill>
+                <a:latin typeface="Arial" pitchFamily="34" charset="0"/>
+                <a:ea typeface="Arial" pitchFamily="34" charset="-122"/>
+                <a:cs typeface="Arial" pitchFamily="34" charset="-120"/>
+              </a:rPr>
+              <a:t>2</a:t>
+            </a:r>
+            <a:endParaRPr lang="en-US" sz="1300" dirty="0"/>
+          </a:p>
+        </p:txBody>
+      </p:sp>
+      <p:sp>
+        <p:nvSpPr>
+          <p:cNvPr id="16" name="Text 14"/>
+          <p:cNvSpPr/>
+          <p:nvPr/>
+        </p:nvSpPr>
+        <p:spPr>
+          <a:xfrm>
+            <a:off x="3026664" y="1353312"/>
+            <a:ext cx="1399032" cy="402336"/>
+          </a:xfrm>
+          <a:prstGeom prst="rect">
+            <a:avLst/>
+          </a:prstGeom>
+          <a:noFill/>
+          <a:ln/>
+        </p:spPr>
+        <p:txBody>
+          <a:bodyPr wrap="square" lIns="0" tIns="0" rIns="0" bIns="0" rtlCol="0" anchor="ctr"/>
+          <a:lstStyle/>
+          <a:p>
+            <a:pPr indent="0" marL="0">
+              <a:buNone/>
+            </a:pPr>
+            <a:r>
+              <a:rPr lang="en-US" sz="950" b="1" dirty="0">
+                <a:solidFill>
+                  <a:srgbClr val="1E293B"/>
+                </a:solidFill>
+                <a:latin typeface="Arial" pitchFamily="34" charset="0"/>
+                <a:ea typeface="Arial" pitchFamily="34" charset="-122"/>
+                <a:cs typeface="Arial" pitchFamily="34" charset="-120"/>
+              </a:rPr>
+              <a:t>Issuance automation</a:t>
+            </a:r>
+            <a:endParaRPr lang="en-US" sz="950" dirty="0"/>
+          </a:p>
+        </p:txBody>
+      </p:sp>
+      <p:sp>
+        <p:nvSpPr>
+          <p:cNvPr id="17" name="Text 15"/>
+          <p:cNvSpPr/>
+          <p:nvPr/>
+        </p:nvSpPr>
+        <p:spPr>
+          <a:xfrm>
+            <a:off x="3026664" y="1755648"/>
+            <a:ext cx="1399032" cy="182880"/>
+          </a:xfrm>
+          <a:prstGeom prst="rect">
+            <a:avLst/>
+          </a:prstGeom>
+          <a:noFill/>
+          <a:ln/>
+        </p:spPr>
+        <p:txBody>
+          <a:bodyPr wrap="square" lIns="0" tIns="0" rIns="0" bIns="0" rtlCol="0" anchor="ctr"/>
+          <a:lstStyle/>
+          <a:p>
+            <a:pPr indent="0" marL="0">
+              <a:buNone/>
+            </a:pPr>
+            <a:r>
+              <a:rPr lang="en-US" sz="850" b="1" dirty="0">
+                <a:solidFill>
+                  <a:srgbClr val="1A9E8F"/>
+                </a:solidFill>
+                <a:latin typeface="Arial" pitchFamily="34" charset="0"/>
+                <a:ea typeface="Arial" pitchFamily="34" charset="-122"/>
+                <a:cs typeface="Arial" pitchFamily="34" charset="-120"/>
+              </a:rPr>
+              <a:t>Weeks 5–12</a:t>
+            </a:r>
+            <a:endParaRPr lang="en-US" sz="850" dirty="0"/>
+          </a:p>
+        </p:txBody>
+      </p:sp>
+      <p:sp>
+        <p:nvSpPr>
+          <p:cNvPr id="18" name="Text 16"/>
+          <p:cNvSpPr/>
+          <p:nvPr/>
+        </p:nvSpPr>
+        <p:spPr>
+          <a:xfrm>
+            <a:off x="2624328" y="1975104"/>
+            <a:ext cx="1773936" cy="585216"/>
+          </a:xfrm>
+          <a:prstGeom prst="rect">
+            <a:avLst/>
+          </a:prstGeom>
+          <a:noFill/>
+          <a:ln/>
+        </p:spPr>
+        <p:txBody>
+          <a:bodyPr wrap="square" lIns="0" tIns="0" rIns="0" bIns="0" rtlCol="0" anchor="ctr"/>
+          <a:lstStyle/>
+          <a:p>
+            <a:pPr indent="0" marL="0">
+              <a:buNone/>
+            </a:pPr>
+            <a:r>
+              <a:rPr lang="en-US" sz="750" dirty="0">
+                <a:solidFill>
+                  <a:srgbClr val="5B6B7C"/>
+                </a:solidFill>
+                <a:latin typeface="Arial" pitchFamily="34" charset="0"/>
+                <a:ea typeface="Arial" pitchFamily="34" charset="-122"/>
+                <a:cs typeface="Arial" pitchFamily="34" charset="-120"/>
+              </a:rPr>
+              <a:t>Gate: Zero manual issuance requests for covered classes in a 30-day window; renewal automation through one full cycle</a:t>
+            </a:r>
+            <a:endParaRPr lang="en-US" sz="750" dirty="0"/>
+          </a:p>
+        </p:txBody>
+      </p:sp>
+      <p:sp>
+        <p:nvSpPr>
+          <p:cNvPr id="19" name="Shape 17"/>
+          <p:cNvSpPr/>
+          <p:nvPr/>
+        </p:nvSpPr>
+        <p:spPr>
+          <a:xfrm>
+            <a:off x="4526280" y="1965960"/>
+            <a:ext cx="91440" cy="0"/>
+          </a:xfrm>
+          <a:prstGeom prst="line">
+            <a:avLst/>
+          </a:prstGeom>
+          <a:noFill/>
+          <a:ln w="25400">
+            <a:solidFill>
+              <a:srgbClr val="5B6B7C"/>
+            </a:solidFill>
+            <a:prstDash val="solid"/>
+            <a:tailEnd type="triangle"/>
+          </a:ln>
+        </p:spPr>
+      </p:sp>
+      <p:sp>
+        <p:nvSpPr>
+          <p:cNvPr id="20" name="Shape 18"/>
+          <p:cNvSpPr/>
+          <p:nvPr/>
+        </p:nvSpPr>
+        <p:spPr>
+          <a:xfrm>
+            <a:off x="4581144" y="1225296"/>
+            <a:ext cx="2103120" cy="1481328"/>
+          </a:xfrm>
+          <a:prstGeom prst="roundRect">
+            <a:avLst>
+              <a:gd name="adj" fmla="val 5556"/>
+            </a:avLst>
+          </a:prstGeom>
+          <a:solidFill>
+            <a:srgbClr val="FFFFFF"/>
+          </a:solidFill>
+          <a:ln w="31750">
+            <a:solidFill>
+              <a:srgbClr val="D4860B"/>
+            </a:solidFill>
+            <a:prstDash val="solid"/>
+          </a:ln>
+          <a:effectLst>
+            <a:outerShdw sx="100000" sy="100000" kx="0" ky="0" algn="bl" rotWithShape="0" blurRad="88900" dist="25400" dir="2700000">
+              <a:srgbClr val="000000">
+                <a:alpha val="14000"/>
+              </a:srgbClr>
+            </a:outerShdw>
+          </a:effectLst>
+        </p:spPr>
+      </p:sp>
+      <p:sp>
+        <p:nvSpPr>
+          <p:cNvPr id="21" name="Shape 19"/>
+          <p:cNvSpPr/>
+          <p:nvPr/>
+        </p:nvSpPr>
+        <p:spPr>
+          <a:xfrm>
+            <a:off x="4636008" y="1280160"/>
+            <a:ext cx="1993392" cy="1371600"/>
+          </a:xfrm>
+          <a:prstGeom prst="roundRect">
+            <a:avLst>
+              <a:gd name="adj" fmla="val 4667"/>
+            </a:avLst>
+          </a:prstGeom>
+          <a:solidFill>
+            <a:srgbClr val="FFFFFF"/>
+          </a:solidFill>
+          <a:ln w="9525">
+            <a:solidFill>
+              <a:srgbClr val="C9D4E0"/>
+            </a:solidFill>
+            <a:prstDash val="solid"/>
+          </a:ln>
+          <a:effectLst>
+            <a:outerShdw sx="100000" sy="100000" kx="0" ky="0" algn="bl" rotWithShape="0" blurRad="88900" dist="25400" dir="2700000">
+              <a:srgbClr val="000000">
+                <a:alpha val="14000"/>
+              </a:srgbClr>
+            </a:outerShdw>
+          </a:effectLst>
+        </p:spPr>
+      </p:sp>
+      <p:sp>
+        <p:nvSpPr>
+          <p:cNvPr id="22" name="Shape 20"/>
+          <p:cNvSpPr/>
+          <p:nvPr/>
+        </p:nvSpPr>
+        <p:spPr>
+          <a:xfrm>
+            <a:off x="4745736" y="1389888"/>
+            <a:ext cx="329184" cy="329184"/>
+          </a:xfrm>
+          <a:prstGeom prst="ellipse">
+            <a:avLst/>
+          </a:prstGeom>
+          <a:solidFill>
+            <a:srgbClr val="D4860B"/>
+          </a:solidFill>
+          <a:ln/>
+        </p:spPr>
+      </p:sp>
+      <p:sp>
+        <p:nvSpPr>
+          <p:cNvPr id="23" name="Text 21"/>
+          <p:cNvSpPr/>
+          <p:nvPr/>
+        </p:nvSpPr>
+        <p:spPr>
+          <a:xfrm>
+            <a:off x="4745736" y="1376172"/>
+            <a:ext cx="329184" cy="329184"/>
+          </a:xfrm>
+          <a:prstGeom prst="rect">
+            <a:avLst/>
+          </a:prstGeom>
+          <a:noFill/>
+          <a:ln/>
+        </p:spPr>
+        <p:txBody>
+          <a:bodyPr wrap="square" lIns="0" tIns="0" rIns="0" bIns="0" rtlCol="0" anchor="ctr"/>
+          <a:lstStyle/>
+          <a:p>
+            <a:pPr algn="ctr" indent="0" marL="0">
+              <a:buNone/>
+            </a:pPr>
+            <a:r>
+              <a:rPr lang="en-US" sz="1300" b="1" dirty="0">
+                <a:solidFill>
+                  <a:srgbClr val="FFFFFF"/>
+                </a:solidFill>
+                <a:latin typeface="Arial" pitchFamily="34" charset="0"/>
+                <a:ea typeface="Arial" pitchFamily="34" charset="-122"/>
+                <a:cs typeface="Arial" pitchFamily="34" charset="-120"/>
+              </a:rPr>
+              <a:t>3</a:t>
+            </a:r>
+            <a:endParaRPr lang="en-US" sz="1300" dirty="0"/>
+          </a:p>
+        </p:txBody>
+      </p:sp>
+      <p:sp>
+        <p:nvSpPr>
+          <p:cNvPr id="24" name="Text 22"/>
+          <p:cNvSpPr/>
+          <p:nvPr/>
+        </p:nvSpPr>
+        <p:spPr>
+          <a:xfrm>
+            <a:off x="5148072" y="1353312"/>
+            <a:ext cx="1399032" cy="402336"/>
+          </a:xfrm>
+          <a:prstGeom prst="rect">
+            <a:avLst/>
+          </a:prstGeom>
+          <a:noFill/>
+          <a:ln/>
+        </p:spPr>
+        <p:txBody>
+          <a:bodyPr wrap="square" lIns="0" tIns="0" rIns="0" bIns="0" rtlCol="0" anchor="ctr"/>
+          <a:lstStyle/>
+          <a:p>
+            <a:pPr indent="0" marL="0">
+              <a:buNone/>
+            </a:pPr>
+            <a:r>
+              <a:rPr lang="en-US" sz="950" b="1" dirty="0">
+                <a:solidFill>
+                  <a:srgbClr val="1E293B"/>
+                </a:solidFill>
+                <a:latin typeface="Arial" pitchFamily="34" charset="0"/>
+                <a:ea typeface="Arial" pitchFamily="34" charset="-122"/>
+                <a:cs typeface="Arial" pitchFamily="34" charset="-120"/>
+              </a:rPr>
+              <a:t>Token migration + phishing-resistant MFA</a:t>
+            </a:r>
+            <a:endParaRPr lang="en-US" sz="950" dirty="0"/>
+          </a:p>
+        </p:txBody>
+      </p:sp>
+      <p:sp>
+        <p:nvSpPr>
+          <p:cNvPr id="25" name="Text 23"/>
+          <p:cNvSpPr/>
+          <p:nvPr/>
+        </p:nvSpPr>
+        <p:spPr>
+          <a:xfrm>
+            <a:off x="5148072" y="1755648"/>
+            <a:ext cx="1399032" cy="182880"/>
+          </a:xfrm>
+          <a:prstGeom prst="rect">
+            <a:avLst/>
+          </a:prstGeom>
+          <a:noFill/>
+          <a:ln/>
+        </p:spPr>
+        <p:txBody>
+          <a:bodyPr wrap="square" lIns="0" tIns="0" rIns="0" bIns="0" rtlCol="0" anchor="ctr"/>
+          <a:lstStyle/>
+          <a:p>
+            <a:pPr indent="0" marL="0">
+              <a:buNone/>
+            </a:pPr>
+            <a:r>
+              <a:rPr lang="en-US" sz="850" b="1" dirty="0">
                 <a:solidFill>
                   <a:srgbClr val="D4860B"/>
                 </a:solidFill>
@@ -21398,22 +21392,22 @@
                 <a:ea typeface="Arial" pitchFamily="34" charset="-122"/>
                 <a:cs typeface="Arial" pitchFamily="34" charset="-120"/>
               </a:rPr>
-              <a:t>WHY NO ALTERNATIVE CLOSES THEM</a:t>
-            </a:r>
-            <a:endParaRPr lang="en-US" sz="1000" dirty="0"/>
-          </a:p>
-        </p:txBody>
-      </p:sp>
-      <p:sp>
-        <p:nvSpPr>
-          <p:cNvPr id="20" name="Text 18"/>
-          <p:cNvSpPr/>
-          <p:nvPr/>
-        </p:nvSpPr>
-        <p:spPr>
-          <a:xfrm>
-            <a:off x="5029200" y="1682496"/>
-            <a:ext cx="3520440" cy="2971800"/>
+              <a:t>Weeks 13–24</a:t>
+            </a:r>
+            <a:endParaRPr lang="en-US" sz="850" dirty="0"/>
+          </a:p>
+        </p:txBody>
+      </p:sp>
+      <p:sp>
+        <p:nvSpPr>
+          <p:cNvPr id="26" name="Text 24"/>
+          <p:cNvSpPr/>
+          <p:nvPr/>
+        </p:nvSpPr>
+        <p:spPr>
+          <a:xfrm>
+            <a:off x="4745736" y="1975104"/>
+            <a:ext cx="1773936" cy="585216"/>
           </a:xfrm>
           <a:prstGeom prst="rect">
             <a:avLst/>
@@ -21429,21 +21423,163 @@
               <a:buNone/>
             </a:pPr>
             <a:r>
-              <a:rPr lang="en-US" sz="900" b="1" dirty="0">
-                <a:solidFill>
-                  <a:srgbClr val="1F3A5F"/>
-                </a:solidFill>
-                <a:latin typeface="Arial" pitchFamily="34" charset="0"/>
-                <a:ea typeface="Arial" pitchFamily="34" charset="-122"/>
-                <a:cs typeface="Arial" pitchFamily="34" charset="-120"/>
-              </a:rPr>
-              <a:t>IA-5(2): </a:t>
-            </a:r>
-            <a:pPr indent="0" marL="0">
-              <a:buNone/>
-            </a:pPr>
-            <a:r>
-              <a:rPr lang="en-US" sz="900" dirty="0">
+              <a:rPr lang="en-US" sz="750" dirty="0">
+                <a:solidFill>
+                  <a:srgbClr val="5B6B7C"/>
+                </a:solidFill>
+                <a:latin typeface="Arial" pitchFamily="34" charset="0"/>
+                <a:ea typeface="Arial" pitchFamily="34" charset="-122"/>
+                <a:cs typeface="Arial" pitchFamily="34" charset="-120"/>
+              </a:rPr>
+              <a:t>Gate: Legacy auth blocked with measured zero business impact; privileged access impossible without a phishing-resistant assertion</a:t>
+            </a:r>
+            <a:endParaRPr lang="en-US" sz="750" dirty="0"/>
+          </a:p>
+        </p:txBody>
+      </p:sp>
+      <p:sp>
+        <p:nvSpPr>
+          <p:cNvPr id="27" name="Shape 25"/>
+          <p:cNvSpPr/>
+          <p:nvPr/>
+        </p:nvSpPr>
+        <p:spPr>
+          <a:xfrm>
+            <a:off x="6647688" y="1965960"/>
+            <a:ext cx="91440" cy="0"/>
+          </a:xfrm>
+          <a:prstGeom prst="line">
+            <a:avLst/>
+          </a:prstGeom>
+          <a:noFill/>
+          <a:ln w="25400">
+            <a:solidFill>
+              <a:srgbClr val="5B6B7C"/>
+            </a:solidFill>
+            <a:prstDash val="solid"/>
+            <a:tailEnd type="triangle"/>
+          </a:ln>
+        </p:spPr>
+      </p:sp>
+      <p:sp>
+        <p:nvSpPr>
+          <p:cNvPr id="28" name="Shape 26"/>
+          <p:cNvSpPr/>
+          <p:nvPr/>
+        </p:nvSpPr>
+        <p:spPr>
+          <a:xfrm>
+            <a:off x="6757416" y="1280160"/>
+            <a:ext cx="1993392" cy="1371600"/>
+          </a:xfrm>
+          <a:prstGeom prst="roundRect">
+            <a:avLst>
+              <a:gd name="adj" fmla="val 4667"/>
+            </a:avLst>
+          </a:prstGeom>
+          <a:solidFill>
+            <a:srgbClr val="FFFFFF"/>
+          </a:solidFill>
+          <a:ln w="9525">
+            <a:solidFill>
+              <a:srgbClr val="C9D4E0"/>
+            </a:solidFill>
+            <a:prstDash val="solid"/>
+          </a:ln>
+          <a:effectLst>
+            <a:outerShdw sx="100000" sy="100000" kx="0" ky="0" algn="bl" rotWithShape="0" blurRad="88900" dist="25400" dir="2700000">
+              <a:srgbClr val="000000">
+                <a:alpha val="14000"/>
+              </a:srgbClr>
+            </a:outerShdw>
+          </a:effectLst>
+        </p:spPr>
+      </p:sp>
+      <p:sp>
+        <p:nvSpPr>
+          <p:cNvPr id="29" name="Shape 27"/>
+          <p:cNvSpPr/>
+          <p:nvPr/>
+        </p:nvSpPr>
+        <p:spPr>
+          <a:xfrm>
+            <a:off x="6867144" y="1389888"/>
+            <a:ext cx="329184" cy="329184"/>
+          </a:xfrm>
+          <a:prstGeom prst="ellipse">
+            <a:avLst/>
+          </a:prstGeom>
+          <a:solidFill>
+            <a:srgbClr val="C0392B"/>
+          </a:solidFill>
+          <a:ln/>
+        </p:spPr>
+      </p:sp>
+      <p:sp>
+        <p:nvSpPr>
+          <p:cNvPr id="30" name="Text 28"/>
+          <p:cNvSpPr/>
+          <p:nvPr/>
+        </p:nvSpPr>
+        <p:spPr>
+          <a:xfrm>
+            <a:off x="6867144" y="1376172"/>
+            <a:ext cx="329184" cy="329184"/>
+          </a:xfrm>
+          <a:prstGeom prst="rect">
+            <a:avLst/>
+          </a:prstGeom>
+          <a:noFill/>
+          <a:ln/>
+        </p:spPr>
+        <p:txBody>
+          <a:bodyPr wrap="square" lIns="0" tIns="0" rIns="0" bIns="0" rtlCol="0" anchor="ctr"/>
+          <a:lstStyle/>
+          <a:p>
+            <a:pPr algn="ctr" indent="0" marL="0">
+              <a:buNone/>
+            </a:pPr>
+            <a:r>
+              <a:rPr lang="en-US" sz="1300" b="1" dirty="0">
+                <a:solidFill>
+                  <a:srgbClr val="FFFFFF"/>
+                </a:solidFill>
+                <a:latin typeface="Arial" pitchFamily="34" charset="0"/>
+                <a:ea typeface="Arial" pitchFamily="34" charset="-122"/>
+                <a:cs typeface="Arial" pitchFamily="34" charset="-120"/>
+              </a:rPr>
+              <a:t>4</a:t>
+            </a:r>
+            <a:endParaRPr lang="en-US" sz="1300" dirty="0"/>
+          </a:p>
+        </p:txBody>
+      </p:sp>
+      <p:sp>
+        <p:nvSpPr>
+          <p:cNvPr id="31" name="Text 29"/>
+          <p:cNvSpPr/>
+          <p:nvPr/>
+        </p:nvSpPr>
+        <p:spPr>
+          <a:xfrm>
+            <a:off x="7269480" y="1353312"/>
+            <a:ext cx="1399032" cy="402336"/>
+          </a:xfrm>
+          <a:prstGeom prst="rect">
+            <a:avLst/>
+          </a:prstGeom>
+          <a:noFill/>
+          <a:ln/>
+        </p:spPr>
+        <p:txBody>
+          <a:bodyPr wrap="square" lIns="0" tIns="0" rIns="0" bIns="0" rtlCol="0" anchor="ctr"/>
+          <a:lstStyle/>
+          <a:p>
+            <a:pPr indent="0" marL="0">
+              <a:buNone/>
+            </a:pPr>
+            <a:r>
+              <a:rPr lang="en-US" sz="950" b="1" dirty="0">
                 <a:solidFill>
                   <a:srgbClr val="1E293B"/>
                 </a:solidFill>
@@ -21451,7 +21587,151 @@
                 <a:ea typeface="Arial" pitchFamily="34" charset="-122"/>
                 <a:cs typeface="Arial" pitchFamily="34" charset="-120"/>
               </a:rPr>
-              <a:t>path validation with status checking is a per-authentication protocol act — no audit or scanner can do it for a live authentication, and the status endpoints resolve through the naming plane.</a:t>
+              <a:t>Workload identity conversion</a:t>
+            </a:r>
+            <a:endParaRPr lang="en-US" sz="950" dirty="0"/>
+          </a:p>
+        </p:txBody>
+      </p:sp>
+      <p:sp>
+        <p:nvSpPr>
+          <p:cNvPr id="32" name="Text 30"/>
+          <p:cNvSpPr/>
+          <p:nvPr/>
+        </p:nvSpPr>
+        <p:spPr>
+          <a:xfrm>
+            <a:off x="7269480" y="1755648"/>
+            <a:ext cx="1399032" cy="182880"/>
+          </a:xfrm>
+          <a:prstGeom prst="rect">
+            <a:avLst/>
+          </a:prstGeom>
+          <a:noFill/>
+          <a:ln/>
+        </p:spPr>
+        <p:txBody>
+          <a:bodyPr wrap="square" lIns="0" tIns="0" rIns="0" bIns="0" rtlCol="0" anchor="ctr"/>
+          <a:lstStyle/>
+          <a:p>
+            <a:pPr indent="0" marL="0">
+              <a:buNone/>
+            </a:pPr>
+            <a:r>
+              <a:rPr lang="en-US" sz="850" b="1" dirty="0">
+                <a:solidFill>
+                  <a:srgbClr val="C0392B"/>
+                </a:solidFill>
+                <a:latin typeface="Arial" pitchFamily="34" charset="0"/>
+                <a:ea typeface="Arial" pitchFamily="34" charset="-122"/>
+                <a:cs typeface="Arial" pitchFamily="34" charset="-120"/>
+              </a:rPr>
+              <a:t>Weeks 25–40</a:t>
+            </a:r>
+            <a:endParaRPr lang="en-US" sz="850" dirty="0"/>
+          </a:p>
+        </p:txBody>
+      </p:sp>
+      <p:sp>
+        <p:nvSpPr>
+          <p:cNvPr id="33" name="Text 31"/>
+          <p:cNvSpPr/>
+          <p:nvPr/>
+        </p:nvSpPr>
+        <p:spPr>
+          <a:xfrm>
+            <a:off x="6867144" y="1975104"/>
+            <a:ext cx="1773936" cy="585216"/>
+          </a:xfrm>
+          <a:prstGeom prst="rect">
+            <a:avLst/>
+          </a:prstGeom>
+          <a:noFill/>
+          <a:ln/>
+        </p:spPr>
+        <p:txBody>
+          <a:bodyPr wrap="square" lIns="0" tIns="0" rIns="0" bIns="0" rtlCol="0" anchor="ctr"/>
+          <a:lstStyle/>
+          <a:p>
+            <a:pPr indent="0" marL="0">
+              <a:buNone/>
+            </a:pPr>
+            <a:r>
+              <a:rPr lang="en-US" sz="750" dirty="0">
+                <a:solidFill>
+                  <a:srgbClr val="5B6B7C"/>
+                </a:solidFill>
+                <a:latin typeface="Arial" pitchFamily="34" charset="0"/>
+                <a:ea typeface="Arial" pitchFamily="34" charset="-122"/>
+                <a:cs typeface="Arial" pitchFamily="34" charset="-120"/>
+              </a:rPr>
+              <a:t>Gate: Secret inventory trends monotonically to zero; every remaining entry has a named exception with an expiry date</a:t>
+            </a:r>
+            <a:endParaRPr lang="en-US" sz="750" dirty="0"/>
+          </a:p>
+        </p:txBody>
+      </p:sp>
+      <p:sp>
+        <p:nvSpPr>
+          <p:cNvPr id="34" name="Shape 32"/>
+          <p:cNvSpPr/>
+          <p:nvPr/>
+        </p:nvSpPr>
+        <p:spPr>
+          <a:xfrm>
+            <a:off x="548640" y="2880360"/>
+            <a:ext cx="8138160" cy="868680"/>
+          </a:xfrm>
+          <a:prstGeom prst="roundRect">
+            <a:avLst>
+              <a:gd name="adj" fmla="val 7368"/>
+            </a:avLst>
+          </a:prstGeom>
+          <a:solidFill>
+            <a:srgbClr val="EDF3F9"/>
+          </a:solidFill>
+          <a:ln w="9525">
+            <a:solidFill>
+              <a:srgbClr val="C9D4E0"/>
+            </a:solidFill>
+            <a:prstDash val="solid"/>
+          </a:ln>
+        </p:spPr>
+      </p:sp>
+      <p:sp>
+        <p:nvSpPr>
+          <p:cNvPr id="35" name="Text 33"/>
+          <p:cNvSpPr/>
+          <p:nvPr/>
+        </p:nvSpPr>
+        <p:spPr>
+          <a:xfrm>
+            <a:off x="777240" y="2953512"/>
+            <a:ext cx="7680960" cy="731520"/>
+          </a:xfrm>
+          <a:prstGeom prst="rect">
+            <a:avLst/>
+          </a:prstGeom>
+          <a:noFill/>
+          <a:ln/>
+        </p:spPr>
+        <p:txBody>
+          <a:bodyPr wrap="square" lIns="0" tIns="0" rIns="0" bIns="0" rtlCol="0" anchor="ctr"/>
+          <a:lstStyle/>
+          <a:p>
+            <a:pPr indent="0" marL="0">
+              <a:buNone/>
+            </a:pPr>
+            <a:r>
+              <a:rPr lang="en-US" sz="900" b="1" spc="100" kern="0" dirty="0">
+                <a:solidFill>
+                  <a:srgbClr val="D4860B"/>
+                </a:solidFill>
+                <a:latin typeface="Arial" pitchFamily="34" charset="0"/>
+                <a:ea typeface="Arial" pitchFamily="34" charset="-122"/>
+                <a:cs typeface="Arial" pitchFamily="34" charset="-120"/>
+              </a:rPr>
+              <a:t>PHASE 3 — TOKEN MIGRATION + PHISHING-RESISTANT MFA   </a:t>
             </a:r>
             <a:endParaRPr lang="en-US" sz="900" dirty="0"/>
           </a:p>
@@ -21459,28 +21739,91 @@
             <a:pPr indent="0" marL="0">
               <a:buNone/>
             </a:pPr>
+            <a:r>
+              <a:rPr lang="en-US" sz="950" dirty="0">
+                <a:solidFill>
+                  <a:srgbClr val="1E293B"/>
+                </a:solidFill>
+                <a:latin typeface="Arial" pitchFamily="34" charset="0"/>
+                <a:ea typeface="Arial" pitchFamily="34" charset="-122"/>
+                <a:cs typeface="Arial" pitchFamily="34" charset="-120"/>
+              </a:rPr>
+              <a:t>Apps registered to the IdP; phishing-resistant authenticators enforced — privileged first (IA-2(1)), then everyone (IA-2(2)); legacy auth disabled tenant-wide per BOD 25-01</a:t>
+            </a:r>
             <a:endParaRPr lang="en-US" sz="900" dirty="0"/>
           </a:p>
-          <a:p>
-            <a:pPr indent="0" marL="0">
-              <a:buNone/>
-            </a:pPr>
-            <a:r>
-              <a:rPr lang="en-US" sz="900" b="1" dirty="0">
-                <a:solidFill>
-                  <a:srgbClr val="1F3A5F"/>
-                </a:solidFill>
-                <a:latin typeface="Arial" pitchFamily="34" charset="0"/>
-                <a:ea typeface="Arial" pitchFamily="34" charset="-122"/>
-                <a:cs typeface="Arial" pitchFamily="34" charset="-120"/>
-              </a:rPr>
-              <a:t>SC-12: </a:t>
-            </a:r>
-            <a:pPr indent="0" marL="0">
-              <a:buNone/>
-            </a:pPr>
-            <a:r>
-              <a:rPr lang="en-US" sz="900" dirty="0">
+        </p:txBody>
+      </p:sp>
+      <p:sp>
+        <p:nvSpPr>
+          <p:cNvPr id="36" name="Shape 34"/>
+          <p:cNvSpPr/>
+          <p:nvPr/>
+        </p:nvSpPr>
+        <p:spPr>
+          <a:xfrm>
+            <a:off x="548640" y="3840480"/>
+            <a:ext cx="8138160" cy="868680"/>
+          </a:xfrm>
+          <a:prstGeom prst="roundRect">
+            <a:avLst>
+              <a:gd name="adj" fmla="val 7368"/>
+            </a:avLst>
+          </a:prstGeom>
+          <a:solidFill>
+            <a:srgbClr val="E6F5F2"/>
+          </a:solidFill>
+          <a:ln w="9525">
+            <a:solidFill>
+              <a:srgbClr val="C9D4E0"/>
+            </a:solidFill>
+            <a:prstDash val="solid"/>
+          </a:ln>
+        </p:spPr>
+      </p:sp>
+      <p:sp>
+        <p:nvSpPr>
+          <p:cNvPr id="37" name="Text 35"/>
+          <p:cNvSpPr/>
+          <p:nvPr/>
+        </p:nvSpPr>
+        <p:spPr>
+          <a:xfrm>
+            <a:off x="777240" y="3913632"/>
+            <a:ext cx="7680960" cy="731520"/>
+          </a:xfrm>
+          <a:prstGeom prst="rect">
+            <a:avLst/>
+          </a:prstGeom>
+          <a:noFill/>
+          <a:ln/>
+        </p:spPr>
+        <p:txBody>
+          <a:bodyPr wrap="square" lIns="0" tIns="0" rIns="0" bIns="0" rtlCol="0" anchor="ctr"/>
+          <a:lstStyle/>
+          <a:p>
+            <a:pPr indent="0" marL="0">
+              <a:buNone/>
+            </a:pPr>
+            <a:r>
+              <a:rPr lang="en-US" sz="900" b="1" spc="100" kern="0" dirty="0">
+                <a:solidFill>
+                  <a:srgbClr val="C0392B"/>
+                </a:solidFill>
+                <a:latin typeface="Arial" pitchFamily="34" charset="0"/>
+                <a:ea typeface="Arial" pitchFamily="34" charset="-122"/>
+                <a:cs typeface="Arial" pitchFamily="34" charset="-120"/>
+              </a:rPr>
+              <a:t>PHASE 4 — WORKLOAD IDENTITY CONVERSION   </a:t>
+            </a:r>
+            <a:endParaRPr lang="en-US" sz="900" dirty="0"/>
+          </a:p>
+          <a:p>
+            <a:pPr indent="0" marL="0">
+              <a:buNone/>
+            </a:pPr>
+            <a:r>
+              <a:rPr lang="en-US" sz="950" dirty="0">
                 <a:solidFill>
                   <a:srgbClr val="1E293B"/>
                 </a:solidFill>
@@ -21488,44 +21831,7 @@
                 <a:ea typeface="Arial" pitchFamily="34" charset="-122"/>
                 <a:cs typeface="Arial" pitchFamily="34" charset="-120"/>
               </a:rPr>
-              <a:t>at machine scale — thousands of keys, lifetimes in days — the five verbs (generate, distribute, store, access, destroy) hold only when the provisioning platform executes them. No staffing level closes it manually.</a:t>
-            </a:r>
-            <a:endParaRPr lang="en-US" sz="900" dirty="0"/>
-          </a:p>
-          <a:p>
-            <a:pPr indent="0" marL="0">
-              <a:buNone/>
-            </a:pPr>
-            <a:endParaRPr lang="en-US" sz="900" dirty="0"/>
-          </a:p>
-          <a:p>
-            <a:pPr indent="0" marL="0">
-              <a:buNone/>
-            </a:pPr>
-            <a:r>
-              <a:rPr lang="en-US" sz="900" b="1" dirty="0">
-                <a:solidFill>
-                  <a:srgbClr val="1F3A5F"/>
-                </a:solidFill>
-                <a:latin typeface="Arial" pitchFamily="34" charset="0"/>
-                <a:ea typeface="Arial" pitchFamily="34" charset="-122"/>
-                <a:cs typeface="Arial" pitchFamily="34" charset="-120"/>
-              </a:rPr>
-              <a:t>IA-2(1)/(2): </a:t>
-            </a:r>
-            <a:pPr indent="0" marL="0">
-              <a:buNone/>
-            </a:pPr>
-            <a:r>
-              <a:rPr lang="en-US" sz="900" dirty="0">
-                <a:solidFill>
-                  <a:srgbClr val="1E293B"/>
-                </a:solidFill>
-                <a:latin typeface="Arial" pitchFamily="34" charset="0"/>
-                <a:ea typeface="Arial" pitchFamily="34" charset="-122"/>
-                <a:cs typeface="Arial" pitchFamily="34" charset="-120"/>
-              </a:rPr>
-              <a:t>phishing resistance is a cryptographic property. No training program makes a relayable secret non-relayable; only a credential with nothing to relay does.</a:t>
+              <a:t>Inventory every stored secret; convert platform workloads to managed identities; federate cross-platform; expire the vacated secrets rather than abandoning them</a:t>
             </a:r>
             <a:endParaRPr lang="en-US" sz="900" dirty="0"/>
           </a:p>
@@ -21596,7 +21902,7 @@
                 <a:ea typeface="Arial" pitchFamily="34" charset="-122"/>
                 <a:cs typeface="Arial" pitchFamily="34" charset="-120"/>
               </a:rPr>
-              <a:t>WHERE THIS LEAVES US</a:t>
+              <a:t>COMPLIANCE OUTCOME</a:t>
             </a:r>
             <a:endParaRPr lang="en-US" sz="1100" dirty="0"/>
           </a:p>
@@ -21635,7 +21941,7 @@
                 <a:ea typeface="Arial" pitchFamily="34" charset="-122"/>
                 <a:cs typeface="Arial" pitchFamily="34" charset="-120"/>
               </a:rPr>
-              <a:t>The foundation trilogy is complete</a:t>
+              <a:t>Five Moderate-baseline controls with no alternate closure path</a:t>
             </a:r>
             <a:endParaRPr lang="en-US" sz="2600" dirty="0"/>
           </a:p>
@@ -21674,7 +21980,7 @@
                 <a:ea typeface="Arial" pitchFamily="34" charset="-122"/>
                 <a:cs typeface="Arial" pitchFamily="34" charset="-120"/>
               </a:rPr>
-              <a:t>Federal AAN — Book 03 Certificates &amp; Tokens · CSI Team Draft — Internal · FedRAMP Moderate · Date Code 2026-07-07 10:32 ET</a:t>
+              <a:t>Federal AAN — Book 03 Certificates &amp; Tokens · CSI Team Draft — Internal · FedRAMP Moderate · Date Code 2026-07-07 11:57 ET</a:t>
             </a:r>
             <a:endParaRPr lang="en-US" sz="800" dirty="0"/>
           </a:p>
@@ -21714,6 +22020,789 @@
                 <a:cs typeface="Arial" pitchFamily="34" charset="-120"/>
               </a:rPr>
               <a:t>26</a:t>
+            </a:r>
+            <a:endParaRPr lang="en-US" sz="800" dirty="0"/>
+          </a:p>
+        </p:txBody>
+      </p:sp>
+      <p:sp>
+        <p:nvSpPr>
+          <p:cNvPr id="6" name="Shape 4"/>
+          <p:cNvSpPr/>
+          <p:nvPr/>
+        </p:nvSpPr>
+        <p:spPr>
+          <a:xfrm>
+            <a:off x="502920" y="1207008"/>
+            <a:ext cx="4114800" cy="3566160"/>
+          </a:xfrm>
+          <a:prstGeom prst="roundRect">
+            <a:avLst>
+              <a:gd name="adj" fmla="val 1795"/>
+            </a:avLst>
+          </a:prstGeom>
+          <a:solidFill>
+            <a:srgbClr val="FFFFFF"/>
+          </a:solidFill>
+          <a:ln w="9525">
+            <a:solidFill>
+              <a:srgbClr val="C9D4E0"/>
+            </a:solidFill>
+            <a:prstDash val="solid"/>
+          </a:ln>
+          <a:effectLst>
+            <a:outerShdw sx="100000" sy="100000" kx="0" ky="0" algn="bl" rotWithShape="0" blurRad="88900" dist="25400" dir="2700000">
+              <a:srgbClr val="000000">
+                <a:alpha val="14000"/>
+              </a:srgbClr>
+            </a:outerShdw>
+          </a:effectLst>
+        </p:spPr>
+      </p:sp>
+      <p:sp>
+        <p:nvSpPr>
+          <p:cNvPr id="7" name="Text 5"/>
+          <p:cNvSpPr/>
+          <p:nvPr/>
+        </p:nvSpPr>
+        <p:spPr>
+          <a:xfrm>
+            <a:off x="731520" y="1371600"/>
+            <a:ext cx="3657600" cy="1051560"/>
+          </a:xfrm>
+          <a:prstGeom prst="rect">
+            <a:avLst/>
+          </a:prstGeom>
+          <a:noFill/>
+          <a:ln/>
+        </p:spPr>
+        <p:txBody>
+          <a:bodyPr wrap="square" lIns="0" tIns="0" rIns="0" bIns="0" rtlCol="0" anchor="ctr"/>
+          <a:lstStyle/>
+          <a:p>
+            <a:pPr indent="0" marL="0">
+              <a:buNone/>
+            </a:pPr>
+            <a:r>
+              <a:rPr lang="en-US" sz="4000" b="1" dirty="0">
+                <a:solidFill>
+                  <a:srgbClr val="1F3A5F"/>
+                </a:solidFill>
+                <a:latin typeface="Arial" pitchFamily="34" charset="0"/>
+                <a:ea typeface="Arial" pitchFamily="34" charset="-122"/>
+                <a:cs typeface="Arial" pitchFamily="34" charset="-120"/>
+              </a:rPr>
+              <a:t>5</a:t>
+            </a:r>
+            <a:endParaRPr lang="en-US" sz="4000" dirty="0"/>
+          </a:p>
+          <a:p>
+            <a:pPr indent="0" marL="0">
+              <a:buNone/>
+            </a:pPr>
+            <a:r>
+              <a:rPr lang="en-US" sz="1100" dirty="0">
+                <a:solidFill>
+                  <a:srgbClr val="1E293B"/>
+                </a:solidFill>
+                <a:latin typeface="Arial" pitchFamily="34" charset="0"/>
+                <a:ea typeface="Arial" pitchFamily="34" charset="-122"/>
+                <a:cs typeface="Arial" pitchFamily="34" charset="-120"/>
+              </a:rPr>
+              <a:t>NIST SP 800-53 Rev 5 controls (FedRAMP Moderate baseline) closed — each with a named mechanism that admits no alternative</a:t>
+            </a:r>
+            <a:endParaRPr lang="en-US" sz="4000" dirty="0"/>
+          </a:p>
+        </p:txBody>
+      </p:sp>
+      <p:sp>
+        <p:nvSpPr>
+          <p:cNvPr id="8" name="Shape 6"/>
+          <p:cNvSpPr/>
+          <p:nvPr/>
+        </p:nvSpPr>
+        <p:spPr>
+          <a:xfrm>
+            <a:off x="731520" y="2514600"/>
+            <a:ext cx="3657600" cy="347472"/>
+          </a:xfrm>
+          <a:prstGeom prst="roundRect">
+            <a:avLst>
+              <a:gd name="adj" fmla="val 15789"/>
+            </a:avLst>
+          </a:prstGeom>
+          <a:solidFill>
+            <a:srgbClr val="EDF3F9"/>
+          </a:solidFill>
+          <a:ln/>
+        </p:spPr>
+      </p:sp>
+      <p:sp>
+        <p:nvSpPr>
+          <p:cNvPr id="9" name="Text 7"/>
+          <p:cNvSpPr/>
+          <p:nvPr/>
+        </p:nvSpPr>
+        <p:spPr>
+          <a:xfrm>
+            <a:off x="841248" y="2514600"/>
+            <a:ext cx="3474720" cy="347472"/>
+          </a:xfrm>
+          <a:prstGeom prst="rect">
+            <a:avLst/>
+          </a:prstGeom>
+          <a:noFill/>
+          <a:ln/>
+        </p:spPr>
+        <p:txBody>
+          <a:bodyPr wrap="square" lIns="0" tIns="0" rIns="0" bIns="0" rtlCol="0" anchor="ctr"/>
+          <a:lstStyle/>
+          <a:p>
+            <a:pPr indent="0" marL="0">
+              <a:buNone/>
+            </a:pPr>
+            <a:r>
+              <a:rPr lang="en-US" sz="950" b="1" dirty="0">
+                <a:solidFill>
+                  <a:srgbClr val="1F3A5F"/>
+                </a:solidFill>
+                <a:latin typeface="Arial" pitchFamily="34" charset="0"/>
+                <a:ea typeface="Arial" pitchFamily="34" charset="-122"/>
+                <a:cs typeface="Arial" pitchFamily="34" charset="-120"/>
+              </a:rPr>
+              <a:t>IA-5(2) PKI-based authentication</a:t>
+            </a:r>
+            <a:endParaRPr lang="en-US" sz="950" dirty="0"/>
+          </a:p>
+        </p:txBody>
+      </p:sp>
+      <p:sp>
+        <p:nvSpPr>
+          <p:cNvPr id="10" name="Shape 8"/>
+          <p:cNvSpPr/>
+          <p:nvPr/>
+        </p:nvSpPr>
+        <p:spPr>
+          <a:xfrm>
+            <a:off x="731520" y="2935224"/>
+            <a:ext cx="3657600" cy="347472"/>
+          </a:xfrm>
+          <a:prstGeom prst="roundRect">
+            <a:avLst>
+              <a:gd name="adj" fmla="val 15789"/>
+            </a:avLst>
+          </a:prstGeom>
+          <a:solidFill>
+            <a:srgbClr val="EDF3F9"/>
+          </a:solidFill>
+          <a:ln/>
+        </p:spPr>
+      </p:sp>
+      <p:sp>
+        <p:nvSpPr>
+          <p:cNvPr id="11" name="Text 9"/>
+          <p:cNvSpPr/>
+          <p:nvPr/>
+        </p:nvSpPr>
+        <p:spPr>
+          <a:xfrm>
+            <a:off x="841248" y="2935224"/>
+            <a:ext cx="3474720" cy="347472"/>
+          </a:xfrm>
+          <a:prstGeom prst="rect">
+            <a:avLst/>
+          </a:prstGeom>
+          <a:noFill/>
+          <a:ln/>
+        </p:spPr>
+        <p:txBody>
+          <a:bodyPr wrap="square" lIns="0" tIns="0" rIns="0" bIns="0" rtlCol="0" anchor="ctr"/>
+          <a:lstStyle/>
+          <a:p>
+            <a:pPr indent="0" marL="0">
+              <a:buNone/>
+            </a:pPr>
+            <a:r>
+              <a:rPr lang="en-US" sz="950" b="1" dirty="0">
+                <a:solidFill>
+                  <a:srgbClr val="1F3A5F"/>
+                </a:solidFill>
+                <a:latin typeface="Arial" pitchFamily="34" charset="0"/>
+                <a:ea typeface="Arial" pitchFamily="34" charset="-122"/>
+                <a:cs typeface="Arial" pitchFamily="34" charset="-120"/>
+              </a:rPr>
+              <a:t>SC-12 key establishment + mgmt</a:t>
+            </a:r>
+            <a:endParaRPr lang="en-US" sz="950" dirty="0"/>
+          </a:p>
+        </p:txBody>
+      </p:sp>
+      <p:sp>
+        <p:nvSpPr>
+          <p:cNvPr id="12" name="Shape 10"/>
+          <p:cNvSpPr/>
+          <p:nvPr/>
+        </p:nvSpPr>
+        <p:spPr>
+          <a:xfrm>
+            <a:off x="731520" y="3355848"/>
+            <a:ext cx="3657600" cy="347472"/>
+          </a:xfrm>
+          <a:prstGeom prst="roundRect">
+            <a:avLst>
+              <a:gd name="adj" fmla="val 15789"/>
+            </a:avLst>
+          </a:prstGeom>
+          <a:solidFill>
+            <a:srgbClr val="EDF3F9"/>
+          </a:solidFill>
+          <a:ln/>
+        </p:spPr>
+      </p:sp>
+      <p:sp>
+        <p:nvSpPr>
+          <p:cNvPr id="13" name="Text 11"/>
+          <p:cNvSpPr/>
+          <p:nvPr/>
+        </p:nvSpPr>
+        <p:spPr>
+          <a:xfrm>
+            <a:off x="841248" y="3355848"/>
+            <a:ext cx="3474720" cy="347472"/>
+          </a:xfrm>
+          <a:prstGeom prst="rect">
+            <a:avLst/>
+          </a:prstGeom>
+          <a:noFill/>
+          <a:ln/>
+        </p:spPr>
+        <p:txBody>
+          <a:bodyPr wrap="square" lIns="0" tIns="0" rIns="0" bIns="0" rtlCol="0" anchor="ctr"/>
+          <a:lstStyle/>
+          <a:p>
+            <a:pPr indent="0" marL="0">
+              <a:buNone/>
+            </a:pPr>
+            <a:r>
+              <a:rPr lang="en-US" sz="950" b="1" dirty="0">
+                <a:solidFill>
+                  <a:srgbClr val="1F3A5F"/>
+                </a:solidFill>
+                <a:latin typeface="Arial" pitchFamily="34" charset="0"/>
+                <a:ea typeface="Arial" pitchFamily="34" charset="-122"/>
+                <a:cs typeface="Arial" pitchFamily="34" charset="-120"/>
+              </a:rPr>
+              <a:t>SC-17 PKI certificates under policy</a:t>
+            </a:r>
+            <a:endParaRPr lang="en-US" sz="950" dirty="0"/>
+          </a:p>
+        </p:txBody>
+      </p:sp>
+      <p:sp>
+        <p:nvSpPr>
+          <p:cNvPr id="14" name="Shape 12"/>
+          <p:cNvSpPr/>
+          <p:nvPr/>
+        </p:nvSpPr>
+        <p:spPr>
+          <a:xfrm>
+            <a:off x="731520" y="3776472"/>
+            <a:ext cx="3657600" cy="347472"/>
+          </a:xfrm>
+          <a:prstGeom prst="roundRect">
+            <a:avLst>
+              <a:gd name="adj" fmla="val 15789"/>
+            </a:avLst>
+          </a:prstGeom>
+          <a:solidFill>
+            <a:srgbClr val="EDF3F9"/>
+          </a:solidFill>
+          <a:ln/>
+        </p:spPr>
+      </p:sp>
+      <p:sp>
+        <p:nvSpPr>
+          <p:cNvPr id="15" name="Text 13"/>
+          <p:cNvSpPr/>
+          <p:nvPr/>
+        </p:nvSpPr>
+        <p:spPr>
+          <a:xfrm>
+            <a:off x="841248" y="3776472"/>
+            <a:ext cx="3474720" cy="347472"/>
+          </a:xfrm>
+          <a:prstGeom prst="rect">
+            <a:avLst/>
+          </a:prstGeom>
+          <a:noFill/>
+          <a:ln/>
+        </p:spPr>
+        <p:txBody>
+          <a:bodyPr wrap="square" lIns="0" tIns="0" rIns="0" bIns="0" rtlCol="0" anchor="ctr"/>
+          <a:lstStyle/>
+          <a:p>
+            <a:pPr indent="0" marL="0">
+              <a:buNone/>
+            </a:pPr>
+            <a:r>
+              <a:rPr lang="en-US" sz="950" b="1" dirty="0">
+                <a:solidFill>
+                  <a:srgbClr val="1F3A5F"/>
+                </a:solidFill>
+                <a:latin typeface="Arial" pitchFamily="34" charset="0"/>
+                <a:ea typeface="Arial" pitchFamily="34" charset="-122"/>
+                <a:cs typeface="Arial" pitchFamily="34" charset="-120"/>
+              </a:rPr>
+              <a:t>IA-2(1) MFA — privileged accounts</a:t>
+            </a:r>
+            <a:endParaRPr lang="en-US" sz="950" dirty="0"/>
+          </a:p>
+        </p:txBody>
+      </p:sp>
+      <p:sp>
+        <p:nvSpPr>
+          <p:cNvPr id="16" name="Shape 14"/>
+          <p:cNvSpPr/>
+          <p:nvPr/>
+        </p:nvSpPr>
+        <p:spPr>
+          <a:xfrm>
+            <a:off x="731520" y="4197096"/>
+            <a:ext cx="3657600" cy="347472"/>
+          </a:xfrm>
+          <a:prstGeom prst="roundRect">
+            <a:avLst>
+              <a:gd name="adj" fmla="val 15789"/>
+            </a:avLst>
+          </a:prstGeom>
+          <a:solidFill>
+            <a:srgbClr val="EDF3F9"/>
+          </a:solidFill>
+          <a:ln/>
+        </p:spPr>
+      </p:sp>
+      <p:sp>
+        <p:nvSpPr>
+          <p:cNvPr id="17" name="Text 15"/>
+          <p:cNvSpPr/>
+          <p:nvPr/>
+        </p:nvSpPr>
+        <p:spPr>
+          <a:xfrm>
+            <a:off x="841248" y="4197096"/>
+            <a:ext cx="3474720" cy="347472"/>
+          </a:xfrm>
+          <a:prstGeom prst="rect">
+            <a:avLst/>
+          </a:prstGeom>
+          <a:noFill/>
+          <a:ln/>
+        </p:spPr>
+        <p:txBody>
+          <a:bodyPr wrap="square" lIns="0" tIns="0" rIns="0" bIns="0" rtlCol="0" anchor="ctr"/>
+          <a:lstStyle/>
+          <a:p>
+            <a:pPr indent="0" marL="0">
+              <a:buNone/>
+            </a:pPr>
+            <a:r>
+              <a:rPr lang="en-US" sz="950" b="1" dirty="0">
+                <a:solidFill>
+                  <a:srgbClr val="1F3A5F"/>
+                </a:solidFill>
+                <a:latin typeface="Arial" pitchFamily="34" charset="0"/>
+                <a:ea typeface="Arial" pitchFamily="34" charset="-122"/>
+                <a:cs typeface="Arial" pitchFamily="34" charset="-120"/>
+              </a:rPr>
+              <a:t>IA-2(2) MFA — non-privileged</a:t>
+            </a:r>
+            <a:endParaRPr lang="en-US" sz="950" dirty="0"/>
+          </a:p>
+        </p:txBody>
+      </p:sp>
+      <p:sp>
+        <p:nvSpPr>
+          <p:cNvPr id="18" name="Shape 16"/>
+          <p:cNvSpPr/>
+          <p:nvPr/>
+        </p:nvSpPr>
+        <p:spPr>
+          <a:xfrm>
+            <a:off x="4800600" y="1207008"/>
+            <a:ext cx="3931920" cy="3566160"/>
+          </a:xfrm>
+          <a:prstGeom prst="roundRect">
+            <a:avLst>
+              <a:gd name="adj" fmla="val 1795"/>
+            </a:avLst>
+          </a:prstGeom>
+          <a:solidFill>
+            <a:srgbClr val="FFFFFF"/>
+          </a:solidFill>
+          <a:ln w="9525">
+            <a:solidFill>
+              <a:srgbClr val="C9D4E0"/>
+            </a:solidFill>
+            <a:prstDash val="solid"/>
+          </a:ln>
+          <a:effectLst>
+            <a:outerShdw sx="100000" sy="100000" kx="0" ky="0" algn="bl" rotWithShape="0" blurRad="88900" dist="25400" dir="2700000">
+              <a:srgbClr val="000000">
+                <a:alpha val="14000"/>
+              </a:srgbClr>
+            </a:outerShdw>
+          </a:effectLst>
+        </p:spPr>
+      </p:sp>
+      <p:sp>
+        <p:nvSpPr>
+          <p:cNvPr id="19" name="Text 17"/>
+          <p:cNvSpPr/>
+          <p:nvPr/>
+        </p:nvSpPr>
+        <p:spPr>
+          <a:xfrm>
+            <a:off x="5029200" y="1353312"/>
+            <a:ext cx="3566160" cy="256032"/>
+          </a:xfrm>
+          <a:prstGeom prst="rect">
+            <a:avLst/>
+          </a:prstGeom>
+          <a:noFill/>
+          <a:ln/>
+        </p:spPr>
+        <p:txBody>
+          <a:bodyPr wrap="square" lIns="0" tIns="0" rIns="0" bIns="0" rtlCol="0" anchor="ctr"/>
+          <a:lstStyle/>
+          <a:p>
+            <a:pPr indent="0" marL="0">
+              <a:buNone/>
+            </a:pPr>
+            <a:r>
+              <a:rPr lang="en-US" sz="1000" b="1" spc="150" kern="0" dirty="0">
+                <a:solidFill>
+                  <a:srgbClr val="D4860B"/>
+                </a:solidFill>
+                <a:latin typeface="Arial" pitchFamily="34" charset="0"/>
+                <a:ea typeface="Arial" pitchFamily="34" charset="-122"/>
+                <a:cs typeface="Arial" pitchFamily="34" charset="-120"/>
+              </a:rPr>
+              <a:t>WHY NO ALTERNATIVE CLOSES THEM</a:t>
+            </a:r>
+            <a:endParaRPr lang="en-US" sz="1000" dirty="0"/>
+          </a:p>
+        </p:txBody>
+      </p:sp>
+      <p:sp>
+        <p:nvSpPr>
+          <p:cNvPr id="20" name="Text 18"/>
+          <p:cNvSpPr/>
+          <p:nvPr/>
+        </p:nvSpPr>
+        <p:spPr>
+          <a:xfrm>
+            <a:off x="5029200" y="1682496"/>
+            <a:ext cx="3520440" cy="2971800"/>
+          </a:xfrm>
+          <a:prstGeom prst="rect">
+            <a:avLst/>
+          </a:prstGeom>
+          <a:noFill/>
+          <a:ln/>
+        </p:spPr>
+        <p:txBody>
+          <a:bodyPr wrap="square" lIns="0" tIns="0" rIns="0" bIns="0" rtlCol="0" anchor="ctr"/>
+          <a:lstStyle/>
+          <a:p>
+            <a:pPr indent="0" marL="0">
+              <a:buNone/>
+            </a:pPr>
+            <a:r>
+              <a:rPr lang="en-US" sz="900" b="1" dirty="0">
+                <a:solidFill>
+                  <a:srgbClr val="1F3A5F"/>
+                </a:solidFill>
+                <a:latin typeface="Arial" pitchFamily="34" charset="0"/>
+                <a:ea typeface="Arial" pitchFamily="34" charset="-122"/>
+                <a:cs typeface="Arial" pitchFamily="34" charset="-120"/>
+              </a:rPr>
+              <a:t>IA-5(2): </a:t>
+            </a:r>
+            <a:pPr indent="0" marL="0">
+              <a:buNone/>
+            </a:pPr>
+            <a:r>
+              <a:rPr lang="en-US" sz="900" dirty="0">
+                <a:solidFill>
+                  <a:srgbClr val="1E293B"/>
+                </a:solidFill>
+                <a:latin typeface="Arial" pitchFamily="34" charset="0"/>
+                <a:ea typeface="Arial" pitchFamily="34" charset="-122"/>
+                <a:cs typeface="Arial" pitchFamily="34" charset="-120"/>
+              </a:rPr>
+              <a:t>path validation with status checking is a per-authentication protocol act — no audit or scanner can do it for a live authentication, and the status endpoints resolve through the naming plane.</a:t>
+            </a:r>
+            <a:endParaRPr lang="en-US" sz="900" dirty="0"/>
+          </a:p>
+          <a:p>
+            <a:pPr indent="0" marL="0">
+              <a:buNone/>
+            </a:pPr>
+            <a:endParaRPr lang="en-US" sz="900" dirty="0"/>
+          </a:p>
+          <a:p>
+            <a:pPr indent="0" marL="0">
+              <a:buNone/>
+            </a:pPr>
+            <a:r>
+              <a:rPr lang="en-US" sz="900" b="1" dirty="0">
+                <a:solidFill>
+                  <a:srgbClr val="1F3A5F"/>
+                </a:solidFill>
+                <a:latin typeface="Arial" pitchFamily="34" charset="0"/>
+                <a:ea typeface="Arial" pitchFamily="34" charset="-122"/>
+                <a:cs typeface="Arial" pitchFamily="34" charset="-120"/>
+              </a:rPr>
+              <a:t>SC-12: </a:t>
+            </a:r>
+            <a:pPr indent="0" marL="0">
+              <a:buNone/>
+            </a:pPr>
+            <a:r>
+              <a:rPr lang="en-US" sz="900" dirty="0">
+                <a:solidFill>
+                  <a:srgbClr val="1E293B"/>
+                </a:solidFill>
+                <a:latin typeface="Arial" pitchFamily="34" charset="0"/>
+                <a:ea typeface="Arial" pitchFamily="34" charset="-122"/>
+                <a:cs typeface="Arial" pitchFamily="34" charset="-120"/>
+              </a:rPr>
+              <a:t>at machine scale — thousands of keys, lifetimes in days — the five verbs (generate, distribute, store, access, destroy) hold only when the provisioning platform executes them. No staffing level closes it manually.</a:t>
+            </a:r>
+            <a:endParaRPr lang="en-US" sz="900" dirty="0"/>
+          </a:p>
+          <a:p>
+            <a:pPr indent="0" marL="0">
+              <a:buNone/>
+            </a:pPr>
+            <a:endParaRPr lang="en-US" sz="900" dirty="0"/>
+          </a:p>
+          <a:p>
+            <a:pPr indent="0" marL="0">
+              <a:buNone/>
+            </a:pPr>
+            <a:r>
+              <a:rPr lang="en-US" sz="900" b="1" dirty="0">
+                <a:solidFill>
+                  <a:srgbClr val="1F3A5F"/>
+                </a:solidFill>
+                <a:latin typeface="Arial" pitchFamily="34" charset="0"/>
+                <a:ea typeface="Arial" pitchFamily="34" charset="-122"/>
+                <a:cs typeface="Arial" pitchFamily="34" charset="-120"/>
+              </a:rPr>
+              <a:t>IA-2(1)/(2): </a:t>
+            </a:r>
+            <a:pPr indent="0" marL="0">
+              <a:buNone/>
+            </a:pPr>
+            <a:r>
+              <a:rPr lang="en-US" sz="900" dirty="0">
+                <a:solidFill>
+                  <a:srgbClr val="1E293B"/>
+                </a:solidFill>
+                <a:latin typeface="Arial" pitchFamily="34" charset="0"/>
+                <a:ea typeface="Arial" pitchFamily="34" charset="-122"/>
+                <a:cs typeface="Arial" pitchFamily="34" charset="-120"/>
+              </a:rPr>
+              <a:t>phishing resistance is a cryptographic property. No training program makes a relayable secret non-relayable; only a credential with nothing to relay does.</a:t>
+            </a:r>
+            <a:endParaRPr lang="en-US" sz="900" dirty="0"/>
+          </a:p>
+        </p:txBody>
+      </p:sp>
+    </p:spTree>
+  </p:cSld>
+  <p:clrMapOvr>
+    <a:masterClrMapping/>
+  </p:clrMapOvr>
+</p:sld>
+</file>
+
+<file path=ppt/slides/slide27.xml><?xml version="1.0" encoding="utf-8"?>
+<p:sld xmlns:a="http://schemas.openxmlformats.org/drawingml/2006/main" xmlns:r="http://schemas.openxmlformats.org/officeDocument/2006/relationships" xmlns:p="http://schemas.openxmlformats.org/presentationml/2006/main">
+  <p:cSld name="Slide 27">
+    <p:bg>
+      <p:bgPr>
+        <a:solidFill>
+          <a:srgbClr val="FFFFFF"/>
+        </a:solidFill>
+      </p:bgPr>
+    </p:bg>
+    <p:spTree>
+      <p:nvGrpSpPr>
+        <p:cNvPr id="1" name=""/>
+        <p:cNvGrpSpPr/>
+        <p:nvPr/>
+      </p:nvGrpSpPr>
+      <p:grpSpPr>
+        <a:xfrm>
+          <a:off x="0" y="0"/>
+          <a:ext cx="0" cy="0"/>
+          <a:chOff x="0" y="0"/>
+          <a:chExt cx="0" cy="0"/>
+        </a:xfrm>
+      </p:grpSpPr>
+      <p:sp>
+        <p:nvSpPr>
+          <p:cNvPr id="2" name="Text 0"/>
+          <p:cNvSpPr/>
+          <p:nvPr/>
+        </p:nvSpPr>
+        <p:spPr>
+          <a:xfrm>
+            <a:off x="502920" y="256032"/>
+            <a:ext cx="8229600" cy="274320"/>
+          </a:xfrm>
+          <a:prstGeom prst="rect">
+            <a:avLst/>
+          </a:prstGeom>
+          <a:noFill/>
+          <a:ln/>
+        </p:spPr>
+        <p:txBody>
+          <a:bodyPr wrap="square" lIns="0" tIns="0" rIns="0" bIns="0" rtlCol="0" anchor="ctr"/>
+          <a:lstStyle/>
+          <a:p>
+            <a:pPr indent="0" marL="0">
+              <a:buNone/>
+            </a:pPr>
+            <a:r>
+              <a:rPr lang="en-US" sz="1100" b="1" spc="200" kern="0" dirty="0">
+                <a:solidFill>
+                  <a:srgbClr val="1A9E8F"/>
+                </a:solidFill>
+                <a:latin typeface="Arial" pitchFamily="34" charset="0"/>
+                <a:ea typeface="Arial" pitchFamily="34" charset="-122"/>
+                <a:cs typeface="Arial" pitchFamily="34" charset="-120"/>
+              </a:rPr>
+              <a:t>WHERE THIS LEAVES US</a:t>
+            </a:r>
+            <a:endParaRPr lang="en-US" sz="1100" dirty="0"/>
+          </a:p>
+        </p:txBody>
+      </p:sp>
+      <p:sp>
+        <p:nvSpPr>
+          <p:cNvPr id="3" name="Text 1"/>
+          <p:cNvSpPr/>
+          <p:nvPr/>
+        </p:nvSpPr>
+        <p:spPr>
+          <a:xfrm>
+            <a:off x="502920" y="512064"/>
+            <a:ext cx="8138160" cy="566928"/>
+          </a:xfrm>
+          <a:prstGeom prst="rect">
+            <a:avLst/>
+          </a:prstGeom>
+          <a:noFill/>
+          <a:ln/>
+        </p:spPr>
+        <p:txBody>
+          <a:bodyPr wrap="square" lIns="0" tIns="0" rIns="0" bIns="0" rtlCol="0" anchor="ctr"/>
+          <a:lstStyle/>
+          <a:p>
+            <a:pPr indent="0" marL="0">
+              <a:buNone/>
+            </a:pPr>
+            <a:r>
+              <a:rPr lang="en-US" sz="2600" b="1" dirty="0">
+                <a:solidFill>
+                  <a:srgbClr val="1F3A5F"/>
+                </a:solidFill>
+                <a:latin typeface="Arial" pitchFamily="34" charset="0"/>
+                <a:ea typeface="Arial" pitchFamily="34" charset="-122"/>
+                <a:cs typeface="Arial" pitchFamily="34" charset="-120"/>
+              </a:rPr>
+              <a:t>The foundation trilogy is complete</a:t>
+            </a:r>
+            <a:endParaRPr lang="en-US" sz="2600" dirty="0"/>
+          </a:p>
+        </p:txBody>
+      </p:sp>
+      <p:sp>
+        <p:nvSpPr>
+          <p:cNvPr id="4" name="Text 2"/>
+          <p:cNvSpPr/>
+          <p:nvPr/>
+        </p:nvSpPr>
+        <p:spPr>
+          <a:xfrm>
+            <a:off x="502920" y="4864608"/>
+            <a:ext cx="7315200" cy="219456"/>
+          </a:xfrm>
+          <a:prstGeom prst="rect">
+            <a:avLst/>
+          </a:prstGeom>
+          <a:noFill/>
+          <a:ln/>
+        </p:spPr>
+        <p:txBody>
+          <a:bodyPr wrap="square" lIns="0" tIns="0" rIns="0" bIns="0" rtlCol="0" anchor="ctr"/>
+          <a:lstStyle/>
+          <a:p>
+            <a:pPr indent="0" marL="0">
+              <a:buNone/>
+            </a:pPr>
+            <a:r>
+              <a:rPr lang="en-US" sz="800" dirty="0">
+                <a:solidFill>
+                  <a:srgbClr val="5B6B7C"/>
+                </a:solidFill>
+                <a:latin typeface="Arial" pitchFamily="34" charset="0"/>
+                <a:ea typeface="Arial" pitchFamily="34" charset="-122"/>
+                <a:cs typeface="Arial" pitchFamily="34" charset="-120"/>
+              </a:rPr>
+              <a:t>Federal AAN — Book 03 Certificates &amp; Tokens · CSI Team Draft — Internal · FedRAMP Moderate · Date Code 2026-07-07 11:57 ET</a:t>
+            </a:r>
+            <a:endParaRPr lang="en-US" sz="800" dirty="0"/>
+          </a:p>
+        </p:txBody>
+      </p:sp>
+      <p:sp>
+        <p:nvSpPr>
+          <p:cNvPr id="5" name="Text 3"/>
+          <p:cNvSpPr/>
+          <p:nvPr/>
+        </p:nvSpPr>
+        <p:spPr>
+          <a:xfrm>
+            <a:off x="8412480" y="4864608"/>
+            <a:ext cx="320040" cy="219456"/>
+          </a:xfrm>
+          <a:prstGeom prst="rect">
+            <a:avLst/>
+          </a:prstGeom>
+          <a:noFill/>
+          <a:ln/>
+        </p:spPr>
+        <p:txBody>
+          <a:bodyPr wrap="square" lIns="0" tIns="0" rIns="0" bIns="0" rtlCol="0" anchor="ctr"/>
+          <a:lstStyle/>
+          <a:p>
+            <a:pPr algn="r" indent="0" marL="0">
+              <a:buNone/>
+            </a:pPr>
+            <a:r>
+              <a:rPr lang="en-US" sz="800" dirty="0">
+                <a:solidFill>
+                  <a:srgbClr val="5B6B7C"/>
+                </a:solidFill>
+                <a:latin typeface="Arial" pitchFamily="34" charset="0"/>
+                <a:ea typeface="Arial" pitchFamily="34" charset="-122"/>
+                <a:cs typeface="Arial" pitchFamily="34" charset="-120"/>
+              </a:rPr>
+              <a:t>27</a:t>
             </a:r>
             <a:endParaRPr lang="en-US" sz="800" dirty="0"/>
           </a:p>
@@ -22249,7 +23338,7 @@
                 <a:ea typeface="Arial" pitchFamily="34" charset="-122"/>
                 <a:cs typeface="Arial" pitchFamily="34" charset="-120"/>
               </a:rPr>
-              <a:t>Federal AAN — Book 03 Certificates &amp; Tokens · CSI Team Draft — Internal · FedRAMP Moderate · Date Code 2026-07-07 10:32 ET</a:t>
+              <a:t>Federal AAN — Book 03 Certificates &amp; Tokens · CSI Team Draft — Internal · FedRAMP Moderate · Date Code 2026-07-07 11:57 ET</a:t>
             </a:r>
             <a:endParaRPr lang="en-US" sz="800" dirty="0"/>
           </a:p>
@@ -23019,7 +24108,7 @@
                 <a:ea typeface="Arial" pitchFamily="34" charset="-122"/>
                 <a:cs typeface="Arial" pitchFamily="34" charset="-120"/>
               </a:rPr>
-              <a:t>Federal AAN — Book 03 Certificates &amp; Tokens · CSI Team Draft — Internal · FedRAMP Moderate · Date Code 2026-07-07 10:32 ET</a:t>
+              <a:t>Federal AAN — Book 03 Certificates &amp; Tokens · CSI Team Draft — Internal · FedRAMP Moderate · Date Code 2026-07-07 11:57 ET</a:t>
             </a:r>
             <a:endParaRPr lang="en-US" sz="800" dirty="0"/>
           </a:p>
@@ -23789,7 +24878,7 @@
                 <a:ea typeface="Arial" pitchFamily="34" charset="-122"/>
                 <a:cs typeface="Arial" pitchFamily="34" charset="-120"/>
               </a:rPr>
-              <a:t>Federal AAN — Book 03 Certificates &amp; Tokens · CSI Team Draft — Internal · FedRAMP Moderate · Date Code 2026-07-07 10:32 ET</a:t>
+              <a:t>Federal AAN — Book 03 Certificates &amp; Tokens · CSI Team Draft — Internal · FedRAMP Moderate · Date Code 2026-07-07 11:57 ET</a:t>
             </a:r>
             <a:endParaRPr lang="en-US" sz="800" dirty="0"/>
           </a:p>
@@ -24559,7 +25648,7 @@
                 <a:ea typeface="Arial" pitchFamily="34" charset="-122"/>
                 <a:cs typeface="Arial" pitchFamily="34" charset="-120"/>
               </a:rPr>
-              <a:t>Federal AAN — Book 03 Certificates &amp; Tokens · CSI Team Draft — Internal · FedRAMP Moderate · Date Code 2026-07-07 10:32 ET</a:t>
+              <a:t>Federal AAN — Book 03 Certificates &amp; Tokens · CSI Team Draft — Internal · FedRAMP Moderate · Date Code 2026-07-07 11:57 ET</a:t>
             </a:r>
             <a:endParaRPr lang="en-US" sz="800" dirty="0"/>
           </a:p>
@@ -26492,7 +27581,7 @@
                 <a:ea typeface="Arial" pitchFamily="34" charset="-122"/>
                 <a:cs typeface="Arial" pitchFamily="34" charset="-120"/>
               </a:rPr>
-              <a:t>Federal AAN — Book 03 Certificates &amp; Tokens · CSI Team Draft — Internal · FedRAMP Moderate · Date Code 2026-07-07 10:32 ET</a:t>
+              <a:t>Federal AAN — Book 03 Certificates &amp; Tokens · CSI Team Draft — Internal · FedRAMP Moderate · Date Code 2026-07-07 11:57 ET</a:t>
             </a:r>
             <a:endParaRPr lang="en-US" sz="800" dirty="0"/>
           </a:p>
@@ -27162,7 +28251,7 @@
                 <a:ea typeface="Arial" pitchFamily="34" charset="-122"/>
                 <a:cs typeface="Arial" pitchFamily="34" charset="-120"/>
               </a:rPr>
-              <a:t>Federal AAN — Book 03 Certificates &amp; Tokens · CSI Team Draft — Internal · FedRAMP Moderate · Date Code 2026-07-07 10:32 ET</a:t>
+              <a:t>Federal AAN — Book 03 Certificates &amp; Tokens · CSI Team Draft — Internal · FedRAMP Moderate · Date Code 2026-07-07 11:57 ET</a:t>
             </a:r>
             <a:endParaRPr lang="en-US" sz="800" dirty="0"/>
           </a:p>
@@ -27863,7 +28952,7 @@
                 <a:ea typeface="Arial" pitchFamily="34" charset="-122"/>
                 <a:cs typeface="Arial" pitchFamily="34" charset="-120"/>
               </a:rPr>
-              <a:t>Federal AAN — Book 03 Certificates &amp; Tokens · CSI Team Draft — Internal · FedRAMP Moderate · Date Code 2026-07-07 10:32 ET</a:t>
+              <a:t>Federal AAN — Book 03 Certificates &amp; Tokens · CSI Team Draft — Internal · FedRAMP Moderate · Date Code 2026-07-07 11:57 ET</a:t>
             </a:r>
             <a:endParaRPr lang="en-US" sz="800" dirty="0"/>
           </a:p>
